--- a/Semana 5/20250915_07_Revisión del Sprint.pptx
+++ b/Semana 5/20250915_07_Revisión del Sprint.pptx
@@ -6,14 +6,18 @@
     <p:sldMasterId id="2147483684" r:id="rId6"/>
     <p:sldMasterId id="2147483708" r:id="rId7"/>
     <p:sldMasterId id="2147483720" r:id="rId8"/>
-    <p:sldMasterId id="2147483858" r:id="rId9"/>
+    <p:sldMasterId id="2147483840" r:id="rId9"/>
   </p:sldMasterIdLst>
   <p:notesMasterIdLst>
-    <p:notesMasterId r:id="rId12"/>
+    <p:notesMasterId r:id="rId16"/>
   </p:notesMasterIdLst>
   <p:sldIdLst>
     <p:sldId id="266" r:id="rId10"/>
     <p:sldId id="271" r:id="rId11"/>
+    <p:sldId id="272" r:id="rId12"/>
+    <p:sldId id="273" r:id="rId13"/>
+    <p:sldId id="274" r:id="rId14"/>
+    <p:sldId id="275" r:id="rId15"/>
   </p:sldIdLst>
   <p:sldSz cx="9144000" cy="6858000" type="screen4x3"/>
   <p:notesSz cx="6858000" cy="9144000"/>
@@ -213,7 +217,7 @@
           <a:p>
             <a:fld id="{59D22397-19D0-43F4-884F-DD192CCA8686}" type="datetimeFigureOut">
               <a:rPr lang="es-PA" smtClean="0"/>
-              <a:t>09/30/2025</a:t>
+              <a:t>10/06/2025</a:t>
             </a:fld>
             <a:endParaRPr lang="es-PA"/>
           </a:p>
@@ -277,35 +281,35 @@
           <a:p>
             <a:pPr lvl="0"/>
             <a:r>
-              <a:rPr lang="en-US"/>
+              <a:rPr lang="en-US" smtClean="0"/>
               <a:t>Click to edit Master text styles</a:t>
             </a:r>
           </a:p>
           <a:p>
             <a:pPr lvl="1"/>
             <a:r>
-              <a:rPr lang="en-US"/>
+              <a:rPr lang="en-US" smtClean="0"/>
               <a:t>Second level</a:t>
             </a:r>
           </a:p>
           <a:p>
             <a:pPr lvl="2"/>
             <a:r>
-              <a:rPr lang="en-US"/>
+              <a:rPr lang="en-US" smtClean="0"/>
               <a:t>Third level</a:t>
             </a:r>
           </a:p>
           <a:p>
             <a:pPr lvl="3"/>
             <a:r>
-              <a:rPr lang="en-US"/>
+              <a:rPr lang="en-US" smtClean="0"/>
               <a:t>Fourth level</a:t>
             </a:r>
           </a:p>
           <a:p>
             <a:pPr lvl="4"/>
             <a:r>
-              <a:rPr lang="en-US"/>
+              <a:rPr lang="en-US" smtClean="0"/>
               <a:t>Fifth level</a:t>
             </a:r>
             <a:endParaRPr lang="es-PA"/>
@@ -610,7 +614,7 @@
           </a:lstStyle>
           <a:p>
             <a:r>
-              <a:rPr lang="es-ES"/>
+              <a:rPr lang="es-ES" smtClean="0"/>
               <a:t>Haga clic para modificar el estilo de título del patrón</a:t>
             </a:r>
             <a:endParaRPr lang="en-US" dirty="0"/>
@@ -678,7 +682,7 @@
           </a:lstStyle>
           <a:p>
             <a:r>
-              <a:rPr lang="es-ES"/>
+              <a:rPr lang="es-ES" smtClean="0"/>
               <a:t>Haga clic para modificar el estilo de subtítulo del patrón</a:t>
             </a:r>
             <a:endParaRPr lang="en-US" dirty="0"/>
@@ -715,7 +719,7 @@
                 </a:solidFill>
               </a:rPr>
               <a:pPr/>
-              <a:t>09/30/2025</a:t>
+              <a:t>10/06/2025</a:t>
             </a:fld>
             <a:endParaRPr lang="es-PA">
               <a:solidFill>
@@ -850,7 +854,7 @@
           <a:lstStyle/>
           <a:p>
             <a:r>
-              <a:rPr lang="es-ES"/>
+              <a:rPr lang="es-ES" smtClean="0"/>
               <a:t>Haga clic para modificar el estilo de título del patrón</a:t>
             </a:r>
             <a:endParaRPr lang="en-US" dirty="0"/>
@@ -882,35 +886,35 @@
           <a:p>
             <a:pPr lvl="0"/>
             <a:r>
-              <a:rPr lang="es-ES"/>
+              <a:rPr lang="es-ES" smtClean="0"/>
               <a:t>Haga clic para modificar el estilo de texto del patrón</a:t>
             </a:r>
           </a:p>
           <a:p>
             <a:pPr lvl="1"/>
             <a:r>
-              <a:rPr lang="es-ES"/>
+              <a:rPr lang="es-ES" smtClean="0"/>
               <a:t>Segundo nivel</a:t>
             </a:r>
           </a:p>
           <a:p>
             <a:pPr lvl="2"/>
             <a:r>
-              <a:rPr lang="es-ES"/>
+              <a:rPr lang="es-ES" smtClean="0"/>
               <a:t>Tercer nivel</a:t>
             </a:r>
           </a:p>
           <a:p>
             <a:pPr lvl="3"/>
             <a:r>
-              <a:rPr lang="es-ES"/>
+              <a:rPr lang="es-ES" smtClean="0"/>
               <a:t>Cuarto nivel</a:t>
             </a:r>
           </a:p>
           <a:p>
             <a:pPr lvl="4"/>
             <a:r>
-              <a:rPr lang="es-ES"/>
+              <a:rPr lang="es-ES" smtClean="0"/>
               <a:t>Quinto nivel</a:t>
             </a:r>
             <a:endParaRPr lang="en-US" dirty="0"/>
@@ -947,7 +951,7 @@
                 </a:solidFill>
               </a:rPr>
               <a:pPr/>
-              <a:t>09/30/2025</a:t>
+              <a:t>10/06/2025</a:t>
             </a:fld>
             <a:endParaRPr lang="es-PA">
               <a:solidFill>
@@ -1082,7 +1086,7 @@
           <a:lstStyle/>
           <a:p>
             <a:r>
-              <a:rPr lang="es-ES"/>
+              <a:rPr lang="es-ES" smtClean="0"/>
               <a:t>Haga clic para modificar el estilo de título del patrón</a:t>
             </a:r>
             <a:endParaRPr lang="en-US" dirty="0"/>
@@ -1114,35 +1118,35 @@
           <a:p>
             <a:pPr lvl="0"/>
             <a:r>
-              <a:rPr lang="es-ES"/>
+              <a:rPr lang="es-ES" smtClean="0"/>
               <a:t>Haga clic para modificar el estilo de texto del patrón</a:t>
             </a:r>
           </a:p>
           <a:p>
             <a:pPr lvl="1"/>
             <a:r>
-              <a:rPr lang="es-ES"/>
+              <a:rPr lang="es-ES" smtClean="0"/>
               <a:t>Segundo nivel</a:t>
             </a:r>
           </a:p>
           <a:p>
             <a:pPr lvl="2"/>
             <a:r>
-              <a:rPr lang="es-ES"/>
+              <a:rPr lang="es-ES" smtClean="0"/>
               <a:t>Tercer nivel</a:t>
             </a:r>
           </a:p>
           <a:p>
             <a:pPr lvl="3"/>
             <a:r>
-              <a:rPr lang="es-ES"/>
+              <a:rPr lang="es-ES" smtClean="0"/>
               <a:t>Cuarto nivel</a:t>
             </a:r>
           </a:p>
           <a:p>
             <a:pPr lvl="4"/>
             <a:r>
-              <a:rPr lang="es-ES"/>
+              <a:rPr lang="es-ES" smtClean="0"/>
               <a:t>Quinto nivel</a:t>
             </a:r>
             <a:endParaRPr lang="en-US" dirty="0"/>
@@ -1179,7 +1183,7 @@
                 </a:solidFill>
               </a:rPr>
               <a:pPr/>
-              <a:t>09/30/2025</a:t>
+              <a:t>10/06/2025</a:t>
             </a:fld>
             <a:endParaRPr lang="es-PA">
               <a:solidFill>
@@ -1318,7 +1322,7 @@
           </a:lstStyle>
           <a:p>
             <a:r>
-              <a:rPr lang="es-ES"/>
+              <a:rPr lang="es-ES" smtClean="0"/>
               <a:t>Haga clic para modificar el estilo de título del patrón</a:t>
             </a:r>
             <a:endParaRPr lang="es-PA"/>
@@ -1386,7 +1390,7 @@
           </a:lstStyle>
           <a:p>
             <a:r>
-              <a:rPr lang="es-ES"/>
+              <a:rPr lang="es-ES" smtClean="0"/>
               <a:t>Haga clic para modificar el estilo de subtítulo del patrón</a:t>
             </a:r>
             <a:endParaRPr lang="es-PA"/>
@@ -1423,7 +1427,7 @@
                 </a:solidFill>
               </a:rPr>
               <a:pPr/>
-              <a:t>09/30/2025</a:t>
+              <a:t>10/06/2025</a:t>
             </a:fld>
             <a:endParaRPr lang="es-PA">
               <a:solidFill>
@@ -1558,7 +1562,7 @@
           <a:lstStyle/>
           <a:p>
             <a:r>
-              <a:rPr lang="es-ES"/>
+              <a:rPr lang="es-ES" smtClean="0"/>
               <a:t>Haga clic para modificar el estilo de título del patrón</a:t>
             </a:r>
             <a:endParaRPr lang="es-PA"/>
@@ -1590,35 +1594,35 @@
           <a:p>
             <a:pPr lvl="0"/>
             <a:r>
-              <a:rPr lang="es-ES"/>
+              <a:rPr lang="es-ES" smtClean="0"/>
               <a:t>Haga clic para modificar el estilo de texto del patrón</a:t>
             </a:r>
           </a:p>
           <a:p>
             <a:pPr lvl="1"/>
             <a:r>
-              <a:rPr lang="es-ES"/>
+              <a:rPr lang="es-ES" smtClean="0"/>
               <a:t>Segundo nivel</a:t>
             </a:r>
           </a:p>
           <a:p>
             <a:pPr lvl="2"/>
             <a:r>
-              <a:rPr lang="es-ES"/>
+              <a:rPr lang="es-ES" smtClean="0"/>
               <a:t>Tercer nivel</a:t>
             </a:r>
           </a:p>
           <a:p>
             <a:pPr lvl="3"/>
             <a:r>
-              <a:rPr lang="es-ES"/>
+              <a:rPr lang="es-ES" smtClean="0"/>
               <a:t>Cuarto nivel</a:t>
             </a:r>
           </a:p>
           <a:p>
             <a:pPr lvl="4"/>
             <a:r>
-              <a:rPr lang="es-ES"/>
+              <a:rPr lang="es-ES" smtClean="0"/>
               <a:t>Quinto nivel</a:t>
             </a:r>
             <a:endParaRPr lang="es-PA"/>
@@ -1655,7 +1659,7 @@
                 </a:solidFill>
               </a:rPr>
               <a:pPr/>
-              <a:t>09/30/2025</a:t>
+              <a:t>10/06/2025</a:t>
             </a:fld>
             <a:endParaRPr lang="es-PA">
               <a:solidFill>
@@ -1794,7 +1798,7 @@
           </a:lstStyle>
           <a:p>
             <a:r>
-              <a:rPr lang="es-ES"/>
+              <a:rPr lang="es-ES" smtClean="0"/>
               <a:t>Haga clic para modificar el estilo de título del patrón</a:t>
             </a:r>
             <a:endParaRPr lang="es-PA"/>
@@ -1917,7 +1921,7 @@
           <a:p>
             <a:pPr lvl="0"/>
             <a:r>
-              <a:rPr lang="es-ES"/>
+              <a:rPr lang="es-ES" smtClean="0"/>
               <a:t>Haga clic para modificar el estilo de texto del patrón</a:t>
             </a:r>
           </a:p>
@@ -1953,7 +1957,7 @@
                 </a:solidFill>
               </a:rPr>
               <a:pPr/>
-              <a:t>09/30/2025</a:t>
+              <a:t>10/06/2025</a:t>
             </a:fld>
             <a:endParaRPr lang="es-PA">
               <a:solidFill>
@@ -2088,7 +2092,7 @@
           <a:lstStyle/>
           <a:p>
             <a:r>
-              <a:rPr lang="es-ES"/>
+              <a:rPr lang="es-ES" smtClean="0"/>
               <a:t>Haga clic para modificar el estilo de título del patrón</a:t>
             </a:r>
             <a:endParaRPr lang="es-PA"/>
@@ -2120,35 +2124,35 @@
           <a:p>
             <a:pPr lvl="0"/>
             <a:r>
-              <a:rPr lang="es-ES"/>
+              <a:rPr lang="es-ES" smtClean="0"/>
               <a:t>Haga clic para modificar el estilo de texto del patrón</a:t>
             </a:r>
           </a:p>
           <a:p>
             <a:pPr lvl="1"/>
             <a:r>
-              <a:rPr lang="es-ES"/>
+              <a:rPr lang="es-ES" smtClean="0"/>
               <a:t>Segundo nivel</a:t>
             </a:r>
           </a:p>
           <a:p>
             <a:pPr lvl="2"/>
             <a:r>
-              <a:rPr lang="es-ES"/>
+              <a:rPr lang="es-ES" smtClean="0"/>
               <a:t>Tercer nivel</a:t>
             </a:r>
           </a:p>
           <a:p>
             <a:pPr lvl="3"/>
             <a:r>
-              <a:rPr lang="es-ES"/>
+              <a:rPr lang="es-ES" smtClean="0"/>
               <a:t>Cuarto nivel</a:t>
             </a:r>
           </a:p>
           <a:p>
             <a:pPr lvl="4"/>
             <a:r>
-              <a:rPr lang="es-ES"/>
+              <a:rPr lang="es-ES" smtClean="0"/>
               <a:t>Quinto nivel</a:t>
             </a:r>
             <a:endParaRPr lang="es-PA"/>
@@ -2180,35 +2184,35 @@
           <a:p>
             <a:pPr lvl="0"/>
             <a:r>
-              <a:rPr lang="es-ES"/>
+              <a:rPr lang="es-ES" smtClean="0"/>
               <a:t>Haga clic para modificar el estilo de texto del patrón</a:t>
             </a:r>
           </a:p>
           <a:p>
             <a:pPr lvl="1"/>
             <a:r>
-              <a:rPr lang="es-ES"/>
+              <a:rPr lang="es-ES" smtClean="0"/>
               <a:t>Segundo nivel</a:t>
             </a:r>
           </a:p>
           <a:p>
             <a:pPr lvl="2"/>
             <a:r>
-              <a:rPr lang="es-ES"/>
+              <a:rPr lang="es-ES" smtClean="0"/>
               <a:t>Tercer nivel</a:t>
             </a:r>
           </a:p>
           <a:p>
             <a:pPr lvl="3"/>
             <a:r>
-              <a:rPr lang="es-ES"/>
+              <a:rPr lang="es-ES" smtClean="0"/>
               <a:t>Cuarto nivel</a:t>
             </a:r>
           </a:p>
           <a:p>
             <a:pPr lvl="4"/>
             <a:r>
-              <a:rPr lang="es-ES"/>
+              <a:rPr lang="es-ES" smtClean="0"/>
               <a:t>Quinto nivel</a:t>
             </a:r>
             <a:endParaRPr lang="es-PA"/>
@@ -2245,7 +2249,7 @@
                 </a:solidFill>
               </a:rPr>
               <a:pPr/>
-              <a:t>09/30/2025</a:t>
+              <a:t>10/06/2025</a:t>
             </a:fld>
             <a:endParaRPr lang="es-PA">
               <a:solidFill>
@@ -2380,7 +2384,7 @@
           <a:lstStyle/>
           <a:p>
             <a:r>
-              <a:rPr lang="es-ES"/>
+              <a:rPr lang="es-ES" smtClean="0"/>
               <a:t>Haga clic para modificar el estilo de título del patrón</a:t>
             </a:r>
             <a:endParaRPr lang="es-PA"/>
@@ -2449,7 +2453,7 @@
           <a:p>
             <a:pPr lvl="0"/>
             <a:r>
-              <a:rPr lang="es-ES"/>
+              <a:rPr lang="es-ES" smtClean="0"/>
               <a:t>Haga clic para modificar el estilo de texto del patrón</a:t>
             </a:r>
           </a:p>
@@ -2480,35 +2484,35 @@
           <a:p>
             <a:pPr lvl="0"/>
             <a:r>
-              <a:rPr lang="es-ES"/>
+              <a:rPr lang="es-ES" smtClean="0"/>
               <a:t>Haga clic para modificar el estilo de texto del patrón</a:t>
             </a:r>
           </a:p>
           <a:p>
             <a:pPr lvl="1"/>
             <a:r>
-              <a:rPr lang="es-ES"/>
+              <a:rPr lang="es-ES" smtClean="0"/>
               <a:t>Segundo nivel</a:t>
             </a:r>
           </a:p>
           <a:p>
             <a:pPr lvl="2"/>
             <a:r>
-              <a:rPr lang="es-ES"/>
+              <a:rPr lang="es-ES" smtClean="0"/>
               <a:t>Tercer nivel</a:t>
             </a:r>
           </a:p>
           <a:p>
             <a:pPr lvl="3"/>
             <a:r>
-              <a:rPr lang="es-ES"/>
+              <a:rPr lang="es-ES" smtClean="0"/>
               <a:t>Cuarto nivel</a:t>
             </a:r>
           </a:p>
           <a:p>
             <a:pPr lvl="4"/>
             <a:r>
-              <a:rPr lang="es-ES"/>
+              <a:rPr lang="es-ES" smtClean="0"/>
               <a:t>Quinto nivel</a:t>
             </a:r>
             <a:endParaRPr lang="es-PA"/>
@@ -2577,7 +2581,7 @@
           <a:p>
             <a:pPr lvl="0"/>
             <a:r>
-              <a:rPr lang="es-ES"/>
+              <a:rPr lang="es-ES" smtClean="0"/>
               <a:t>Haga clic para modificar el estilo de texto del patrón</a:t>
             </a:r>
           </a:p>
@@ -2608,35 +2612,35 @@
           <a:p>
             <a:pPr lvl="0"/>
             <a:r>
-              <a:rPr lang="es-ES"/>
+              <a:rPr lang="es-ES" smtClean="0"/>
               <a:t>Haga clic para modificar el estilo de texto del patrón</a:t>
             </a:r>
           </a:p>
           <a:p>
             <a:pPr lvl="1"/>
             <a:r>
-              <a:rPr lang="es-ES"/>
+              <a:rPr lang="es-ES" smtClean="0"/>
               <a:t>Segundo nivel</a:t>
             </a:r>
           </a:p>
           <a:p>
             <a:pPr lvl="2"/>
             <a:r>
-              <a:rPr lang="es-ES"/>
+              <a:rPr lang="es-ES" smtClean="0"/>
               <a:t>Tercer nivel</a:t>
             </a:r>
           </a:p>
           <a:p>
             <a:pPr lvl="3"/>
             <a:r>
-              <a:rPr lang="es-ES"/>
+              <a:rPr lang="es-ES" smtClean="0"/>
               <a:t>Cuarto nivel</a:t>
             </a:r>
           </a:p>
           <a:p>
             <a:pPr lvl="4"/>
             <a:r>
-              <a:rPr lang="es-ES"/>
+              <a:rPr lang="es-ES" smtClean="0"/>
               <a:t>Quinto nivel</a:t>
             </a:r>
             <a:endParaRPr lang="es-PA"/>
@@ -2673,7 +2677,7 @@
                 </a:solidFill>
               </a:rPr>
               <a:pPr/>
-              <a:t>09/30/2025</a:t>
+              <a:t>10/06/2025</a:t>
             </a:fld>
             <a:endParaRPr lang="es-PA">
               <a:solidFill>
@@ -2808,7 +2812,7 @@
           <a:lstStyle/>
           <a:p>
             <a:r>
-              <a:rPr lang="es-ES"/>
+              <a:rPr lang="es-ES" smtClean="0"/>
               <a:t>Haga clic para modificar el estilo de título del patrón</a:t>
             </a:r>
             <a:endParaRPr lang="es-PA"/>
@@ -2845,7 +2849,7 @@
                 </a:solidFill>
               </a:rPr>
               <a:pPr/>
-              <a:t>09/30/2025</a:t>
+              <a:t>10/06/2025</a:t>
             </a:fld>
             <a:endParaRPr lang="es-PA">
               <a:solidFill>
@@ -2986,7 +2990,7 @@
                 </a:solidFill>
               </a:rPr>
               <a:pPr/>
-              <a:t>09/30/2025</a:t>
+              <a:t>10/06/2025</a:t>
             </a:fld>
             <a:endParaRPr lang="es-PA">
               <a:solidFill>
@@ -3125,7 +3129,7 @@
           </a:lstStyle>
           <a:p>
             <a:r>
-              <a:rPr lang="es-ES"/>
+              <a:rPr lang="es-ES" smtClean="0"/>
               <a:t>Haga clic para modificar el estilo de título del patrón</a:t>
             </a:r>
             <a:endParaRPr lang="es-PA"/>
@@ -3185,35 +3189,35 @@
           <a:p>
             <a:pPr lvl="0"/>
             <a:r>
-              <a:rPr lang="es-ES"/>
+              <a:rPr lang="es-ES" smtClean="0"/>
               <a:t>Haga clic para modificar el estilo de texto del patrón</a:t>
             </a:r>
           </a:p>
           <a:p>
             <a:pPr lvl="1"/>
             <a:r>
-              <a:rPr lang="es-ES"/>
+              <a:rPr lang="es-ES" smtClean="0"/>
               <a:t>Segundo nivel</a:t>
             </a:r>
           </a:p>
           <a:p>
             <a:pPr lvl="2"/>
             <a:r>
-              <a:rPr lang="es-ES"/>
+              <a:rPr lang="es-ES" smtClean="0"/>
               <a:t>Tercer nivel</a:t>
             </a:r>
           </a:p>
           <a:p>
             <a:pPr lvl="3"/>
             <a:r>
-              <a:rPr lang="es-ES"/>
+              <a:rPr lang="es-ES" smtClean="0"/>
               <a:t>Cuarto nivel</a:t>
             </a:r>
           </a:p>
           <a:p>
             <a:pPr lvl="4"/>
             <a:r>
-              <a:rPr lang="es-ES"/>
+              <a:rPr lang="es-ES" smtClean="0"/>
               <a:t>Quinto nivel</a:t>
             </a:r>
             <a:endParaRPr lang="es-PA"/>
@@ -3282,7 +3286,7 @@
           <a:p>
             <a:pPr lvl="0"/>
             <a:r>
-              <a:rPr lang="es-ES"/>
+              <a:rPr lang="es-ES" smtClean="0"/>
               <a:t>Haga clic para modificar el estilo de texto del patrón</a:t>
             </a:r>
           </a:p>
@@ -3318,7 +3322,7 @@
                 </a:solidFill>
               </a:rPr>
               <a:pPr/>
-              <a:t>09/30/2025</a:t>
+              <a:t>10/06/2025</a:t>
             </a:fld>
             <a:endParaRPr lang="es-PA">
               <a:solidFill>
@@ -3453,7 +3457,7 @@
           <a:lstStyle/>
           <a:p>
             <a:r>
-              <a:rPr lang="es-ES"/>
+              <a:rPr lang="es-ES" smtClean="0"/>
               <a:t>Haga clic para modificar el estilo de título del patrón</a:t>
             </a:r>
             <a:endParaRPr lang="en-US" dirty="0"/>
@@ -3485,35 +3489,35 @@
           <a:p>
             <a:pPr lvl="0"/>
             <a:r>
-              <a:rPr lang="es-ES"/>
+              <a:rPr lang="es-ES" smtClean="0"/>
               <a:t>Haga clic para modificar el estilo de texto del patrón</a:t>
             </a:r>
           </a:p>
           <a:p>
             <a:pPr lvl="1"/>
             <a:r>
-              <a:rPr lang="es-ES"/>
+              <a:rPr lang="es-ES" smtClean="0"/>
               <a:t>Segundo nivel</a:t>
             </a:r>
           </a:p>
           <a:p>
             <a:pPr lvl="2"/>
             <a:r>
-              <a:rPr lang="es-ES"/>
+              <a:rPr lang="es-ES" smtClean="0"/>
               <a:t>Tercer nivel</a:t>
             </a:r>
           </a:p>
           <a:p>
             <a:pPr lvl="3"/>
             <a:r>
-              <a:rPr lang="es-ES"/>
+              <a:rPr lang="es-ES" smtClean="0"/>
               <a:t>Cuarto nivel</a:t>
             </a:r>
           </a:p>
           <a:p>
             <a:pPr lvl="4"/>
             <a:r>
-              <a:rPr lang="es-ES"/>
+              <a:rPr lang="es-ES" smtClean="0"/>
               <a:t>Quinto nivel</a:t>
             </a:r>
             <a:endParaRPr lang="en-US" dirty="0"/>
@@ -3550,7 +3554,7 @@
                 </a:solidFill>
               </a:rPr>
               <a:pPr/>
-              <a:t>09/30/2025</a:t>
+              <a:t>10/06/2025</a:t>
             </a:fld>
             <a:endParaRPr lang="es-PA">
               <a:solidFill>
@@ -3689,7 +3693,7 @@
           </a:lstStyle>
           <a:p>
             <a:r>
-              <a:rPr lang="es-ES"/>
+              <a:rPr lang="es-ES" smtClean="0"/>
               <a:t>Haga clic para modificar el estilo de título del patrón</a:t>
             </a:r>
             <a:endParaRPr lang="es-PA"/>
@@ -3822,7 +3826,7 @@
           <a:p>
             <a:pPr lvl="0"/>
             <a:r>
-              <a:rPr lang="es-ES"/>
+              <a:rPr lang="es-ES" smtClean="0"/>
               <a:t>Haga clic para modificar el estilo de texto del patrón</a:t>
             </a:r>
           </a:p>
@@ -3858,7 +3862,7 @@
                 </a:solidFill>
               </a:rPr>
               <a:pPr/>
-              <a:t>09/30/2025</a:t>
+              <a:t>10/06/2025</a:t>
             </a:fld>
             <a:endParaRPr lang="es-PA">
               <a:solidFill>
@@ -3993,7 +3997,7 @@
           <a:lstStyle/>
           <a:p>
             <a:r>
-              <a:rPr lang="es-ES"/>
+              <a:rPr lang="es-ES" smtClean="0"/>
               <a:t>Haga clic para modificar el estilo de título del patrón</a:t>
             </a:r>
             <a:endParaRPr lang="es-PA"/>
@@ -4025,35 +4029,35 @@
           <a:p>
             <a:pPr lvl="0"/>
             <a:r>
-              <a:rPr lang="es-ES"/>
+              <a:rPr lang="es-ES" smtClean="0"/>
               <a:t>Haga clic para modificar el estilo de texto del patrón</a:t>
             </a:r>
           </a:p>
           <a:p>
             <a:pPr lvl="1"/>
             <a:r>
-              <a:rPr lang="es-ES"/>
+              <a:rPr lang="es-ES" smtClean="0"/>
               <a:t>Segundo nivel</a:t>
             </a:r>
           </a:p>
           <a:p>
             <a:pPr lvl="2"/>
             <a:r>
-              <a:rPr lang="es-ES"/>
+              <a:rPr lang="es-ES" smtClean="0"/>
               <a:t>Tercer nivel</a:t>
             </a:r>
           </a:p>
           <a:p>
             <a:pPr lvl="3"/>
             <a:r>
-              <a:rPr lang="es-ES"/>
+              <a:rPr lang="es-ES" smtClean="0"/>
               <a:t>Cuarto nivel</a:t>
             </a:r>
           </a:p>
           <a:p>
             <a:pPr lvl="4"/>
             <a:r>
-              <a:rPr lang="es-ES"/>
+              <a:rPr lang="es-ES" smtClean="0"/>
               <a:t>Quinto nivel</a:t>
             </a:r>
             <a:endParaRPr lang="es-PA"/>
@@ -4090,7 +4094,7 @@
                 </a:solidFill>
               </a:rPr>
               <a:pPr/>
-              <a:t>09/30/2025</a:t>
+              <a:t>10/06/2025</a:t>
             </a:fld>
             <a:endParaRPr lang="es-PA">
               <a:solidFill>
@@ -4225,7 +4229,7 @@
           <a:lstStyle/>
           <a:p>
             <a:r>
-              <a:rPr lang="es-ES"/>
+              <a:rPr lang="es-ES" smtClean="0"/>
               <a:t>Haga clic para modificar el estilo de título del patrón</a:t>
             </a:r>
             <a:endParaRPr lang="es-PA"/>
@@ -4257,35 +4261,35 @@
           <a:p>
             <a:pPr lvl="0"/>
             <a:r>
-              <a:rPr lang="es-ES"/>
+              <a:rPr lang="es-ES" smtClean="0"/>
               <a:t>Haga clic para modificar el estilo de texto del patrón</a:t>
             </a:r>
           </a:p>
           <a:p>
             <a:pPr lvl="1"/>
             <a:r>
-              <a:rPr lang="es-ES"/>
+              <a:rPr lang="es-ES" smtClean="0"/>
               <a:t>Segundo nivel</a:t>
             </a:r>
           </a:p>
           <a:p>
             <a:pPr lvl="2"/>
             <a:r>
-              <a:rPr lang="es-ES"/>
+              <a:rPr lang="es-ES" smtClean="0"/>
               <a:t>Tercer nivel</a:t>
             </a:r>
           </a:p>
           <a:p>
             <a:pPr lvl="3"/>
             <a:r>
-              <a:rPr lang="es-ES"/>
+              <a:rPr lang="es-ES" smtClean="0"/>
               <a:t>Cuarto nivel</a:t>
             </a:r>
           </a:p>
           <a:p>
             <a:pPr lvl="4"/>
             <a:r>
-              <a:rPr lang="es-ES"/>
+              <a:rPr lang="es-ES" smtClean="0"/>
               <a:t>Quinto nivel</a:t>
             </a:r>
             <a:endParaRPr lang="es-PA"/>
@@ -4322,7 +4326,7 @@
                 </a:solidFill>
               </a:rPr>
               <a:pPr/>
-              <a:t>09/30/2025</a:t>
+              <a:t>10/06/2025</a:t>
             </a:fld>
             <a:endParaRPr lang="es-PA">
               <a:solidFill>
@@ -4461,7 +4465,7 @@
           </a:lstStyle>
           <a:p>
             <a:r>
-              <a:rPr lang="es-ES"/>
+              <a:rPr lang="es-ES" smtClean="0"/>
               <a:t>Haga clic para modificar el estilo de título del patrón</a:t>
             </a:r>
             <a:endParaRPr lang="en-US" dirty="0"/>
@@ -4529,7 +4533,7 @@
           </a:lstStyle>
           <a:p>
             <a:r>
-              <a:rPr lang="es-ES"/>
+              <a:rPr lang="es-ES" smtClean="0"/>
               <a:t>Haga clic para modificar el estilo de subtítulo del patrón</a:t>
             </a:r>
             <a:endParaRPr lang="en-US" dirty="0"/>
@@ -4566,7 +4570,7 @@
                 </a:solidFill>
               </a:rPr>
               <a:pPr/>
-              <a:t>09/30/2025</a:t>
+              <a:t>10/06/2025</a:t>
             </a:fld>
             <a:endParaRPr lang="es-PA">
               <a:solidFill>
@@ -4701,7 +4705,7 @@
           <a:lstStyle/>
           <a:p>
             <a:r>
-              <a:rPr lang="es-ES"/>
+              <a:rPr lang="es-ES" smtClean="0"/>
               <a:t>Haga clic para modificar el estilo de título del patrón</a:t>
             </a:r>
             <a:endParaRPr lang="en-US" dirty="0"/>
@@ -4733,35 +4737,35 @@
           <a:p>
             <a:pPr lvl="0"/>
             <a:r>
-              <a:rPr lang="es-ES"/>
+              <a:rPr lang="es-ES" smtClean="0"/>
               <a:t>Haga clic para modificar el estilo de texto del patrón</a:t>
             </a:r>
           </a:p>
           <a:p>
             <a:pPr lvl="1"/>
             <a:r>
-              <a:rPr lang="es-ES"/>
+              <a:rPr lang="es-ES" smtClean="0"/>
               <a:t>Segundo nivel</a:t>
             </a:r>
           </a:p>
           <a:p>
             <a:pPr lvl="2"/>
             <a:r>
-              <a:rPr lang="es-ES"/>
+              <a:rPr lang="es-ES" smtClean="0"/>
               <a:t>Tercer nivel</a:t>
             </a:r>
           </a:p>
           <a:p>
             <a:pPr lvl="3"/>
             <a:r>
-              <a:rPr lang="es-ES"/>
+              <a:rPr lang="es-ES" smtClean="0"/>
               <a:t>Cuarto nivel</a:t>
             </a:r>
           </a:p>
           <a:p>
             <a:pPr lvl="4"/>
             <a:r>
-              <a:rPr lang="es-ES"/>
+              <a:rPr lang="es-ES" smtClean="0"/>
               <a:t>Quinto nivel</a:t>
             </a:r>
             <a:endParaRPr lang="en-US" dirty="0"/>
@@ -4798,7 +4802,7 @@
                 </a:solidFill>
               </a:rPr>
               <a:pPr/>
-              <a:t>09/30/2025</a:t>
+              <a:t>10/06/2025</a:t>
             </a:fld>
             <a:endParaRPr lang="es-PA">
               <a:solidFill>
@@ -4937,7 +4941,7 @@
           </a:lstStyle>
           <a:p>
             <a:r>
-              <a:rPr lang="es-ES"/>
+              <a:rPr lang="es-ES" smtClean="0"/>
               <a:t>Haga clic para modificar el estilo de título del patrón</a:t>
             </a:r>
             <a:endParaRPr lang="en-US" dirty="0"/>
@@ -5058,7 +5062,7 @@
           <a:p>
             <a:pPr lvl="0"/>
             <a:r>
-              <a:rPr lang="es-ES"/>
+              <a:rPr lang="es-ES" smtClean="0"/>
               <a:t>Haga clic para modificar el estilo de texto del patrón</a:t>
             </a:r>
           </a:p>
@@ -5094,7 +5098,7 @@
                 </a:solidFill>
               </a:rPr>
               <a:pPr/>
-              <a:t>09/30/2025</a:t>
+              <a:t>10/06/2025</a:t>
             </a:fld>
             <a:endParaRPr lang="es-PA">
               <a:solidFill>
@@ -5229,7 +5233,7 @@
           <a:lstStyle/>
           <a:p>
             <a:r>
-              <a:rPr lang="es-ES"/>
+              <a:rPr lang="es-ES" smtClean="0"/>
               <a:t>Haga clic para modificar el estilo de título del patrón</a:t>
             </a:r>
             <a:endParaRPr lang="en-US" dirty="0"/>
@@ -5261,35 +5265,35 @@
           <a:p>
             <a:pPr lvl="0"/>
             <a:r>
-              <a:rPr lang="es-ES"/>
+              <a:rPr lang="es-ES" smtClean="0"/>
               <a:t>Haga clic para modificar el estilo de texto del patrón</a:t>
             </a:r>
           </a:p>
           <a:p>
             <a:pPr lvl="1"/>
             <a:r>
-              <a:rPr lang="es-ES"/>
+              <a:rPr lang="es-ES" smtClean="0"/>
               <a:t>Segundo nivel</a:t>
             </a:r>
           </a:p>
           <a:p>
             <a:pPr lvl="2"/>
             <a:r>
-              <a:rPr lang="es-ES"/>
+              <a:rPr lang="es-ES" smtClean="0"/>
               <a:t>Tercer nivel</a:t>
             </a:r>
           </a:p>
           <a:p>
             <a:pPr lvl="3"/>
             <a:r>
-              <a:rPr lang="es-ES"/>
+              <a:rPr lang="es-ES" smtClean="0"/>
               <a:t>Cuarto nivel</a:t>
             </a:r>
           </a:p>
           <a:p>
             <a:pPr lvl="4"/>
             <a:r>
-              <a:rPr lang="es-ES"/>
+              <a:rPr lang="es-ES" smtClean="0"/>
               <a:t>Quinto nivel</a:t>
             </a:r>
             <a:endParaRPr lang="en-US" dirty="0"/>
@@ -5321,35 +5325,35 @@
           <a:p>
             <a:pPr lvl="0"/>
             <a:r>
-              <a:rPr lang="es-ES"/>
+              <a:rPr lang="es-ES" smtClean="0"/>
               <a:t>Haga clic para modificar el estilo de texto del patrón</a:t>
             </a:r>
           </a:p>
           <a:p>
             <a:pPr lvl="1"/>
             <a:r>
-              <a:rPr lang="es-ES"/>
+              <a:rPr lang="es-ES" smtClean="0"/>
               <a:t>Segundo nivel</a:t>
             </a:r>
           </a:p>
           <a:p>
             <a:pPr lvl="2"/>
             <a:r>
-              <a:rPr lang="es-ES"/>
+              <a:rPr lang="es-ES" smtClean="0"/>
               <a:t>Tercer nivel</a:t>
             </a:r>
           </a:p>
           <a:p>
             <a:pPr lvl="3"/>
             <a:r>
-              <a:rPr lang="es-ES"/>
+              <a:rPr lang="es-ES" smtClean="0"/>
               <a:t>Cuarto nivel</a:t>
             </a:r>
           </a:p>
           <a:p>
             <a:pPr lvl="4"/>
             <a:r>
-              <a:rPr lang="es-ES"/>
+              <a:rPr lang="es-ES" smtClean="0"/>
               <a:t>Quinto nivel</a:t>
             </a:r>
             <a:endParaRPr lang="en-US" dirty="0"/>
@@ -5386,7 +5390,7 @@
                 </a:solidFill>
               </a:rPr>
               <a:pPr/>
-              <a:t>09/30/2025</a:t>
+              <a:t>10/06/2025</a:t>
             </a:fld>
             <a:endParaRPr lang="es-PA">
               <a:solidFill>
@@ -5521,7 +5525,7 @@
           <a:lstStyle/>
           <a:p>
             <a:r>
-              <a:rPr lang="es-ES"/>
+              <a:rPr lang="es-ES" smtClean="0"/>
               <a:t>Haga clic para modificar el estilo de título del patrón</a:t>
             </a:r>
             <a:endParaRPr lang="en-US" dirty="0"/>
@@ -5590,7 +5594,7 @@
           <a:p>
             <a:pPr lvl="0"/>
             <a:r>
-              <a:rPr lang="es-ES"/>
+              <a:rPr lang="es-ES" smtClean="0"/>
               <a:t>Haga clic para modificar el estilo de texto del patrón</a:t>
             </a:r>
           </a:p>
@@ -5621,35 +5625,35 @@
           <a:p>
             <a:pPr lvl="0"/>
             <a:r>
-              <a:rPr lang="es-ES"/>
+              <a:rPr lang="es-ES" smtClean="0"/>
               <a:t>Haga clic para modificar el estilo de texto del patrón</a:t>
             </a:r>
           </a:p>
           <a:p>
             <a:pPr lvl="1"/>
             <a:r>
-              <a:rPr lang="es-ES"/>
+              <a:rPr lang="es-ES" smtClean="0"/>
               <a:t>Segundo nivel</a:t>
             </a:r>
           </a:p>
           <a:p>
             <a:pPr lvl="2"/>
             <a:r>
-              <a:rPr lang="es-ES"/>
+              <a:rPr lang="es-ES" smtClean="0"/>
               <a:t>Tercer nivel</a:t>
             </a:r>
           </a:p>
           <a:p>
             <a:pPr lvl="3"/>
             <a:r>
-              <a:rPr lang="es-ES"/>
+              <a:rPr lang="es-ES" smtClean="0"/>
               <a:t>Cuarto nivel</a:t>
             </a:r>
           </a:p>
           <a:p>
             <a:pPr lvl="4"/>
             <a:r>
-              <a:rPr lang="es-ES"/>
+              <a:rPr lang="es-ES" smtClean="0"/>
               <a:t>Quinto nivel</a:t>
             </a:r>
             <a:endParaRPr lang="en-US" dirty="0"/>
@@ -5718,7 +5722,7 @@
           <a:p>
             <a:pPr lvl="0"/>
             <a:r>
-              <a:rPr lang="es-ES"/>
+              <a:rPr lang="es-ES" smtClean="0"/>
               <a:t>Haga clic para modificar el estilo de texto del patrón</a:t>
             </a:r>
           </a:p>
@@ -5749,35 +5753,35 @@
           <a:p>
             <a:pPr lvl="0"/>
             <a:r>
-              <a:rPr lang="es-ES"/>
+              <a:rPr lang="es-ES" smtClean="0"/>
               <a:t>Haga clic para modificar el estilo de texto del patrón</a:t>
             </a:r>
           </a:p>
           <a:p>
             <a:pPr lvl="1"/>
             <a:r>
-              <a:rPr lang="es-ES"/>
+              <a:rPr lang="es-ES" smtClean="0"/>
               <a:t>Segundo nivel</a:t>
             </a:r>
           </a:p>
           <a:p>
             <a:pPr lvl="2"/>
             <a:r>
-              <a:rPr lang="es-ES"/>
+              <a:rPr lang="es-ES" smtClean="0"/>
               <a:t>Tercer nivel</a:t>
             </a:r>
           </a:p>
           <a:p>
             <a:pPr lvl="3"/>
             <a:r>
-              <a:rPr lang="es-ES"/>
+              <a:rPr lang="es-ES" smtClean="0"/>
               <a:t>Cuarto nivel</a:t>
             </a:r>
           </a:p>
           <a:p>
             <a:pPr lvl="4"/>
             <a:r>
-              <a:rPr lang="es-ES"/>
+              <a:rPr lang="es-ES" smtClean="0"/>
               <a:t>Quinto nivel</a:t>
             </a:r>
             <a:endParaRPr lang="en-US" dirty="0"/>
@@ -5814,7 +5818,7 @@
                 </a:solidFill>
               </a:rPr>
               <a:pPr/>
-              <a:t>09/30/2025</a:t>
+              <a:t>10/06/2025</a:t>
             </a:fld>
             <a:endParaRPr lang="es-PA">
               <a:solidFill>
@@ -5949,7 +5953,7 @@
           <a:lstStyle/>
           <a:p>
             <a:r>
-              <a:rPr lang="es-ES"/>
+              <a:rPr lang="es-ES" smtClean="0"/>
               <a:t>Haga clic para modificar el estilo de título del patrón</a:t>
             </a:r>
             <a:endParaRPr lang="en-US" dirty="0"/>
@@ -5986,7 +5990,7 @@
                 </a:solidFill>
               </a:rPr>
               <a:pPr/>
-              <a:t>09/30/2025</a:t>
+              <a:t>10/06/2025</a:t>
             </a:fld>
             <a:endParaRPr lang="es-PA">
               <a:solidFill>
@@ -6127,7 +6131,7 @@
                 </a:solidFill>
               </a:rPr>
               <a:pPr/>
-              <a:t>09/30/2025</a:t>
+              <a:t>10/06/2025</a:t>
             </a:fld>
             <a:endParaRPr lang="es-PA">
               <a:solidFill>
@@ -6266,7 +6270,7 @@
           </a:lstStyle>
           <a:p>
             <a:r>
-              <a:rPr lang="es-ES"/>
+              <a:rPr lang="es-ES" smtClean="0"/>
               <a:t>Haga clic para modificar el estilo de título del patrón</a:t>
             </a:r>
             <a:endParaRPr lang="en-US" dirty="0"/>
@@ -6387,7 +6391,7 @@
           <a:p>
             <a:pPr lvl="0"/>
             <a:r>
-              <a:rPr lang="es-ES"/>
+              <a:rPr lang="es-ES" smtClean="0"/>
               <a:t>Haga clic para modificar el estilo de texto del patrón</a:t>
             </a:r>
           </a:p>
@@ -6423,7 +6427,7 @@
                 </a:solidFill>
               </a:rPr>
               <a:pPr/>
-              <a:t>09/30/2025</a:t>
+              <a:t>10/06/2025</a:t>
             </a:fld>
             <a:endParaRPr lang="es-PA">
               <a:solidFill>
@@ -6562,7 +6566,7 @@
           </a:lstStyle>
           <a:p>
             <a:r>
-              <a:rPr lang="es-ES"/>
+              <a:rPr lang="es-ES" smtClean="0"/>
               <a:t>Haga clic para modificar el estilo de título del patrón</a:t>
             </a:r>
             <a:endParaRPr lang="en-US" dirty="0"/>
@@ -6622,35 +6626,35 @@
           <a:p>
             <a:pPr lvl="0"/>
             <a:r>
-              <a:rPr lang="es-ES"/>
+              <a:rPr lang="es-ES" smtClean="0"/>
               <a:t>Haga clic para modificar el estilo de texto del patrón</a:t>
             </a:r>
           </a:p>
           <a:p>
             <a:pPr lvl="1"/>
             <a:r>
-              <a:rPr lang="es-ES"/>
+              <a:rPr lang="es-ES" smtClean="0"/>
               <a:t>Segundo nivel</a:t>
             </a:r>
           </a:p>
           <a:p>
             <a:pPr lvl="2"/>
             <a:r>
-              <a:rPr lang="es-ES"/>
+              <a:rPr lang="es-ES" smtClean="0"/>
               <a:t>Tercer nivel</a:t>
             </a:r>
           </a:p>
           <a:p>
             <a:pPr lvl="3"/>
             <a:r>
-              <a:rPr lang="es-ES"/>
+              <a:rPr lang="es-ES" smtClean="0"/>
               <a:t>Cuarto nivel</a:t>
             </a:r>
           </a:p>
           <a:p>
             <a:pPr lvl="4"/>
             <a:r>
-              <a:rPr lang="es-ES"/>
+              <a:rPr lang="es-ES" smtClean="0"/>
               <a:t>Quinto nivel</a:t>
             </a:r>
             <a:endParaRPr lang="en-US" dirty="0"/>
@@ -6719,7 +6723,7 @@
           <a:p>
             <a:pPr lvl="0"/>
             <a:r>
-              <a:rPr lang="es-ES"/>
+              <a:rPr lang="es-ES" smtClean="0"/>
               <a:t>Haga clic para modificar el estilo de texto del patrón</a:t>
             </a:r>
           </a:p>
@@ -6755,7 +6759,7 @@
                 </a:solidFill>
               </a:rPr>
               <a:pPr/>
-              <a:t>09/30/2025</a:t>
+              <a:t>10/06/2025</a:t>
             </a:fld>
             <a:endParaRPr lang="es-PA">
               <a:solidFill>
@@ -6894,7 +6898,7 @@
           </a:lstStyle>
           <a:p>
             <a:r>
-              <a:rPr lang="es-ES"/>
+              <a:rPr lang="es-ES" smtClean="0"/>
               <a:t>Haga clic para modificar el estilo de título del patrón</a:t>
             </a:r>
             <a:endParaRPr lang="en-US" dirty="0"/>
@@ -6962,7 +6966,7 @@
           </a:lstStyle>
           <a:p>
             <a:r>
-              <a:rPr lang="es-ES"/>
+              <a:rPr lang="es-ES" smtClean="0"/>
               <a:t>Haga clic en el icono para agregar una imagen</a:t>
             </a:r>
             <a:endParaRPr lang="en-US" dirty="0"/>
@@ -7031,7 +7035,7 @@
           <a:p>
             <a:pPr lvl="0"/>
             <a:r>
-              <a:rPr lang="es-ES"/>
+              <a:rPr lang="es-ES" smtClean="0"/>
               <a:t>Haga clic para modificar el estilo de texto del patrón</a:t>
             </a:r>
           </a:p>
@@ -7067,7 +7071,7 @@
                 </a:solidFill>
               </a:rPr>
               <a:pPr/>
-              <a:t>09/30/2025</a:t>
+              <a:t>10/06/2025</a:t>
             </a:fld>
             <a:endParaRPr lang="es-PA">
               <a:solidFill>
@@ -7202,7 +7206,7 @@
           <a:lstStyle/>
           <a:p>
             <a:r>
-              <a:rPr lang="es-ES"/>
+              <a:rPr lang="es-ES" smtClean="0"/>
               <a:t>Haga clic para modificar el estilo de título del patrón</a:t>
             </a:r>
             <a:endParaRPr lang="en-US" dirty="0"/>
@@ -7234,35 +7238,35 @@
           <a:p>
             <a:pPr lvl="0"/>
             <a:r>
-              <a:rPr lang="es-ES"/>
+              <a:rPr lang="es-ES" smtClean="0"/>
               <a:t>Haga clic para modificar el estilo de texto del patrón</a:t>
             </a:r>
           </a:p>
           <a:p>
             <a:pPr lvl="1"/>
             <a:r>
-              <a:rPr lang="es-ES"/>
+              <a:rPr lang="es-ES" smtClean="0"/>
               <a:t>Segundo nivel</a:t>
             </a:r>
           </a:p>
           <a:p>
             <a:pPr lvl="2"/>
             <a:r>
-              <a:rPr lang="es-ES"/>
+              <a:rPr lang="es-ES" smtClean="0"/>
               <a:t>Tercer nivel</a:t>
             </a:r>
           </a:p>
           <a:p>
             <a:pPr lvl="3"/>
             <a:r>
-              <a:rPr lang="es-ES"/>
+              <a:rPr lang="es-ES" smtClean="0"/>
               <a:t>Cuarto nivel</a:t>
             </a:r>
           </a:p>
           <a:p>
             <a:pPr lvl="4"/>
             <a:r>
-              <a:rPr lang="es-ES"/>
+              <a:rPr lang="es-ES" smtClean="0"/>
               <a:t>Quinto nivel</a:t>
             </a:r>
             <a:endParaRPr lang="en-US" dirty="0"/>
@@ -7299,7 +7303,7 @@
                 </a:solidFill>
               </a:rPr>
               <a:pPr/>
-              <a:t>09/30/2025</a:t>
+              <a:t>10/06/2025</a:t>
             </a:fld>
             <a:endParaRPr lang="es-PA">
               <a:solidFill>
@@ -7434,7 +7438,7 @@
           <a:lstStyle/>
           <a:p>
             <a:r>
-              <a:rPr lang="es-ES"/>
+              <a:rPr lang="es-ES" smtClean="0"/>
               <a:t>Haga clic para modificar el estilo de título del patrón</a:t>
             </a:r>
             <a:endParaRPr lang="en-US" dirty="0"/>
@@ -7466,35 +7470,35 @@
           <a:p>
             <a:pPr lvl="0"/>
             <a:r>
-              <a:rPr lang="es-ES"/>
+              <a:rPr lang="es-ES" smtClean="0"/>
               <a:t>Haga clic para modificar el estilo de texto del patrón</a:t>
             </a:r>
           </a:p>
           <a:p>
             <a:pPr lvl="1"/>
             <a:r>
-              <a:rPr lang="es-ES"/>
+              <a:rPr lang="es-ES" smtClean="0"/>
               <a:t>Segundo nivel</a:t>
             </a:r>
           </a:p>
           <a:p>
             <a:pPr lvl="2"/>
             <a:r>
-              <a:rPr lang="es-ES"/>
+              <a:rPr lang="es-ES" smtClean="0"/>
               <a:t>Tercer nivel</a:t>
             </a:r>
           </a:p>
           <a:p>
             <a:pPr lvl="3"/>
             <a:r>
-              <a:rPr lang="es-ES"/>
+              <a:rPr lang="es-ES" smtClean="0"/>
               <a:t>Cuarto nivel</a:t>
             </a:r>
           </a:p>
           <a:p>
             <a:pPr lvl="4"/>
             <a:r>
-              <a:rPr lang="es-ES"/>
+              <a:rPr lang="es-ES" smtClean="0"/>
               <a:t>Quinto nivel</a:t>
             </a:r>
             <a:endParaRPr lang="en-US" dirty="0"/>
@@ -7531,7 +7535,7 @@
                 </a:solidFill>
               </a:rPr>
               <a:pPr/>
-              <a:t>09/30/2025</a:t>
+              <a:t>10/06/2025</a:t>
             </a:fld>
             <a:endParaRPr lang="es-PA">
               <a:solidFill>
@@ -7670,7 +7674,7 @@
           </a:lstStyle>
           <a:p>
             <a:r>
-              <a:rPr lang="es-ES"/>
+              <a:rPr lang="es-ES" smtClean="0"/>
               <a:t>Haga clic para modificar el estilo de título del patrón</a:t>
             </a:r>
             <a:endParaRPr lang="es-PA"/>
@@ -7738,7 +7742,7 @@
           </a:lstStyle>
           <a:p>
             <a:r>
-              <a:rPr lang="es-ES"/>
+              <a:rPr lang="es-ES" smtClean="0"/>
               <a:t>Haga clic para modificar el estilo de subtítulo del patrón</a:t>
             </a:r>
             <a:endParaRPr lang="es-PA"/>
@@ -7775,7 +7779,7 @@
                 </a:solidFill>
               </a:rPr>
               <a:pPr/>
-              <a:t>09/30/2025</a:t>
+              <a:t>10/06/2025</a:t>
             </a:fld>
             <a:endParaRPr lang="es-PA">
               <a:solidFill>
@@ -7910,7 +7914,7 @@
           <a:lstStyle/>
           <a:p>
             <a:r>
-              <a:rPr lang="es-ES"/>
+              <a:rPr lang="es-ES" smtClean="0"/>
               <a:t>Haga clic para modificar el estilo de título del patrón</a:t>
             </a:r>
             <a:endParaRPr lang="es-PA"/>
@@ -7942,35 +7946,35 @@
           <a:p>
             <a:pPr lvl="0"/>
             <a:r>
-              <a:rPr lang="es-ES"/>
+              <a:rPr lang="es-ES" smtClean="0"/>
               <a:t>Haga clic para modificar el estilo de texto del patrón</a:t>
             </a:r>
           </a:p>
           <a:p>
             <a:pPr lvl="1"/>
             <a:r>
-              <a:rPr lang="es-ES"/>
+              <a:rPr lang="es-ES" smtClean="0"/>
               <a:t>Segundo nivel</a:t>
             </a:r>
           </a:p>
           <a:p>
             <a:pPr lvl="2"/>
             <a:r>
-              <a:rPr lang="es-ES"/>
+              <a:rPr lang="es-ES" smtClean="0"/>
               <a:t>Tercer nivel</a:t>
             </a:r>
           </a:p>
           <a:p>
             <a:pPr lvl="3"/>
             <a:r>
-              <a:rPr lang="es-ES"/>
+              <a:rPr lang="es-ES" smtClean="0"/>
               <a:t>Cuarto nivel</a:t>
             </a:r>
           </a:p>
           <a:p>
             <a:pPr lvl="4"/>
             <a:r>
-              <a:rPr lang="es-ES"/>
+              <a:rPr lang="es-ES" smtClean="0"/>
               <a:t>Quinto nivel</a:t>
             </a:r>
             <a:endParaRPr lang="es-PA"/>
@@ -8007,7 +8011,7 @@
                 </a:solidFill>
               </a:rPr>
               <a:pPr/>
-              <a:t>09/30/2025</a:t>
+              <a:t>10/06/2025</a:t>
             </a:fld>
             <a:endParaRPr lang="es-PA">
               <a:solidFill>
@@ -8146,7 +8150,7 @@
           </a:lstStyle>
           <a:p>
             <a:r>
-              <a:rPr lang="es-ES"/>
+              <a:rPr lang="es-ES" smtClean="0"/>
               <a:t>Haga clic para modificar el estilo de título del patrón</a:t>
             </a:r>
             <a:endParaRPr lang="es-PA"/>
@@ -8269,7 +8273,7 @@
           <a:p>
             <a:pPr lvl="0"/>
             <a:r>
-              <a:rPr lang="es-ES"/>
+              <a:rPr lang="es-ES" smtClean="0"/>
               <a:t>Haga clic para modificar el estilo de texto del patrón</a:t>
             </a:r>
           </a:p>
@@ -8305,7 +8309,7 @@
                 </a:solidFill>
               </a:rPr>
               <a:pPr/>
-              <a:t>09/30/2025</a:t>
+              <a:t>10/06/2025</a:t>
             </a:fld>
             <a:endParaRPr lang="es-PA">
               <a:solidFill>
@@ -8440,7 +8444,7 @@
           <a:lstStyle/>
           <a:p>
             <a:r>
-              <a:rPr lang="es-ES"/>
+              <a:rPr lang="es-ES" smtClean="0"/>
               <a:t>Haga clic para modificar el estilo de título del patrón</a:t>
             </a:r>
             <a:endParaRPr lang="es-PA"/>
@@ -8472,35 +8476,35 @@
           <a:p>
             <a:pPr lvl="0"/>
             <a:r>
-              <a:rPr lang="es-ES"/>
+              <a:rPr lang="es-ES" smtClean="0"/>
               <a:t>Haga clic para modificar el estilo de texto del patrón</a:t>
             </a:r>
           </a:p>
           <a:p>
             <a:pPr lvl="1"/>
             <a:r>
-              <a:rPr lang="es-ES"/>
+              <a:rPr lang="es-ES" smtClean="0"/>
               <a:t>Segundo nivel</a:t>
             </a:r>
           </a:p>
           <a:p>
             <a:pPr lvl="2"/>
             <a:r>
-              <a:rPr lang="es-ES"/>
+              <a:rPr lang="es-ES" smtClean="0"/>
               <a:t>Tercer nivel</a:t>
             </a:r>
           </a:p>
           <a:p>
             <a:pPr lvl="3"/>
             <a:r>
-              <a:rPr lang="es-ES"/>
+              <a:rPr lang="es-ES" smtClean="0"/>
               <a:t>Cuarto nivel</a:t>
             </a:r>
           </a:p>
           <a:p>
             <a:pPr lvl="4"/>
             <a:r>
-              <a:rPr lang="es-ES"/>
+              <a:rPr lang="es-ES" smtClean="0"/>
               <a:t>Quinto nivel</a:t>
             </a:r>
             <a:endParaRPr lang="es-PA"/>
@@ -8532,35 +8536,35 @@
           <a:p>
             <a:pPr lvl="0"/>
             <a:r>
-              <a:rPr lang="es-ES"/>
+              <a:rPr lang="es-ES" smtClean="0"/>
               <a:t>Haga clic para modificar el estilo de texto del patrón</a:t>
             </a:r>
           </a:p>
           <a:p>
             <a:pPr lvl="1"/>
             <a:r>
-              <a:rPr lang="es-ES"/>
+              <a:rPr lang="es-ES" smtClean="0"/>
               <a:t>Segundo nivel</a:t>
             </a:r>
           </a:p>
           <a:p>
             <a:pPr lvl="2"/>
             <a:r>
-              <a:rPr lang="es-ES"/>
+              <a:rPr lang="es-ES" smtClean="0"/>
               <a:t>Tercer nivel</a:t>
             </a:r>
           </a:p>
           <a:p>
             <a:pPr lvl="3"/>
             <a:r>
-              <a:rPr lang="es-ES"/>
+              <a:rPr lang="es-ES" smtClean="0"/>
               <a:t>Cuarto nivel</a:t>
             </a:r>
           </a:p>
           <a:p>
             <a:pPr lvl="4"/>
             <a:r>
-              <a:rPr lang="es-ES"/>
+              <a:rPr lang="es-ES" smtClean="0"/>
               <a:t>Quinto nivel</a:t>
             </a:r>
             <a:endParaRPr lang="es-PA"/>
@@ -8597,7 +8601,7 @@
                 </a:solidFill>
               </a:rPr>
               <a:pPr/>
-              <a:t>09/30/2025</a:t>
+              <a:t>10/06/2025</a:t>
             </a:fld>
             <a:endParaRPr lang="es-PA">
               <a:solidFill>
@@ -8732,7 +8736,7 @@
           <a:lstStyle/>
           <a:p>
             <a:r>
-              <a:rPr lang="es-ES"/>
+              <a:rPr lang="es-ES" smtClean="0"/>
               <a:t>Haga clic para modificar el estilo de título del patrón</a:t>
             </a:r>
             <a:endParaRPr lang="es-PA"/>
@@ -8801,7 +8805,7 @@
           <a:p>
             <a:pPr lvl="0"/>
             <a:r>
-              <a:rPr lang="es-ES"/>
+              <a:rPr lang="es-ES" smtClean="0"/>
               <a:t>Haga clic para modificar el estilo de texto del patrón</a:t>
             </a:r>
           </a:p>
@@ -8832,35 +8836,35 @@
           <a:p>
             <a:pPr lvl="0"/>
             <a:r>
-              <a:rPr lang="es-ES"/>
+              <a:rPr lang="es-ES" smtClean="0"/>
               <a:t>Haga clic para modificar el estilo de texto del patrón</a:t>
             </a:r>
           </a:p>
           <a:p>
             <a:pPr lvl="1"/>
             <a:r>
-              <a:rPr lang="es-ES"/>
+              <a:rPr lang="es-ES" smtClean="0"/>
               <a:t>Segundo nivel</a:t>
             </a:r>
           </a:p>
           <a:p>
             <a:pPr lvl="2"/>
             <a:r>
-              <a:rPr lang="es-ES"/>
+              <a:rPr lang="es-ES" smtClean="0"/>
               <a:t>Tercer nivel</a:t>
             </a:r>
           </a:p>
           <a:p>
             <a:pPr lvl="3"/>
             <a:r>
-              <a:rPr lang="es-ES"/>
+              <a:rPr lang="es-ES" smtClean="0"/>
               <a:t>Cuarto nivel</a:t>
             </a:r>
           </a:p>
           <a:p>
             <a:pPr lvl="4"/>
             <a:r>
-              <a:rPr lang="es-ES"/>
+              <a:rPr lang="es-ES" smtClean="0"/>
               <a:t>Quinto nivel</a:t>
             </a:r>
             <a:endParaRPr lang="es-PA"/>
@@ -8929,7 +8933,7 @@
           <a:p>
             <a:pPr lvl="0"/>
             <a:r>
-              <a:rPr lang="es-ES"/>
+              <a:rPr lang="es-ES" smtClean="0"/>
               <a:t>Haga clic para modificar el estilo de texto del patrón</a:t>
             </a:r>
           </a:p>
@@ -8960,35 +8964,35 @@
           <a:p>
             <a:pPr lvl="0"/>
             <a:r>
-              <a:rPr lang="es-ES"/>
+              <a:rPr lang="es-ES" smtClean="0"/>
               <a:t>Haga clic para modificar el estilo de texto del patrón</a:t>
             </a:r>
           </a:p>
           <a:p>
             <a:pPr lvl="1"/>
             <a:r>
-              <a:rPr lang="es-ES"/>
+              <a:rPr lang="es-ES" smtClean="0"/>
               <a:t>Segundo nivel</a:t>
             </a:r>
           </a:p>
           <a:p>
             <a:pPr lvl="2"/>
             <a:r>
-              <a:rPr lang="es-ES"/>
+              <a:rPr lang="es-ES" smtClean="0"/>
               <a:t>Tercer nivel</a:t>
             </a:r>
           </a:p>
           <a:p>
             <a:pPr lvl="3"/>
             <a:r>
-              <a:rPr lang="es-ES"/>
+              <a:rPr lang="es-ES" smtClean="0"/>
               <a:t>Cuarto nivel</a:t>
             </a:r>
           </a:p>
           <a:p>
             <a:pPr lvl="4"/>
             <a:r>
-              <a:rPr lang="es-ES"/>
+              <a:rPr lang="es-ES" smtClean="0"/>
               <a:t>Quinto nivel</a:t>
             </a:r>
             <a:endParaRPr lang="es-PA"/>
@@ -9025,7 +9029,7 @@
                 </a:solidFill>
               </a:rPr>
               <a:pPr/>
-              <a:t>09/30/2025</a:t>
+              <a:t>10/06/2025</a:t>
             </a:fld>
             <a:endParaRPr lang="es-PA">
               <a:solidFill>
@@ -9160,7 +9164,7 @@
           <a:lstStyle/>
           <a:p>
             <a:r>
-              <a:rPr lang="es-ES"/>
+              <a:rPr lang="es-ES" smtClean="0"/>
               <a:t>Haga clic para modificar el estilo de título del patrón</a:t>
             </a:r>
             <a:endParaRPr lang="es-PA"/>
@@ -9197,7 +9201,7 @@
                 </a:solidFill>
               </a:rPr>
               <a:pPr/>
-              <a:t>09/30/2025</a:t>
+              <a:t>10/06/2025</a:t>
             </a:fld>
             <a:endParaRPr lang="es-PA">
               <a:solidFill>
@@ -9332,7 +9336,7 @@
           <a:lstStyle/>
           <a:p>
             <a:r>
-              <a:rPr lang="es-ES"/>
+              <a:rPr lang="es-ES" smtClean="0"/>
               <a:t>Haga clic para modificar el estilo de título del patrón</a:t>
             </a:r>
             <a:endParaRPr lang="en-US" dirty="0"/>
@@ -9364,35 +9368,35 @@
           <a:p>
             <a:pPr lvl="0"/>
             <a:r>
-              <a:rPr lang="es-ES"/>
+              <a:rPr lang="es-ES" smtClean="0"/>
               <a:t>Haga clic para modificar el estilo de texto del patrón</a:t>
             </a:r>
           </a:p>
           <a:p>
             <a:pPr lvl="1"/>
             <a:r>
-              <a:rPr lang="es-ES"/>
+              <a:rPr lang="es-ES" smtClean="0"/>
               <a:t>Segundo nivel</a:t>
             </a:r>
           </a:p>
           <a:p>
             <a:pPr lvl="2"/>
             <a:r>
-              <a:rPr lang="es-ES"/>
+              <a:rPr lang="es-ES" smtClean="0"/>
               <a:t>Tercer nivel</a:t>
             </a:r>
           </a:p>
           <a:p>
             <a:pPr lvl="3"/>
             <a:r>
-              <a:rPr lang="es-ES"/>
+              <a:rPr lang="es-ES" smtClean="0"/>
               <a:t>Cuarto nivel</a:t>
             </a:r>
           </a:p>
           <a:p>
             <a:pPr lvl="4"/>
             <a:r>
-              <a:rPr lang="es-ES"/>
+              <a:rPr lang="es-ES" smtClean="0"/>
               <a:t>Quinto nivel</a:t>
             </a:r>
             <a:endParaRPr lang="en-US" dirty="0"/>
@@ -9424,35 +9428,35 @@
           <a:p>
             <a:pPr lvl="0"/>
             <a:r>
-              <a:rPr lang="es-ES"/>
+              <a:rPr lang="es-ES" smtClean="0"/>
               <a:t>Haga clic para modificar el estilo de texto del patrón</a:t>
             </a:r>
           </a:p>
           <a:p>
             <a:pPr lvl="1"/>
             <a:r>
-              <a:rPr lang="es-ES"/>
+              <a:rPr lang="es-ES" smtClean="0"/>
               <a:t>Segundo nivel</a:t>
             </a:r>
           </a:p>
           <a:p>
             <a:pPr lvl="2"/>
             <a:r>
-              <a:rPr lang="es-ES"/>
+              <a:rPr lang="es-ES" smtClean="0"/>
               <a:t>Tercer nivel</a:t>
             </a:r>
           </a:p>
           <a:p>
             <a:pPr lvl="3"/>
             <a:r>
-              <a:rPr lang="es-ES"/>
+              <a:rPr lang="es-ES" smtClean="0"/>
               <a:t>Cuarto nivel</a:t>
             </a:r>
           </a:p>
           <a:p>
             <a:pPr lvl="4"/>
             <a:r>
-              <a:rPr lang="es-ES"/>
+              <a:rPr lang="es-ES" smtClean="0"/>
               <a:t>Quinto nivel</a:t>
             </a:r>
             <a:endParaRPr lang="en-US" dirty="0"/>
@@ -9489,7 +9493,7 @@
                 </a:solidFill>
               </a:rPr>
               <a:pPr/>
-              <a:t>09/30/2025</a:t>
+              <a:t>10/06/2025</a:t>
             </a:fld>
             <a:endParaRPr lang="es-PA">
               <a:solidFill>
@@ -9630,7 +9634,7 @@
                 </a:solidFill>
               </a:rPr>
               <a:pPr/>
-              <a:t>09/30/2025</a:t>
+              <a:t>10/06/2025</a:t>
             </a:fld>
             <a:endParaRPr lang="es-PA">
               <a:solidFill>
@@ -9769,7 +9773,7 @@
           </a:lstStyle>
           <a:p>
             <a:r>
-              <a:rPr lang="es-ES"/>
+              <a:rPr lang="es-ES" smtClean="0"/>
               <a:t>Haga clic para modificar el estilo de título del patrón</a:t>
             </a:r>
             <a:endParaRPr lang="es-PA"/>
@@ -9829,35 +9833,35 @@
           <a:p>
             <a:pPr lvl="0"/>
             <a:r>
-              <a:rPr lang="es-ES"/>
+              <a:rPr lang="es-ES" smtClean="0"/>
               <a:t>Haga clic para modificar el estilo de texto del patrón</a:t>
             </a:r>
           </a:p>
           <a:p>
             <a:pPr lvl="1"/>
             <a:r>
-              <a:rPr lang="es-ES"/>
+              <a:rPr lang="es-ES" smtClean="0"/>
               <a:t>Segundo nivel</a:t>
             </a:r>
           </a:p>
           <a:p>
             <a:pPr lvl="2"/>
             <a:r>
-              <a:rPr lang="es-ES"/>
+              <a:rPr lang="es-ES" smtClean="0"/>
               <a:t>Tercer nivel</a:t>
             </a:r>
           </a:p>
           <a:p>
             <a:pPr lvl="3"/>
             <a:r>
-              <a:rPr lang="es-ES"/>
+              <a:rPr lang="es-ES" smtClean="0"/>
               <a:t>Cuarto nivel</a:t>
             </a:r>
           </a:p>
           <a:p>
             <a:pPr lvl="4"/>
             <a:r>
-              <a:rPr lang="es-ES"/>
+              <a:rPr lang="es-ES" smtClean="0"/>
               <a:t>Quinto nivel</a:t>
             </a:r>
             <a:endParaRPr lang="es-PA"/>
@@ -9926,7 +9930,7 @@
           <a:p>
             <a:pPr lvl="0"/>
             <a:r>
-              <a:rPr lang="es-ES"/>
+              <a:rPr lang="es-ES" smtClean="0"/>
               <a:t>Haga clic para modificar el estilo de texto del patrón</a:t>
             </a:r>
           </a:p>
@@ -9962,7 +9966,7 @@
                 </a:solidFill>
               </a:rPr>
               <a:pPr/>
-              <a:t>09/30/2025</a:t>
+              <a:t>10/06/2025</a:t>
             </a:fld>
             <a:endParaRPr lang="es-PA">
               <a:solidFill>
@@ -10101,7 +10105,7 @@
           </a:lstStyle>
           <a:p>
             <a:r>
-              <a:rPr lang="es-ES"/>
+              <a:rPr lang="es-ES" smtClean="0"/>
               <a:t>Haga clic para modificar el estilo de título del patrón</a:t>
             </a:r>
             <a:endParaRPr lang="es-PA"/>
@@ -10234,7 +10238,7 @@
           <a:p>
             <a:pPr lvl="0"/>
             <a:r>
-              <a:rPr lang="es-ES"/>
+              <a:rPr lang="es-ES" smtClean="0"/>
               <a:t>Haga clic para modificar el estilo de texto del patrón</a:t>
             </a:r>
           </a:p>
@@ -10270,7 +10274,7 @@
                 </a:solidFill>
               </a:rPr>
               <a:pPr/>
-              <a:t>09/30/2025</a:t>
+              <a:t>10/06/2025</a:t>
             </a:fld>
             <a:endParaRPr lang="es-PA">
               <a:solidFill>
@@ -10405,7 +10409,7 @@
           <a:lstStyle/>
           <a:p>
             <a:r>
-              <a:rPr lang="es-ES"/>
+              <a:rPr lang="es-ES" smtClean="0"/>
               <a:t>Haga clic para modificar el estilo de título del patrón</a:t>
             </a:r>
             <a:endParaRPr lang="es-PA"/>
@@ -10437,35 +10441,35 @@
           <a:p>
             <a:pPr lvl="0"/>
             <a:r>
-              <a:rPr lang="es-ES"/>
+              <a:rPr lang="es-ES" smtClean="0"/>
               <a:t>Haga clic para modificar el estilo de texto del patrón</a:t>
             </a:r>
           </a:p>
           <a:p>
             <a:pPr lvl="1"/>
             <a:r>
-              <a:rPr lang="es-ES"/>
+              <a:rPr lang="es-ES" smtClean="0"/>
               <a:t>Segundo nivel</a:t>
             </a:r>
           </a:p>
           <a:p>
             <a:pPr lvl="2"/>
             <a:r>
-              <a:rPr lang="es-ES"/>
+              <a:rPr lang="es-ES" smtClean="0"/>
               <a:t>Tercer nivel</a:t>
             </a:r>
           </a:p>
           <a:p>
             <a:pPr lvl="3"/>
             <a:r>
-              <a:rPr lang="es-ES"/>
+              <a:rPr lang="es-ES" smtClean="0"/>
               <a:t>Cuarto nivel</a:t>
             </a:r>
           </a:p>
           <a:p>
             <a:pPr lvl="4"/>
             <a:r>
-              <a:rPr lang="es-ES"/>
+              <a:rPr lang="es-ES" smtClean="0"/>
               <a:t>Quinto nivel</a:t>
             </a:r>
             <a:endParaRPr lang="es-PA"/>
@@ -10502,7 +10506,7 @@
                 </a:solidFill>
               </a:rPr>
               <a:pPr/>
-              <a:t>09/30/2025</a:t>
+              <a:t>10/06/2025</a:t>
             </a:fld>
             <a:endParaRPr lang="es-PA">
               <a:solidFill>
@@ -10637,7 +10641,7 @@
           <a:lstStyle/>
           <a:p>
             <a:r>
-              <a:rPr lang="es-ES"/>
+              <a:rPr lang="es-ES" smtClean="0"/>
               <a:t>Haga clic para modificar el estilo de título del patrón</a:t>
             </a:r>
             <a:endParaRPr lang="es-PA"/>
@@ -10669,35 +10673,35 @@
           <a:p>
             <a:pPr lvl="0"/>
             <a:r>
-              <a:rPr lang="es-ES"/>
+              <a:rPr lang="es-ES" smtClean="0"/>
               <a:t>Haga clic para modificar el estilo de texto del patrón</a:t>
             </a:r>
           </a:p>
           <a:p>
             <a:pPr lvl="1"/>
             <a:r>
-              <a:rPr lang="es-ES"/>
+              <a:rPr lang="es-ES" smtClean="0"/>
               <a:t>Segundo nivel</a:t>
             </a:r>
           </a:p>
           <a:p>
             <a:pPr lvl="2"/>
             <a:r>
-              <a:rPr lang="es-ES"/>
+              <a:rPr lang="es-ES" smtClean="0"/>
               <a:t>Tercer nivel</a:t>
             </a:r>
           </a:p>
           <a:p>
             <a:pPr lvl="3"/>
             <a:r>
-              <a:rPr lang="es-ES"/>
+              <a:rPr lang="es-ES" smtClean="0"/>
               <a:t>Cuarto nivel</a:t>
             </a:r>
           </a:p>
           <a:p>
             <a:pPr lvl="4"/>
             <a:r>
-              <a:rPr lang="es-ES"/>
+              <a:rPr lang="es-ES" smtClean="0"/>
               <a:t>Quinto nivel</a:t>
             </a:r>
             <a:endParaRPr lang="es-PA"/>
@@ -10734,7 +10738,7 @@
                 </a:solidFill>
               </a:rPr>
               <a:pPr/>
-              <a:t>09/30/2025</a:t>
+              <a:t>10/06/2025</a:t>
             </a:fld>
             <a:endParaRPr lang="es-PA">
               <a:solidFill>
@@ -10870,7 +10874,7 @@
           </a:lstStyle>
           <a:p>
             <a:r>
-              <a:rPr lang="es-ES"/>
+              <a:rPr lang="es-ES" smtClean="0"/>
               <a:t>Haga clic para modificar el estilo de título del patrón</a:t>
             </a:r>
             <a:endParaRPr lang="en-US" dirty="0"/>
@@ -10900,10 +10904,7 @@
               <a:buNone/>
               <a:defRPr cap="all">
                 <a:solidFill>
-                  <a:schemeClr val="bg2">
-                    <a:lumMod val="40000"/>
-                    <a:lumOff val="60000"/>
-                  </a:schemeClr>
+                  <a:schemeClr val="accent1"/>
                 </a:solidFill>
               </a:defRPr>
             </a:lvl1pPr>
@@ -10990,7 +10991,7 @@
           </a:lstStyle>
           <a:p>
             <a:r>
-              <a:rPr lang="es-ES"/>
+              <a:rPr lang="es-ES" smtClean="0"/>
               <a:t>Haga clic para modificar el estilo de subtítulo del patrón</a:t>
             </a:r>
             <a:endParaRPr lang="en-US" dirty="0"/>
@@ -11019,7 +11020,7 @@
                 </a:solidFill>
               </a:rPr>
               <a:pPr/>
-              <a:t>09/30/2025</a:t>
+              <a:t>10/06/2025</a:t>
             </a:fld>
             <a:endParaRPr lang="es-PA">
               <a:solidFill>
@@ -11087,7 +11088,7 @@
     </p:spTree>
     <p:extLst>
       <p:ext uri="{BB962C8B-B14F-4D97-AF65-F5344CB8AC3E}">
-        <p14:creationId xmlns:p14="http://schemas.microsoft.com/office/powerpoint/2010/main" val="515670412"/>
+        <p14:creationId xmlns:p14="http://schemas.microsoft.com/office/powerpoint/2010/main" val="4019054705"/>
       </p:ext>
     </p:extLst>
   </p:cSld>
@@ -11130,7 +11131,7 @@
           <a:lstStyle/>
           <a:p>
             <a:r>
-              <a:rPr lang="es-ES"/>
+              <a:rPr lang="es-ES" smtClean="0"/>
               <a:t>Haga clic para modificar el estilo de título del patrón</a:t>
             </a:r>
             <a:endParaRPr lang="en-US" dirty="0"/>
@@ -11154,35 +11155,35 @@
           <a:p>
             <a:pPr lvl="0"/>
             <a:r>
-              <a:rPr lang="es-ES"/>
-              <a:t>Haga clic para modificar los estilos de texto del patrón</a:t>
+              <a:rPr lang="es-ES" smtClean="0"/>
+              <a:t>Haga clic para modificar el estilo de texto del patrón</a:t>
             </a:r>
           </a:p>
           <a:p>
             <a:pPr lvl="1"/>
             <a:r>
-              <a:rPr lang="es-ES"/>
+              <a:rPr lang="es-ES" smtClean="0"/>
               <a:t>Segundo nivel</a:t>
             </a:r>
           </a:p>
           <a:p>
             <a:pPr lvl="2"/>
             <a:r>
-              <a:rPr lang="es-ES"/>
+              <a:rPr lang="es-ES" smtClean="0"/>
               <a:t>Tercer nivel</a:t>
             </a:r>
           </a:p>
           <a:p>
             <a:pPr lvl="3"/>
             <a:r>
-              <a:rPr lang="es-ES"/>
+              <a:rPr lang="es-ES" smtClean="0"/>
               <a:t>Cuarto nivel</a:t>
             </a:r>
           </a:p>
           <a:p>
             <a:pPr lvl="4"/>
             <a:r>
-              <a:rPr lang="es-ES"/>
+              <a:rPr lang="es-ES" smtClean="0"/>
               <a:t>Quinto nivel</a:t>
             </a:r>
             <a:endParaRPr lang="en-US" dirty="0"/>
@@ -11191,7 +11192,7 @@
       </p:sp>
       <p:sp>
         <p:nvSpPr>
-          <p:cNvPr id="7" name="Date Placeholder 3"/>
+          <p:cNvPr id="7" name="Date Placeholder 6"/>
           <p:cNvSpPr>
             <a:spLocks noGrp="1"/>
           </p:cNvSpPr>
@@ -11211,7 +11212,7 @@
                 </a:solidFill>
               </a:rPr>
               <a:pPr/>
-              <a:t>09/30/2025</a:t>
+              <a:t>10/06/2025</a:t>
             </a:fld>
             <a:endParaRPr lang="es-PA">
               <a:solidFill>
@@ -11279,7 +11280,7 @@
     </p:spTree>
     <p:extLst>
       <p:ext uri="{BB962C8B-B14F-4D97-AF65-F5344CB8AC3E}">
-        <p14:creationId xmlns:p14="http://schemas.microsoft.com/office/powerpoint/2010/main" val="4106638717"/>
+        <p14:creationId xmlns:p14="http://schemas.microsoft.com/office/powerpoint/2010/main" val="1985372951"/>
       </p:ext>
     </p:extLst>
   </p:cSld>
@@ -11331,7 +11332,7 @@
           </a:lstStyle>
           <a:p>
             <a:r>
-              <a:rPr lang="es-ES"/>
+              <a:rPr lang="es-ES" smtClean="0"/>
               <a:t>Haga clic para modificar el estilo de título del patrón</a:t>
             </a:r>
             <a:endParaRPr lang="en-US" dirty="0"/>
@@ -11361,10 +11362,7 @@
               <a:buNone/>
               <a:defRPr sz="2000" cap="all">
                 <a:solidFill>
-                  <a:schemeClr val="bg2">
-                    <a:lumMod val="40000"/>
-                    <a:lumOff val="60000"/>
-                  </a:schemeClr>
+                  <a:schemeClr val="accent1"/>
                 </a:solidFill>
               </a:defRPr>
             </a:lvl1pPr>
@@ -11452,8 +11450,8 @@
           <a:p>
             <a:pPr lvl="0"/>
             <a:r>
-              <a:rPr lang="es-ES"/>
-              <a:t>Haga clic para modificar los estilos de texto del patrón</a:t>
+              <a:rPr lang="es-ES" smtClean="0"/>
+              <a:t>Haga clic para modificar el estilo de texto del patrón</a:t>
             </a:r>
           </a:p>
         </p:txBody>
@@ -11480,7 +11478,7 @@
                 </a:solidFill>
               </a:rPr>
               <a:pPr/>
-              <a:t>09/30/2025</a:t>
+              <a:t>10/06/2025</a:t>
             </a:fld>
             <a:endParaRPr lang="es-PA">
               <a:solidFill>
@@ -11548,7 +11546,7 @@
     </p:spTree>
     <p:extLst>
       <p:ext uri="{BB962C8B-B14F-4D97-AF65-F5344CB8AC3E}">
-        <p14:creationId xmlns:p14="http://schemas.microsoft.com/office/powerpoint/2010/main" val="1853137685"/>
+        <p14:creationId xmlns:p14="http://schemas.microsoft.com/office/powerpoint/2010/main" val="2933026912"/>
       </p:ext>
     </p:extLst>
   </p:cSld>
@@ -11591,7 +11589,7 @@
           <a:lstStyle/>
           <a:p>
             <a:r>
-              <a:rPr lang="es-ES"/>
+              <a:rPr lang="es-ES" smtClean="0"/>
               <a:t>Haga clic para modificar el estilo de título del patrón</a:t>
             </a:r>
             <a:endParaRPr lang="en-US" dirty="0"/>
@@ -11650,35 +11648,35 @@
           <a:p>
             <a:pPr lvl="0"/>
             <a:r>
-              <a:rPr lang="es-ES"/>
-              <a:t>Haga clic para modificar los estilos de texto del patrón</a:t>
+              <a:rPr lang="es-ES" smtClean="0"/>
+              <a:t>Haga clic para modificar el estilo de texto del patrón</a:t>
             </a:r>
           </a:p>
           <a:p>
             <a:pPr lvl="1"/>
             <a:r>
-              <a:rPr lang="es-ES"/>
+              <a:rPr lang="es-ES" smtClean="0"/>
               <a:t>Segundo nivel</a:t>
             </a:r>
           </a:p>
           <a:p>
             <a:pPr lvl="2"/>
             <a:r>
-              <a:rPr lang="es-ES"/>
+              <a:rPr lang="es-ES" smtClean="0"/>
               <a:t>Tercer nivel</a:t>
             </a:r>
           </a:p>
           <a:p>
             <a:pPr lvl="3"/>
             <a:r>
-              <a:rPr lang="es-ES"/>
+              <a:rPr lang="es-ES" smtClean="0"/>
               <a:t>Cuarto nivel</a:t>
             </a:r>
           </a:p>
           <a:p>
             <a:pPr lvl="4"/>
             <a:r>
-              <a:rPr lang="es-ES"/>
+              <a:rPr lang="es-ES" smtClean="0"/>
               <a:t>Quinto nivel</a:t>
             </a:r>
             <a:endParaRPr lang="en-US" dirty="0"/>
@@ -11737,35 +11735,35 @@
           <a:p>
             <a:pPr lvl="0"/>
             <a:r>
-              <a:rPr lang="es-ES"/>
-              <a:t>Haga clic para modificar los estilos de texto del patrón</a:t>
+              <a:rPr lang="es-ES" smtClean="0"/>
+              <a:t>Haga clic para modificar el estilo de texto del patrón</a:t>
             </a:r>
           </a:p>
           <a:p>
             <a:pPr lvl="1"/>
             <a:r>
-              <a:rPr lang="es-ES"/>
+              <a:rPr lang="es-ES" smtClean="0"/>
               <a:t>Segundo nivel</a:t>
             </a:r>
           </a:p>
           <a:p>
             <a:pPr lvl="2"/>
             <a:r>
-              <a:rPr lang="es-ES"/>
+              <a:rPr lang="es-ES" smtClean="0"/>
               <a:t>Tercer nivel</a:t>
             </a:r>
           </a:p>
           <a:p>
             <a:pPr lvl="3"/>
             <a:r>
-              <a:rPr lang="es-ES"/>
+              <a:rPr lang="es-ES" smtClean="0"/>
               <a:t>Cuarto nivel</a:t>
             </a:r>
           </a:p>
           <a:p>
             <a:pPr lvl="4"/>
             <a:r>
-              <a:rPr lang="es-ES"/>
+              <a:rPr lang="es-ES" smtClean="0"/>
               <a:t>Quinto nivel</a:t>
             </a:r>
             <a:endParaRPr lang="en-US" dirty="0"/>
@@ -11794,7 +11792,7 @@
                 </a:solidFill>
               </a:rPr>
               <a:pPr/>
-              <a:t>09/30/2025</a:t>
+              <a:t>10/06/2025</a:t>
             </a:fld>
             <a:endParaRPr lang="es-PA">
               <a:solidFill>
@@ -11862,7 +11860,7 @@
     </p:spTree>
     <p:extLst>
       <p:ext uri="{BB962C8B-B14F-4D97-AF65-F5344CB8AC3E}">
-        <p14:creationId xmlns:p14="http://schemas.microsoft.com/office/powerpoint/2010/main" val="1806466369"/>
+        <p14:creationId xmlns:p14="http://schemas.microsoft.com/office/powerpoint/2010/main" val="3580659497"/>
       </p:ext>
     </p:extLst>
   </p:cSld>
@@ -11909,7 +11907,7 @@
           </a:lstStyle>
           <a:p>
             <a:r>
-              <a:rPr lang="es-ES"/>
+              <a:rPr lang="es-ES" smtClean="0"/>
               <a:t>Haga clic para modificar el estilo de título del patrón</a:t>
             </a:r>
             <a:endParaRPr lang="en-US" dirty="0"/>
@@ -11941,10 +11939,7 @@
               <a:buNone/>
               <a:defRPr sz="2400" b="0">
                 <a:solidFill>
-                  <a:schemeClr val="bg2">
-                    <a:lumMod val="40000"/>
-                    <a:lumOff val="60000"/>
-                  </a:schemeClr>
+                  <a:schemeClr val="accent1"/>
                 </a:solidFill>
               </a:defRPr>
             </a:lvl1pPr>
@@ -11984,8 +11979,8 @@
           <a:p>
             <a:pPr lvl="0"/>
             <a:r>
-              <a:rPr lang="es-ES"/>
-              <a:t>Haga clic para modificar los estilos de texto del patrón</a:t>
+              <a:rPr lang="es-ES" smtClean="0"/>
+              <a:t>Haga clic para modificar el estilo de texto del patrón</a:t>
             </a:r>
           </a:p>
         </p:txBody>
@@ -12042,35 +12037,35 @@
           <a:p>
             <a:pPr lvl="0"/>
             <a:r>
-              <a:rPr lang="es-ES"/>
-              <a:t>Haga clic para modificar los estilos de texto del patrón</a:t>
+              <a:rPr lang="es-ES" smtClean="0"/>
+              <a:t>Haga clic para modificar el estilo de texto del patrón</a:t>
             </a:r>
           </a:p>
           <a:p>
             <a:pPr lvl="1"/>
             <a:r>
-              <a:rPr lang="es-ES"/>
+              <a:rPr lang="es-ES" smtClean="0"/>
               <a:t>Segundo nivel</a:t>
             </a:r>
           </a:p>
           <a:p>
             <a:pPr lvl="2"/>
             <a:r>
-              <a:rPr lang="es-ES"/>
+              <a:rPr lang="es-ES" smtClean="0"/>
               <a:t>Tercer nivel</a:t>
             </a:r>
           </a:p>
           <a:p>
             <a:pPr lvl="3"/>
             <a:r>
-              <a:rPr lang="es-ES"/>
+              <a:rPr lang="es-ES" smtClean="0"/>
               <a:t>Cuarto nivel</a:t>
             </a:r>
           </a:p>
           <a:p>
             <a:pPr lvl="4"/>
             <a:r>
-              <a:rPr lang="es-ES"/>
+              <a:rPr lang="es-ES" smtClean="0"/>
               <a:t>Quinto nivel</a:t>
             </a:r>
             <a:endParaRPr lang="en-US" dirty="0"/>
@@ -12102,10 +12097,7 @@
               <a:buNone/>
               <a:defRPr sz="2400" b="0">
                 <a:solidFill>
-                  <a:schemeClr val="bg2">
-                    <a:lumMod val="40000"/>
-                    <a:lumOff val="60000"/>
-                  </a:schemeClr>
+                  <a:schemeClr val="accent1"/>
                 </a:solidFill>
               </a:defRPr>
             </a:lvl1pPr>
@@ -12145,8 +12137,8 @@
           <a:p>
             <a:pPr lvl="0"/>
             <a:r>
-              <a:rPr lang="es-ES"/>
-              <a:t>Haga clic para modificar los estilos de texto del patrón</a:t>
+              <a:rPr lang="es-ES" smtClean="0"/>
+              <a:t>Haga clic para modificar el estilo de texto del patrón</a:t>
             </a:r>
           </a:p>
         </p:txBody>
@@ -12203,35 +12195,35 @@
           <a:p>
             <a:pPr lvl="0"/>
             <a:r>
-              <a:rPr lang="es-ES"/>
-              <a:t>Haga clic para modificar los estilos de texto del patrón</a:t>
+              <a:rPr lang="es-ES" smtClean="0"/>
+              <a:t>Haga clic para modificar el estilo de texto del patrón</a:t>
             </a:r>
           </a:p>
           <a:p>
             <a:pPr lvl="1"/>
             <a:r>
-              <a:rPr lang="es-ES"/>
+              <a:rPr lang="es-ES" smtClean="0"/>
               <a:t>Segundo nivel</a:t>
             </a:r>
           </a:p>
           <a:p>
             <a:pPr lvl="2"/>
             <a:r>
-              <a:rPr lang="es-ES"/>
+              <a:rPr lang="es-ES" smtClean="0"/>
               <a:t>Tercer nivel</a:t>
             </a:r>
           </a:p>
           <a:p>
             <a:pPr lvl="3"/>
             <a:r>
-              <a:rPr lang="es-ES"/>
+              <a:rPr lang="es-ES" smtClean="0"/>
               <a:t>Cuarto nivel</a:t>
             </a:r>
           </a:p>
           <a:p>
             <a:pPr lvl="4"/>
             <a:r>
-              <a:rPr lang="es-ES"/>
+              <a:rPr lang="es-ES" smtClean="0"/>
               <a:t>Quinto nivel</a:t>
             </a:r>
             <a:endParaRPr lang="en-US" dirty="0"/>
@@ -12260,7 +12252,7 @@
                 </a:solidFill>
               </a:rPr>
               <a:pPr/>
-              <a:t>09/30/2025</a:t>
+              <a:t>10/06/2025</a:t>
             </a:fld>
             <a:endParaRPr lang="es-PA">
               <a:solidFill>
@@ -12328,7 +12320,7 @@
     </p:spTree>
     <p:extLst>
       <p:ext uri="{BB962C8B-B14F-4D97-AF65-F5344CB8AC3E}">
-        <p14:creationId xmlns:p14="http://schemas.microsoft.com/office/powerpoint/2010/main" val="234361115"/>
+        <p14:creationId xmlns:p14="http://schemas.microsoft.com/office/powerpoint/2010/main" val="1612129564"/>
       </p:ext>
     </p:extLst>
   </p:cSld>
@@ -12379,7 +12371,7 @@
           <a:lstStyle/>
           <a:p>
             <a:r>
-              <a:rPr lang="es-ES"/>
+              <a:rPr lang="es-ES" smtClean="0"/>
               <a:t>Haga clic para modificar el estilo de título del patrón</a:t>
             </a:r>
             <a:endParaRPr lang="en-US" dirty="0"/>
@@ -12448,7 +12440,7 @@
           <a:p>
             <a:pPr lvl="0"/>
             <a:r>
-              <a:rPr lang="es-ES"/>
+              <a:rPr lang="es-ES" smtClean="0"/>
               <a:t>Haga clic para modificar el estilo de texto del patrón</a:t>
             </a:r>
           </a:p>
@@ -12479,35 +12471,35 @@
           <a:p>
             <a:pPr lvl="0"/>
             <a:r>
-              <a:rPr lang="es-ES"/>
+              <a:rPr lang="es-ES" smtClean="0"/>
               <a:t>Haga clic para modificar el estilo de texto del patrón</a:t>
             </a:r>
           </a:p>
           <a:p>
             <a:pPr lvl="1"/>
             <a:r>
-              <a:rPr lang="es-ES"/>
+              <a:rPr lang="es-ES" smtClean="0"/>
               <a:t>Segundo nivel</a:t>
             </a:r>
           </a:p>
           <a:p>
             <a:pPr lvl="2"/>
             <a:r>
-              <a:rPr lang="es-ES"/>
+              <a:rPr lang="es-ES" smtClean="0"/>
               <a:t>Tercer nivel</a:t>
             </a:r>
           </a:p>
           <a:p>
             <a:pPr lvl="3"/>
             <a:r>
-              <a:rPr lang="es-ES"/>
+              <a:rPr lang="es-ES" smtClean="0"/>
               <a:t>Cuarto nivel</a:t>
             </a:r>
           </a:p>
           <a:p>
             <a:pPr lvl="4"/>
             <a:r>
-              <a:rPr lang="es-ES"/>
+              <a:rPr lang="es-ES" smtClean="0"/>
               <a:t>Quinto nivel</a:t>
             </a:r>
             <a:endParaRPr lang="en-US" dirty="0"/>
@@ -12576,7 +12568,7 @@
           <a:p>
             <a:pPr lvl="0"/>
             <a:r>
-              <a:rPr lang="es-ES"/>
+              <a:rPr lang="es-ES" smtClean="0"/>
               <a:t>Haga clic para modificar el estilo de texto del patrón</a:t>
             </a:r>
           </a:p>
@@ -12607,35 +12599,35 @@
           <a:p>
             <a:pPr lvl="0"/>
             <a:r>
-              <a:rPr lang="es-ES"/>
+              <a:rPr lang="es-ES" smtClean="0"/>
               <a:t>Haga clic para modificar el estilo de texto del patrón</a:t>
             </a:r>
           </a:p>
           <a:p>
             <a:pPr lvl="1"/>
             <a:r>
-              <a:rPr lang="es-ES"/>
+              <a:rPr lang="es-ES" smtClean="0"/>
               <a:t>Segundo nivel</a:t>
             </a:r>
           </a:p>
           <a:p>
             <a:pPr lvl="2"/>
             <a:r>
-              <a:rPr lang="es-ES"/>
+              <a:rPr lang="es-ES" smtClean="0"/>
               <a:t>Tercer nivel</a:t>
             </a:r>
           </a:p>
           <a:p>
             <a:pPr lvl="3"/>
             <a:r>
-              <a:rPr lang="es-ES"/>
+              <a:rPr lang="es-ES" smtClean="0"/>
               <a:t>Cuarto nivel</a:t>
             </a:r>
           </a:p>
           <a:p>
             <a:pPr lvl="4"/>
             <a:r>
-              <a:rPr lang="es-ES"/>
+              <a:rPr lang="es-ES" smtClean="0"/>
               <a:t>Quinto nivel</a:t>
             </a:r>
             <a:endParaRPr lang="en-US" dirty="0"/>
@@ -12672,7 +12664,7 @@
                 </a:solidFill>
               </a:rPr>
               <a:pPr/>
-              <a:t>09/30/2025</a:t>
+              <a:t>10/06/2025</a:t>
             </a:fld>
             <a:endParaRPr lang="es-PA">
               <a:solidFill>
@@ -12799,7 +12791,7 @@
           <a:lstStyle/>
           <a:p>
             <a:r>
-              <a:rPr lang="es-ES"/>
+              <a:rPr lang="es-ES" smtClean="0"/>
               <a:t>Haga clic para modificar el estilo de título del patrón</a:t>
             </a:r>
             <a:endParaRPr lang="en-US" dirty="0"/>
@@ -12828,7 +12820,7 @@
                 </a:solidFill>
               </a:rPr>
               <a:pPr/>
-              <a:t>09/30/2025</a:t>
+              <a:t>10/06/2025</a:t>
             </a:fld>
             <a:endParaRPr lang="es-PA">
               <a:solidFill>
@@ -12896,7 +12888,7 @@
     </p:spTree>
     <p:extLst>
       <p:ext uri="{BB962C8B-B14F-4D97-AF65-F5344CB8AC3E}">
-        <p14:creationId xmlns:p14="http://schemas.microsoft.com/office/powerpoint/2010/main" val="2164278803"/>
+        <p14:creationId xmlns:p14="http://schemas.microsoft.com/office/powerpoint/2010/main" val="4033341566"/>
       </p:ext>
     </p:extLst>
   </p:cSld>
@@ -12945,7 +12937,7 @@
                 </a:solidFill>
               </a:rPr>
               <a:pPr/>
-              <a:t>09/30/2025</a:t>
+              <a:t>10/06/2025</a:t>
             </a:fld>
             <a:endParaRPr lang="es-PA">
               <a:solidFill>
@@ -13013,7 +13005,7 @@
     </p:spTree>
     <p:extLst>
       <p:ext uri="{BB962C8B-B14F-4D97-AF65-F5344CB8AC3E}">
-        <p14:creationId xmlns:p14="http://schemas.microsoft.com/office/powerpoint/2010/main" val="322859818"/>
+        <p14:creationId xmlns:p14="http://schemas.microsoft.com/office/powerpoint/2010/main" val="130802565"/>
       </p:ext>
     </p:extLst>
   </p:cSld>
@@ -13065,7 +13057,7 @@
           </a:lstStyle>
           <a:p>
             <a:r>
-              <a:rPr lang="es-ES"/>
+              <a:rPr lang="es-ES" smtClean="0"/>
               <a:t>Haga clic para modificar el estilo de título del patrón</a:t>
             </a:r>
             <a:endParaRPr lang="en-US" dirty="0"/>
@@ -13124,35 +13116,35 @@
           <a:p>
             <a:pPr lvl="0"/>
             <a:r>
-              <a:rPr lang="es-ES"/>
-              <a:t>Haga clic para modificar los estilos de texto del patrón</a:t>
+              <a:rPr lang="es-ES" smtClean="0"/>
+              <a:t>Haga clic para modificar el estilo de texto del patrón</a:t>
             </a:r>
           </a:p>
           <a:p>
             <a:pPr lvl="1"/>
             <a:r>
-              <a:rPr lang="es-ES"/>
+              <a:rPr lang="es-ES" smtClean="0"/>
               <a:t>Segundo nivel</a:t>
             </a:r>
           </a:p>
           <a:p>
             <a:pPr lvl="2"/>
             <a:r>
-              <a:rPr lang="es-ES"/>
+              <a:rPr lang="es-ES" smtClean="0"/>
               <a:t>Tercer nivel</a:t>
             </a:r>
           </a:p>
           <a:p>
             <a:pPr lvl="3"/>
             <a:r>
-              <a:rPr lang="es-ES"/>
+              <a:rPr lang="es-ES" smtClean="0"/>
               <a:t>Cuarto nivel</a:t>
             </a:r>
           </a:p>
           <a:p>
             <a:pPr lvl="4"/>
             <a:r>
-              <a:rPr lang="es-ES"/>
+              <a:rPr lang="es-ES" smtClean="0"/>
               <a:t>Quinto nivel</a:t>
             </a:r>
             <a:endParaRPr lang="en-US" dirty="0"/>
@@ -13218,8 +13210,8 @@
           <a:p>
             <a:pPr lvl="0"/>
             <a:r>
-              <a:rPr lang="es-ES"/>
-              <a:t>Haga clic para modificar los estilos de texto del patrón</a:t>
+              <a:rPr lang="es-ES" smtClean="0"/>
+              <a:t>Haga clic para modificar el estilo de texto del patrón</a:t>
             </a:r>
           </a:p>
         </p:txBody>
@@ -13246,7 +13238,7 @@
                 </a:solidFill>
               </a:rPr>
               <a:pPr/>
-              <a:t>09/30/2025</a:t>
+              <a:t>10/06/2025</a:t>
             </a:fld>
             <a:endParaRPr lang="es-PA">
               <a:solidFill>
@@ -13314,7 +13306,7 @@
     </p:spTree>
     <p:extLst>
       <p:ext uri="{BB962C8B-B14F-4D97-AF65-F5344CB8AC3E}">
-        <p14:creationId xmlns:p14="http://schemas.microsoft.com/office/powerpoint/2010/main" val="3996304030"/>
+        <p14:creationId xmlns:p14="http://schemas.microsoft.com/office/powerpoint/2010/main" val="420013499"/>
       </p:ext>
     </p:extLst>
   </p:cSld>
@@ -13368,7 +13360,7 @@
           </a:lstStyle>
           <a:p>
             <a:r>
-              <a:rPr lang="es-ES"/>
+              <a:rPr lang="es-ES" smtClean="0"/>
               <a:t>Haga clic para modificar el estilo de título del patrón</a:t>
             </a:r>
             <a:endParaRPr lang="en-US" dirty="0"/>
@@ -13447,7 +13439,7 @@
           </a:lstStyle>
           <a:p>
             <a:r>
-              <a:rPr lang="es-ES"/>
+              <a:rPr lang="es-ES" smtClean="0"/>
               <a:t>Haga clic en el icono para agregar una imagen</a:t>
             </a:r>
             <a:endParaRPr lang="en-US" dirty="0"/>
@@ -13515,8 +13507,8 @@
           <a:p>
             <a:pPr lvl="0"/>
             <a:r>
-              <a:rPr lang="es-ES"/>
-              <a:t>Haga clic para modificar los estilos de texto del patrón</a:t>
+              <a:rPr lang="es-ES" smtClean="0"/>
+              <a:t>Haga clic para modificar el estilo de texto del patrón</a:t>
             </a:r>
           </a:p>
         </p:txBody>
@@ -13543,7 +13535,7 @@
                 </a:solidFill>
               </a:rPr>
               <a:pPr/>
-              <a:t>09/30/2025</a:t>
+              <a:t>10/06/2025</a:t>
             </a:fld>
             <a:endParaRPr lang="es-PA">
               <a:solidFill>
@@ -13611,7 +13603,7 @@
     </p:spTree>
     <p:extLst>
       <p:ext uri="{BB962C8B-B14F-4D97-AF65-F5344CB8AC3E}">
-        <p14:creationId xmlns:p14="http://schemas.microsoft.com/office/powerpoint/2010/main" val="2776795691"/>
+        <p14:creationId xmlns:p14="http://schemas.microsoft.com/office/powerpoint/2010/main" val="2163547856"/>
       </p:ext>
     </p:extLst>
   </p:cSld>
@@ -13665,7 +13657,7 @@
           </a:lstStyle>
           <a:p>
             <a:r>
-              <a:rPr lang="es-ES"/>
+              <a:rPr lang="es-ES" smtClean="0"/>
               <a:t>Haga clic para modificar el estilo de título del patrón</a:t>
             </a:r>
             <a:endParaRPr lang="en-US" dirty="0"/>
@@ -13744,7 +13736,7 @@
           </a:lstStyle>
           <a:p>
             <a:r>
-              <a:rPr lang="es-ES"/>
+              <a:rPr lang="es-ES" smtClean="0"/>
               <a:t>Haga clic en el icono para agregar una imagen</a:t>
             </a:r>
             <a:endParaRPr lang="en-US" dirty="0"/>
@@ -13812,8 +13804,8 @@
           <a:p>
             <a:pPr lvl="0"/>
             <a:r>
-              <a:rPr lang="es-ES"/>
-              <a:t>Haga clic para modificar los estilos de texto del patrón</a:t>
+              <a:rPr lang="es-ES" smtClean="0"/>
+              <a:t>Haga clic para modificar el estilo de texto del patrón</a:t>
             </a:r>
           </a:p>
         </p:txBody>
@@ -13835,7 +13827,7 @@
           <a:p>
             <a:fld id="{E9EF0DD0-2A6F-4F79-890C-FFB39C5316A3}" type="datetimeFigureOut">
               <a:rPr lang="en-US" smtClean="0"/>
-              <a:t>9/30/2025</a:t>
+              <a:t>10/6/2025</a:t>
             </a:fld>
             <a:endParaRPr lang="en-US" dirty="0"/>
           </a:p>
@@ -13886,7 +13878,7 @@
     </p:spTree>
     <p:extLst>
       <p:ext uri="{BB962C8B-B14F-4D97-AF65-F5344CB8AC3E}">
-        <p14:creationId xmlns:p14="http://schemas.microsoft.com/office/powerpoint/2010/main" val="3759784291"/>
+        <p14:creationId xmlns:p14="http://schemas.microsoft.com/office/powerpoint/2010/main" val="2127010827"/>
       </p:ext>
     </p:extLst>
   </p:cSld>
@@ -13938,7 +13930,7 @@
           </a:lstStyle>
           <a:p>
             <a:r>
-              <a:rPr lang="es-ES"/>
+              <a:rPr lang="es-ES" smtClean="0"/>
               <a:t>Haga clic para modificar el estilo de título del patrón</a:t>
             </a:r>
             <a:endParaRPr lang="en-US" dirty="0"/>
@@ -14006,8 +13998,8 @@
           <a:p>
             <a:pPr lvl="0"/>
             <a:r>
-              <a:rPr lang="es-ES"/>
-              <a:t>Haga clic para modificar los estilos de texto del patrón</a:t>
+              <a:rPr lang="es-ES" smtClean="0"/>
+              <a:t>Haga clic para modificar el estilo de texto del patrón</a:t>
             </a:r>
           </a:p>
         </p:txBody>
@@ -14029,7 +14021,7 @@
           <a:p>
             <a:fld id="{AC8D6FD3-7618-407B-9AD1-F22D2D250FF2}" type="datetimeFigureOut">
               <a:rPr lang="en-US" smtClean="0"/>
-              <a:t>9/30/2025</a:t>
+              <a:t>10/6/2025</a:t>
             </a:fld>
             <a:endParaRPr lang="en-US" dirty="0"/>
           </a:p>
@@ -14080,7 +14072,7 @@
     </p:spTree>
     <p:extLst>
       <p:ext uri="{BB962C8B-B14F-4D97-AF65-F5344CB8AC3E}">
-        <p14:creationId xmlns:p14="http://schemas.microsoft.com/office/powerpoint/2010/main" val="2738201997"/>
+        <p14:creationId xmlns:p14="http://schemas.microsoft.com/office/powerpoint/2010/main" val="2966535734"/>
       </p:ext>
     </p:extLst>
   </p:cSld>
@@ -14132,7 +14124,7 @@
           </a:lstStyle>
           <a:p>
             <a:r>
-              <a:rPr lang="es-ES"/>
+              <a:rPr lang="es-ES" smtClean="0"/>
               <a:t>Haga clic para modificar el estilo de título del patrón</a:t>
             </a:r>
             <a:endParaRPr lang="en-US" dirty="0"/>
@@ -14141,22 +14133,22 @@
       </p:sp>
       <p:sp>
         <p:nvSpPr>
-          <p:cNvPr id="11" name="Text Placeholder 3"/>
-          <p:cNvSpPr>
-            <a:spLocks noGrp="1"/>
-          </p:cNvSpPr>
-          <p:nvPr>
-            <p:ph type="body" sz="half" idx="14"/>
+          <p:cNvPr id="14" name="Text Placeholder 3"/>
+          <p:cNvSpPr>
+            <a:spLocks noGrp="1"/>
+          </p:cNvSpPr>
+          <p:nvPr>
+            <p:ph type="body" sz="half" idx="13"/>
           </p:nvPr>
         </p:nvSpPr>
         <p:spPr>
           <a:xfrm>
             <a:off x="1448177" y="3771174"/>
-            <a:ext cx="5461159" cy="342174"/>
-          </a:xfrm>
-        </p:spPr>
-        <p:txBody>
-          <a:bodyPr vert="horz" lIns="91440" tIns="45720" rIns="91440" bIns="45720" rtlCol="0" anchor="t">
+            <a:ext cx="5540814" cy="342174"/>
+          </a:xfrm>
+        </p:spPr>
+        <p:txBody>
+          <a:bodyPr anchor="t">
             <a:normAutofit/>
           </a:bodyPr>
           <a:lstStyle>
@@ -14164,10 +14156,7 @@
               <a:buNone/>
               <a:defRPr lang="en-US" sz="1400" b="0" i="0" kern="1200" cap="small" dirty="0">
                 <a:solidFill>
-                  <a:schemeClr val="bg2">
-                    <a:lumMod val="40000"/>
-                    <a:lumOff val="60000"/>
-                  </a:schemeClr>
+                  <a:schemeClr val="accent1"/>
                 </a:solidFill>
                 <a:latin typeface="+mj-lt"/>
                 <a:ea typeface="+mj-ea"/>
@@ -14208,12 +14197,10 @@
             </a:lvl9pPr>
           </a:lstStyle>
           <a:p>
-            <a:pPr marL="0" lvl="0" indent="0">
-              <a:buNone/>
-            </a:pPr>
-            <a:r>
-              <a:rPr lang="es-ES"/>
-              <a:t>Haga clic para modificar los estilos de texto del patrón</a:t>
+            <a:pPr lvl="0"/>
+            <a:r>
+              <a:rPr lang="es-ES" smtClean="0"/>
+              <a:t>Haga clic para modificar el estilo de texto del patrón</a:t>
             </a:r>
           </a:p>
         </p:txBody>
@@ -14279,8 +14266,8 @@
           <a:p>
             <a:pPr lvl="0"/>
             <a:r>
-              <a:rPr lang="es-ES"/>
-              <a:t>Haga clic para modificar los estilos de texto del patrón</a:t>
+              <a:rPr lang="es-ES" smtClean="0"/>
+              <a:t>Haga clic para modificar el estilo de texto del patrón</a:t>
             </a:r>
           </a:p>
         </p:txBody>
@@ -14300,9 +14287,9 @@
           <a:bodyPr/>
           <a:lstStyle/>
           <a:p>
-            <a:fld id="{4AAD347D-5ACD-4C99-B74B-A9C85AD731AF}" type="datetimeFigureOut">
+            <a:fld id="{54685AEE-FEBA-4707-9A7F-B8CF33FA2E44}" type="datetimeFigureOut">
               <a:rPr lang="en-US" smtClean="0"/>
-              <a:t>9/30/2025</a:t>
+              <a:t>10/6/2025</a:t>
             </a:fld>
             <a:endParaRPr lang="en-US" dirty="0"/>
           </a:p>
@@ -14342,7 +14329,7 @@
           <a:bodyPr/>
           <a:lstStyle/>
           <a:p>
-            <a:fld id="{D57F1E4F-1CFF-5643-939E-02111984F565}" type="slidenum">
+            <a:fld id="{6D22F896-40B5-4ADD-8801-0D06FADFA095}" type="slidenum">
               <a:rPr lang="en-US" smtClean="0"/>
               <a:t>‹Nº›</a:t>
             </a:fld>
@@ -14352,7 +14339,7 @@
       </p:sp>
       <p:sp>
         <p:nvSpPr>
-          <p:cNvPr id="12" name="TextBox 11"/>
+          <p:cNvPr id="11" name="TextBox 10"/>
           <p:cNvSpPr txBox="1"/>
           <p:nvPr/>
         </p:nvSpPr>
@@ -14377,10 +14364,7 @@
             <a:lvl1pPr algn="r">
               <a:defRPr sz="12200" b="0" i="0">
                 <a:solidFill>
-                  <a:schemeClr val="bg2">
-                    <a:lumMod val="40000"/>
-                    <a:lumOff val="60000"/>
-                  </a:schemeClr>
+                  <a:schemeClr val="accent1"/>
                 </a:solidFill>
                 <a:latin typeface="Arial"/>
                 <a:ea typeface="+mj-ea"/>
@@ -14399,7 +14383,7 @@
       </p:sp>
       <p:sp>
         <p:nvSpPr>
-          <p:cNvPr id="15" name="TextBox 14"/>
+          <p:cNvPr id="13" name="TextBox 12"/>
           <p:cNvSpPr txBox="1"/>
           <p:nvPr/>
         </p:nvSpPr>
@@ -14424,10 +14408,7 @@
             <a:lvl1pPr algn="r">
               <a:defRPr sz="12200" b="0" i="0">
                 <a:solidFill>
-                  <a:schemeClr val="bg2">
-                    <a:lumMod val="40000"/>
-                    <a:lumOff val="60000"/>
-                  </a:schemeClr>
+                  <a:schemeClr val="accent1"/>
                 </a:solidFill>
                 <a:latin typeface="Arial"/>
                 <a:ea typeface="+mj-ea"/>
@@ -14447,7 +14428,7 @@
     </p:spTree>
     <p:extLst>
       <p:ext uri="{BB962C8B-B14F-4D97-AF65-F5344CB8AC3E}">
-        <p14:creationId xmlns:p14="http://schemas.microsoft.com/office/powerpoint/2010/main" val="2555145348"/>
+        <p14:creationId xmlns:p14="http://schemas.microsoft.com/office/powerpoint/2010/main" val="121716231"/>
       </p:ext>
     </p:extLst>
   </p:cSld>
@@ -14486,8 +14467,8 @@
         </p:nvSpPr>
         <p:spPr>
           <a:xfrm>
-            <a:off x="866441" y="3124201"/>
-            <a:ext cx="6620969" cy="1653180"/>
+            <a:off x="866442" y="3124201"/>
+            <a:ext cx="6620968" cy="1653180"/>
           </a:xfrm>
         </p:spPr>
         <p:txBody>
@@ -14499,7 +14480,7 @@
           </a:lstStyle>
           <a:p>
             <a:r>
-              <a:rPr lang="es-ES"/>
+              <a:rPr lang="es-ES" smtClean="0"/>
               <a:t>Haga clic para modificar el estilo de título del patrón</a:t>
             </a:r>
             <a:endParaRPr lang="en-US" dirty="0"/>
@@ -14529,10 +14510,7 @@
               <a:buNone/>
               <a:defRPr sz="2000" cap="none">
                 <a:solidFill>
-                  <a:schemeClr val="bg2">
-                    <a:lumMod val="40000"/>
-                    <a:lumOff val="60000"/>
-                  </a:schemeClr>
+                  <a:schemeClr val="accent1"/>
                 </a:solidFill>
               </a:defRPr>
             </a:lvl1pPr>
@@ -14620,8 +14598,8 @@
           <a:p>
             <a:pPr lvl="0"/>
             <a:r>
-              <a:rPr lang="es-ES"/>
-              <a:t>Haga clic para modificar los estilos de texto del patrón</a:t>
+              <a:rPr lang="es-ES" smtClean="0"/>
+              <a:t>Haga clic para modificar el estilo de texto del patrón</a:t>
             </a:r>
           </a:p>
         </p:txBody>
@@ -14643,7 +14621,7 @@
           <a:p>
             <a:fld id="{6F39DBA2-4164-48AA-BE36-C02775701CCE}" type="datetimeFigureOut">
               <a:rPr lang="en-US" smtClean="0"/>
-              <a:t>9/30/2025</a:t>
+              <a:t>10/6/2025</a:t>
             </a:fld>
             <a:endParaRPr lang="en-US" dirty="0"/>
           </a:p>
@@ -14694,7 +14672,7 @@
     </p:spTree>
     <p:extLst>
       <p:ext uri="{BB962C8B-B14F-4D97-AF65-F5344CB8AC3E}">
-        <p14:creationId xmlns:p14="http://schemas.microsoft.com/office/powerpoint/2010/main" val="1193747876"/>
+        <p14:creationId xmlns:p14="http://schemas.microsoft.com/office/powerpoint/2010/main" val="2833623098"/>
       </p:ext>
     </p:extLst>
   </p:cSld>
@@ -14741,7 +14719,7 @@
           </a:lstStyle>
           <a:p>
             <a:r>
-              <a:rPr lang="es-ES"/>
+              <a:rPr lang="es-ES" smtClean="0"/>
               <a:t>Haga clic para modificar el estilo de título del patrón</a:t>
             </a:r>
             <a:endParaRPr lang="en-US" dirty="0"/>
@@ -14773,10 +14751,7 @@
               <a:buNone/>
               <a:defRPr sz="2400" b="0">
                 <a:solidFill>
-                  <a:schemeClr val="bg2">
-                    <a:lumMod val="40000"/>
-                    <a:lumOff val="60000"/>
-                  </a:schemeClr>
+                  <a:schemeClr val="accent1"/>
                 </a:solidFill>
               </a:defRPr>
             </a:lvl1pPr>
@@ -14816,8 +14791,8 @@
           <a:p>
             <a:pPr lvl="0"/>
             <a:r>
-              <a:rPr lang="es-ES"/>
-              <a:t>Haga clic para modificar los estilos de texto del patrón</a:t>
+              <a:rPr lang="es-ES" smtClean="0"/>
+              <a:t>Haga clic para modificar el estilo de texto del patrón</a:t>
             </a:r>
           </a:p>
         </p:txBody>
@@ -14883,8 +14858,8 @@
           <a:p>
             <a:pPr lvl="0"/>
             <a:r>
-              <a:rPr lang="es-ES"/>
-              <a:t>Haga clic para modificar los estilos de texto del patrón</a:t>
+              <a:rPr lang="es-ES" smtClean="0"/>
+              <a:t>Haga clic para modificar el estilo de texto del patrón</a:t>
             </a:r>
           </a:p>
         </p:txBody>
@@ -14914,10 +14889,7 @@
               <a:buNone/>
               <a:defRPr sz="2400" b="0">
                 <a:solidFill>
-                  <a:schemeClr val="bg2">
-                    <a:lumMod val="40000"/>
-                    <a:lumOff val="60000"/>
-                  </a:schemeClr>
+                  <a:schemeClr val="accent1"/>
                 </a:solidFill>
               </a:defRPr>
             </a:lvl1pPr>
@@ -14957,8 +14929,8 @@
           <a:p>
             <a:pPr lvl="0"/>
             <a:r>
-              <a:rPr lang="es-ES"/>
-              <a:t>Haga clic para modificar los estilos de texto del patrón</a:t>
+              <a:rPr lang="es-ES" smtClean="0"/>
+              <a:t>Haga clic para modificar el estilo de texto del patrón</a:t>
             </a:r>
           </a:p>
         </p:txBody>
@@ -15024,8 +14996,8 @@
           <a:p>
             <a:pPr lvl="0"/>
             <a:r>
-              <a:rPr lang="es-ES"/>
-              <a:t>Haga clic para modificar los estilos de texto del patrón</a:t>
+              <a:rPr lang="es-ES" smtClean="0"/>
+              <a:t>Haga clic para modificar el estilo de texto del patrón</a:t>
             </a:r>
           </a:p>
         </p:txBody>
@@ -15055,10 +15027,7 @@
               <a:buNone/>
               <a:defRPr sz="2400" b="0">
                 <a:solidFill>
-                  <a:schemeClr val="bg2">
-                    <a:lumMod val="40000"/>
-                    <a:lumOff val="60000"/>
-                  </a:schemeClr>
+                  <a:schemeClr val="accent1"/>
                 </a:solidFill>
               </a:defRPr>
             </a:lvl1pPr>
@@ -15098,8 +15067,8 @@
           <a:p>
             <a:pPr lvl="0"/>
             <a:r>
-              <a:rPr lang="es-ES"/>
-              <a:t>Haga clic para modificar los estilos de texto del patrón</a:t>
+              <a:rPr lang="es-ES" smtClean="0"/>
+              <a:t>Haga clic para modificar el estilo de texto del patrón</a:t>
             </a:r>
           </a:p>
         </p:txBody>
@@ -15165,8 +15134,8 @@
           <a:p>
             <a:pPr lvl="0"/>
             <a:r>
-              <a:rPr lang="es-ES"/>
-              <a:t>Haga clic para modificar los estilos de texto del patrón</a:t>
+              <a:rPr lang="es-ES" smtClean="0"/>
+              <a:t>Haga clic para modificar el estilo de texto del patrón</a:t>
             </a:r>
           </a:p>
         </p:txBody>
@@ -15187,9 +15156,7 @@
           </a:prstGeom>
           <a:ln w="12700" cmpd="sng">
             <a:solidFill>
-              <a:schemeClr val="bg2">
-                <a:lumMod val="40000"/>
-                <a:lumOff val="60000"/>
+              <a:schemeClr val="accent1">
                 <a:alpha val="40000"/>
               </a:schemeClr>
             </a:solidFill>
@@ -15226,9 +15193,7 @@
           </a:prstGeom>
           <a:ln w="12700" cmpd="sng">
             <a:solidFill>
-              <a:schemeClr val="bg2">
-                <a:lumMod val="40000"/>
-                <a:lumOff val="60000"/>
+              <a:schemeClr val="accent1">
                 <a:alpha val="40000"/>
               </a:schemeClr>
             </a:solidFill>
@@ -15266,7 +15231,7 @@
           <a:p>
             <a:fld id="{B7BA62D7-2A52-40FE-9D68-7AA14F989445}" type="datetimeFigureOut">
               <a:rPr lang="en-US" smtClean="0"/>
-              <a:t>9/30/2025</a:t>
+              <a:t>10/6/2025</a:t>
             </a:fld>
             <a:endParaRPr lang="en-US" dirty="0"/>
           </a:p>
@@ -15317,7 +15282,7 @@
     </p:spTree>
     <p:extLst>
       <p:ext uri="{BB962C8B-B14F-4D97-AF65-F5344CB8AC3E}">
-        <p14:creationId xmlns:p14="http://schemas.microsoft.com/office/powerpoint/2010/main" val="885052337"/>
+        <p14:creationId xmlns:p14="http://schemas.microsoft.com/office/powerpoint/2010/main" val="1372918044"/>
       </p:ext>
     </p:extLst>
   </p:cSld>
@@ -15364,7 +15329,7 @@
           </a:lstStyle>
           <a:p>
             <a:r>
-              <a:rPr lang="es-ES"/>
+              <a:rPr lang="es-ES" smtClean="0"/>
               <a:t>Haga clic para modificar el estilo de título del patrón</a:t>
             </a:r>
             <a:endParaRPr lang="en-US" dirty="0"/>
@@ -15396,10 +15361,7 @@
               <a:buNone/>
               <a:defRPr sz="2400" b="0">
                 <a:solidFill>
-                  <a:schemeClr val="bg2">
-                    <a:lumMod val="40000"/>
-                    <a:lumOff val="60000"/>
-                  </a:schemeClr>
+                  <a:schemeClr val="accent1"/>
                 </a:solidFill>
               </a:defRPr>
             </a:lvl1pPr>
@@ -15439,8 +15401,8 @@
           <a:p>
             <a:pPr lvl="0"/>
             <a:r>
-              <a:rPr lang="es-ES"/>
-              <a:t>Haga clic para modificar los estilos de texto del patrón</a:t>
+              <a:rPr lang="es-ES" smtClean="0"/>
+              <a:t>Haga clic para modificar el estilo de texto del patrón</a:t>
             </a:r>
           </a:p>
         </p:txBody>
@@ -15517,7 +15479,7 @@
           </a:lstStyle>
           <a:p>
             <a:r>
-              <a:rPr lang="es-ES"/>
+              <a:rPr lang="es-ES" smtClean="0"/>
               <a:t>Haga clic en el icono para agregar una imagen</a:t>
             </a:r>
             <a:endParaRPr lang="en-US" dirty="0"/>
@@ -15585,8 +15547,8 @@
           <a:p>
             <a:pPr lvl="0"/>
             <a:r>
-              <a:rPr lang="es-ES"/>
-              <a:t>Haga clic para modificar los estilos de texto del patrón</a:t>
+              <a:rPr lang="es-ES" smtClean="0"/>
+              <a:t>Haga clic para modificar el estilo de texto del patrón</a:t>
             </a:r>
           </a:p>
         </p:txBody>
@@ -15616,10 +15578,7 @@
               <a:buNone/>
               <a:defRPr sz="2400" b="0">
                 <a:solidFill>
-                  <a:schemeClr val="bg2">
-                    <a:lumMod val="40000"/>
-                    <a:lumOff val="60000"/>
-                  </a:schemeClr>
+                  <a:schemeClr val="accent1"/>
                 </a:solidFill>
               </a:defRPr>
             </a:lvl1pPr>
@@ -15659,8 +15618,8 @@
           <a:p>
             <a:pPr lvl="0"/>
             <a:r>
-              <a:rPr lang="es-ES"/>
-              <a:t>Haga clic para modificar los estilos de texto del patrón</a:t>
+              <a:rPr lang="es-ES" smtClean="0"/>
+              <a:t>Haga clic para modificar el estilo de texto del patrón</a:t>
             </a:r>
           </a:p>
         </p:txBody>
@@ -15737,7 +15696,7 @@
           </a:lstStyle>
           <a:p>
             <a:r>
-              <a:rPr lang="es-ES"/>
+              <a:rPr lang="es-ES" smtClean="0"/>
               <a:t>Haga clic en el icono para agregar una imagen</a:t>
             </a:r>
             <a:endParaRPr lang="en-US" dirty="0"/>
@@ -15805,8 +15764,8 @@
           <a:p>
             <a:pPr lvl="0"/>
             <a:r>
-              <a:rPr lang="es-ES"/>
-              <a:t>Haga clic para modificar los estilos de texto del patrón</a:t>
+              <a:rPr lang="es-ES" smtClean="0"/>
+              <a:t>Haga clic para modificar el estilo de texto del patrón</a:t>
             </a:r>
           </a:p>
         </p:txBody>
@@ -15836,10 +15795,7 @@
               <a:buNone/>
               <a:defRPr sz="2400" b="0">
                 <a:solidFill>
-                  <a:schemeClr val="bg2">
-                    <a:lumMod val="40000"/>
-                    <a:lumOff val="60000"/>
-                  </a:schemeClr>
+                  <a:schemeClr val="accent1"/>
                 </a:solidFill>
               </a:defRPr>
             </a:lvl1pPr>
@@ -15879,8 +15835,8 @@
           <a:p>
             <a:pPr lvl="0"/>
             <a:r>
-              <a:rPr lang="es-ES"/>
-              <a:t>Haga clic para modificar los estilos de texto del patrón</a:t>
+              <a:rPr lang="es-ES" smtClean="0"/>
+              <a:t>Haga clic para modificar el estilo de texto del patrón</a:t>
             </a:r>
           </a:p>
         </p:txBody>
@@ -15957,7 +15913,7 @@
           </a:lstStyle>
           <a:p>
             <a:r>
-              <a:rPr lang="es-ES"/>
+              <a:rPr lang="es-ES" smtClean="0"/>
               <a:t>Haga clic en el icono para agregar una imagen</a:t>
             </a:r>
             <a:endParaRPr lang="en-US" dirty="0"/>
@@ -16025,15 +15981,15 @@
           <a:p>
             <a:pPr lvl="0"/>
             <a:r>
-              <a:rPr lang="es-ES"/>
-              <a:t>Haga clic para modificar los estilos de texto del patrón</a:t>
+              <a:rPr lang="es-ES" smtClean="0"/>
+              <a:t>Haga clic para modificar el estilo de texto del patrón</a:t>
             </a:r>
           </a:p>
         </p:txBody>
       </p:sp>
       <p:cxnSp>
         <p:nvCxnSpPr>
-          <p:cNvPr id="19" name="Straight Connector 18"/>
+          <p:cNvPr id="17" name="Straight Connector 16"/>
           <p:cNvCxnSpPr/>
           <p:nvPr/>
         </p:nvCxnSpPr>
@@ -16047,9 +16003,7 @@
           </a:prstGeom>
           <a:ln w="12700" cmpd="sng">
             <a:solidFill>
-              <a:schemeClr val="bg2">
-                <a:lumMod val="40000"/>
-                <a:lumOff val="60000"/>
+              <a:schemeClr val="accent1">
                 <a:alpha val="40000"/>
               </a:schemeClr>
             </a:solidFill>
@@ -16072,7 +16026,7 @@
       </p:cxnSp>
       <p:cxnSp>
         <p:nvCxnSpPr>
-          <p:cNvPr id="20" name="Straight Connector 19"/>
+          <p:cNvPr id="18" name="Straight Connector 17"/>
           <p:cNvCxnSpPr/>
           <p:nvPr/>
         </p:nvCxnSpPr>
@@ -16086,9 +16040,7 @@
           </a:prstGeom>
           <a:ln w="12700" cmpd="sng">
             <a:solidFill>
-              <a:schemeClr val="bg2">
-                <a:lumMod val="40000"/>
-                <a:lumOff val="60000"/>
+              <a:schemeClr val="accent1">
                 <a:alpha val="40000"/>
               </a:schemeClr>
             </a:solidFill>
@@ -16126,7 +16078,7 @@
           <a:p>
             <a:fld id="{3B57A9BF-74C6-453E-9062-D3583FAE2170}" type="datetimeFigureOut">
               <a:rPr lang="en-US" smtClean="0"/>
-              <a:t>9/30/2025</a:t>
+              <a:t>10/6/2025</a:t>
             </a:fld>
             <a:endParaRPr lang="en-US" dirty="0"/>
           </a:p>
@@ -16177,7 +16129,7 @@
     </p:spTree>
     <p:extLst>
       <p:ext uri="{BB962C8B-B14F-4D97-AF65-F5344CB8AC3E}">
-        <p14:creationId xmlns:p14="http://schemas.microsoft.com/office/powerpoint/2010/main" val="2162887394"/>
+        <p14:creationId xmlns:p14="http://schemas.microsoft.com/office/powerpoint/2010/main" val="3596680946"/>
       </p:ext>
     </p:extLst>
   </p:cSld>
@@ -16228,7 +16180,7 @@
           <a:lstStyle/>
           <a:p>
             <a:r>
-              <a:rPr lang="es-ES"/>
+              <a:rPr lang="es-ES" smtClean="0"/>
               <a:t>Haga clic para modificar el estilo de título del patrón</a:t>
             </a:r>
             <a:endParaRPr lang="en-US" dirty="0"/>
@@ -16265,7 +16217,7 @@
                 </a:solidFill>
               </a:rPr>
               <a:pPr/>
-              <a:t>09/30/2025</a:t>
+              <a:t>10/06/2025</a:t>
             </a:fld>
             <a:endParaRPr lang="es-PA">
               <a:solidFill>
@@ -16392,7 +16344,7 @@
           <a:lstStyle/>
           <a:p>
             <a:r>
-              <a:rPr lang="es-ES"/>
+              <a:rPr lang="es-ES" smtClean="0"/>
               <a:t>Haga clic para modificar el estilo de título del patrón</a:t>
             </a:r>
             <a:endParaRPr lang="en-US" dirty="0"/>
@@ -16416,35 +16368,35 @@
           <a:p>
             <a:pPr lvl="0"/>
             <a:r>
-              <a:rPr lang="es-ES"/>
-              <a:t>Haga clic para modificar los estilos de texto del patrón</a:t>
+              <a:rPr lang="es-ES" smtClean="0"/>
+              <a:t>Haga clic para modificar el estilo de texto del patrón</a:t>
             </a:r>
           </a:p>
           <a:p>
             <a:pPr lvl="1"/>
             <a:r>
-              <a:rPr lang="es-ES"/>
+              <a:rPr lang="es-ES" smtClean="0"/>
               <a:t>Segundo nivel</a:t>
             </a:r>
           </a:p>
           <a:p>
             <a:pPr lvl="2"/>
             <a:r>
-              <a:rPr lang="es-ES"/>
+              <a:rPr lang="es-ES" smtClean="0"/>
               <a:t>Tercer nivel</a:t>
             </a:r>
           </a:p>
           <a:p>
             <a:pPr lvl="3"/>
             <a:r>
-              <a:rPr lang="es-ES"/>
+              <a:rPr lang="es-ES" smtClean="0"/>
               <a:t>Cuarto nivel</a:t>
             </a:r>
           </a:p>
           <a:p>
             <a:pPr lvl="4"/>
             <a:r>
-              <a:rPr lang="es-ES"/>
+              <a:rPr lang="es-ES" smtClean="0"/>
               <a:t>Quinto nivel</a:t>
             </a:r>
             <a:endParaRPr lang="en-US" dirty="0"/>
@@ -16473,7 +16425,7 @@
                 </a:solidFill>
               </a:rPr>
               <a:pPr/>
-              <a:t>09/30/2025</a:t>
+              <a:t>10/06/2025</a:t>
             </a:fld>
             <a:endParaRPr lang="es-PA">
               <a:solidFill>
@@ -16541,7 +16493,7 @@
     </p:spTree>
     <p:extLst>
       <p:ext uri="{BB962C8B-B14F-4D97-AF65-F5344CB8AC3E}">
-        <p14:creationId xmlns:p14="http://schemas.microsoft.com/office/powerpoint/2010/main" val="3298521829"/>
+        <p14:creationId xmlns:p14="http://schemas.microsoft.com/office/powerpoint/2010/main" val="1286765178"/>
       </p:ext>
     </p:extLst>
   </p:cSld>
@@ -16589,7 +16541,7 @@
           <a:lstStyle/>
           <a:p>
             <a:r>
-              <a:rPr lang="es-ES"/>
+              <a:rPr lang="es-ES" smtClean="0"/>
               <a:t>Haga clic para modificar el estilo de título del patrón</a:t>
             </a:r>
             <a:endParaRPr lang="en-US" dirty="0"/>
@@ -16618,35 +16570,35 @@
           <a:p>
             <a:pPr lvl="0"/>
             <a:r>
-              <a:rPr lang="es-ES"/>
-              <a:t>Haga clic para modificar los estilos de texto del patrón</a:t>
+              <a:rPr lang="es-ES" smtClean="0"/>
+              <a:t>Haga clic para modificar el estilo de texto del patrón</a:t>
             </a:r>
           </a:p>
           <a:p>
             <a:pPr lvl="1"/>
             <a:r>
-              <a:rPr lang="es-ES"/>
+              <a:rPr lang="es-ES" smtClean="0"/>
               <a:t>Segundo nivel</a:t>
             </a:r>
           </a:p>
           <a:p>
             <a:pPr lvl="2"/>
             <a:r>
-              <a:rPr lang="es-ES"/>
+              <a:rPr lang="es-ES" smtClean="0"/>
               <a:t>Tercer nivel</a:t>
             </a:r>
           </a:p>
           <a:p>
             <a:pPr lvl="3"/>
             <a:r>
-              <a:rPr lang="es-ES"/>
+              <a:rPr lang="es-ES" smtClean="0"/>
               <a:t>Cuarto nivel</a:t>
             </a:r>
           </a:p>
           <a:p>
             <a:pPr lvl="4"/>
             <a:r>
-              <a:rPr lang="es-ES"/>
+              <a:rPr lang="es-ES" smtClean="0"/>
               <a:t>Quinto nivel</a:t>
             </a:r>
             <a:endParaRPr lang="en-US" dirty="0"/>
@@ -16675,7 +16627,7 @@
                 </a:solidFill>
               </a:rPr>
               <a:pPr/>
-              <a:t>09/30/2025</a:t>
+              <a:t>10/06/2025</a:t>
             </a:fld>
             <a:endParaRPr lang="es-PA">
               <a:solidFill>
@@ -16743,7 +16695,7 @@
     </p:spTree>
     <p:extLst>
       <p:ext uri="{BB962C8B-B14F-4D97-AF65-F5344CB8AC3E}">
-        <p14:creationId xmlns:p14="http://schemas.microsoft.com/office/powerpoint/2010/main" val="1770502221"/>
+        <p14:creationId xmlns:p14="http://schemas.microsoft.com/office/powerpoint/2010/main" val="3497653905"/>
       </p:ext>
     </p:extLst>
   </p:cSld>
@@ -16800,7 +16752,7 @@
                 </a:solidFill>
               </a:rPr>
               <a:pPr/>
-              <a:t>09/30/2025</a:t>
+              <a:t>10/06/2025</a:t>
             </a:fld>
             <a:endParaRPr lang="es-PA">
               <a:solidFill>
@@ -16939,7 +16891,7 @@
           </a:lstStyle>
           <a:p>
             <a:r>
-              <a:rPr lang="es-ES"/>
+              <a:rPr lang="es-ES" smtClean="0"/>
               <a:t>Haga clic para modificar el estilo de título del patrón</a:t>
             </a:r>
             <a:endParaRPr lang="en-US" dirty="0"/>
@@ -16999,35 +16951,35 @@
           <a:p>
             <a:pPr lvl="0"/>
             <a:r>
-              <a:rPr lang="es-ES"/>
+              <a:rPr lang="es-ES" smtClean="0"/>
               <a:t>Haga clic para modificar el estilo de texto del patrón</a:t>
             </a:r>
           </a:p>
           <a:p>
             <a:pPr lvl="1"/>
             <a:r>
-              <a:rPr lang="es-ES"/>
+              <a:rPr lang="es-ES" smtClean="0"/>
               <a:t>Segundo nivel</a:t>
             </a:r>
           </a:p>
           <a:p>
             <a:pPr lvl="2"/>
             <a:r>
-              <a:rPr lang="es-ES"/>
+              <a:rPr lang="es-ES" smtClean="0"/>
               <a:t>Tercer nivel</a:t>
             </a:r>
           </a:p>
           <a:p>
             <a:pPr lvl="3"/>
             <a:r>
-              <a:rPr lang="es-ES"/>
+              <a:rPr lang="es-ES" smtClean="0"/>
               <a:t>Cuarto nivel</a:t>
             </a:r>
           </a:p>
           <a:p>
             <a:pPr lvl="4"/>
             <a:r>
-              <a:rPr lang="es-ES"/>
+              <a:rPr lang="es-ES" smtClean="0"/>
               <a:t>Quinto nivel</a:t>
             </a:r>
             <a:endParaRPr lang="en-US" dirty="0"/>
@@ -17096,7 +17048,7 @@
           <a:p>
             <a:pPr lvl="0"/>
             <a:r>
-              <a:rPr lang="es-ES"/>
+              <a:rPr lang="es-ES" smtClean="0"/>
               <a:t>Haga clic para modificar el estilo de texto del patrón</a:t>
             </a:r>
           </a:p>
@@ -17132,7 +17084,7 @@
                 </a:solidFill>
               </a:rPr>
               <a:pPr/>
-              <a:t>09/30/2025</a:t>
+              <a:t>10/06/2025</a:t>
             </a:fld>
             <a:endParaRPr lang="es-PA">
               <a:solidFill>
@@ -17271,7 +17223,7 @@
           </a:lstStyle>
           <a:p>
             <a:r>
-              <a:rPr lang="es-ES"/>
+              <a:rPr lang="es-ES" smtClean="0"/>
               <a:t>Haga clic para modificar el estilo de título del patrón</a:t>
             </a:r>
             <a:endParaRPr lang="en-US" dirty="0"/>
@@ -17339,7 +17291,7 @@
           </a:lstStyle>
           <a:p>
             <a:r>
-              <a:rPr lang="es-ES"/>
+              <a:rPr lang="es-ES" smtClean="0"/>
               <a:t>Haga clic en el icono para agregar una imagen</a:t>
             </a:r>
             <a:endParaRPr lang="en-US" dirty="0"/>
@@ -17408,7 +17360,7 @@
           <a:p>
             <a:pPr lvl="0"/>
             <a:r>
-              <a:rPr lang="es-ES"/>
+              <a:rPr lang="es-ES" smtClean="0"/>
               <a:t>Haga clic para modificar el estilo de texto del patrón</a:t>
             </a:r>
           </a:p>
@@ -17444,7 +17396,7 @@
                 </a:solidFill>
               </a:rPr>
               <a:pPr/>
-              <a:t>09/30/2025</a:t>
+              <a:t>10/06/2025</a:t>
             </a:fld>
             <a:endParaRPr lang="es-PA">
               <a:solidFill>
@@ -17955,13 +17907,18 @@
           <a:lstStyle/>
           <a:p>
             <a:r>
-              <a:rPr lang="en-US" dirty="0">
+              <a:rPr lang="en-US" dirty="0" smtClean="0">
                 <a:solidFill>
                   <a:schemeClr val="bg1"/>
                 </a:solidFill>
               </a:rPr>
               <a:t>PMO-MON-101</a:t>
             </a:r>
+            <a:endParaRPr lang="en-US" dirty="0">
+              <a:solidFill>
+                <a:schemeClr val="bg1"/>
+              </a:solidFill>
+            </a:endParaRPr>
           </a:p>
         </p:txBody>
       </p:sp>
@@ -18337,13 +18294,18 @@
           <a:lstStyle/>
           <a:p>
             <a:r>
-              <a:rPr lang="en-US" dirty="0">
+              <a:rPr lang="en-US" dirty="0" smtClean="0">
                 <a:solidFill>
                   <a:schemeClr val="tx1"/>
                 </a:solidFill>
               </a:rPr>
               <a:t>PMO-MON-101</a:t>
             </a:r>
+            <a:endParaRPr lang="en-US" dirty="0">
+              <a:solidFill>
+                <a:schemeClr val="tx1"/>
+              </a:solidFill>
+            </a:endParaRPr>
           </a:p>
         </p:txBody>
       </p:sp>
@@ -18718,13 +18680,18 @@
           <a:lstStyle/>
           <a:p>
             <a:r>
-              <a:rPr lang="en-US" dirty="0">
+              <a:rPr lang="en-US" dirty="0" smtClean="0">
                 <a:solidFill>
                   <a:schemeClr val="bg1"/>
                 </a:solidFill>
               </a:rPr>
               <a:t>PMO-MON-101</a:t>
             </a:r>
+            <a:endParaRPr lang="en-US" dirty="0">
+              <a:solidFill>
+                <a:schemeClr val="bg1"/>
+              </a:solidFill>
+            </a:endParaRPr>
           </a:p>
         </p:txBody>
       </p:sp>
@@ -19071,21 +19038,21 @@
           <a:gradFill flip="none" rotWithShape="1">
             <a:gsLst>
               <a:gs pos="0">
-                <a:schemeClr val="bg2">
+                <a:schemeClr val="accent1">
                   <a:lumMod val="60000"/>
                   <a:lumOff val="40000"/>
                   <a:alpha val="7000"/>
                 </a:schemeClr>
               </a:gs>
               <a:gs pos="69000">
-                <a:schemeClr val="bg2">
+                <a:schemeClr val="accent1">
                   <a:lumMod val="60000"/>
                   <a:lumOff val="40000"/>
                   <a:alpha val="0"/>
                 </a:schemeClr>
               </a:gs>
               <a:gs pos="36000">
-                <a:schemeClr val="bg2">
+                <a:schemeClr val="accent1">
                   <a:lumMod val="60000"/>
                   <a:lumOff val="40000"/>
                   <a:alpha val="6000"/>
@@ -19134,21 +19101,21 @@
           <a:gradFill flip="none" rotWithShape="1">
             <a:gsLst>
               <a:gs pos="0">
-                <a:schemeClr val="bg2">
+                <a:schemeClr val="accent1">
                   <a:lumMod val="60000"/>
                   <a:lumOff val="40000"/>
                   <a:alpha val="14000"/>
                 </a:schemeClr>
               </a:gs>
               <a:gs pos="73000">
-                <a:schemeClr val="bg2">
+                <a:schemeClr val="accent1">
                   <a:lumMod val="60000"/>
                   <a:lumOff val="40000"/>
                   <a:alpha val="0"/>
                 </a:schemeClr>
               </a:gs>
               <a:gs pos="36000">
-                <a:schemeClr val="bg2">
+                <a:schemeClr val="accent1">
                   <a:lumMod val="60000"/>
                   <a:lumOff val="40000"/>
                   <a:alpha val="7000"/>
@@ -19197,21 +19164,21 @@
           <a:gradFill flip="none" rotWithShape="1">
             <a:gsLst>
               <a:gs pos="0">
-                <a:schemeClr val="bg2">
+                <a:schemeClr val="accent1">
                   <a:lumMod val="60000"/>
                   <a:lumOff val="40000"/>
-                  <a:alpha val="9000"/>
+                  <a:alpha val="10000"/>
                 </a:schemeClr>
               </a:gs>
               <a:gs pos="66000">
-                <a:schemeClr val="bg2">
+                <a:schemeClr val="accent1">
                   <a:lumMod val="60000"/>
                   <a:lumOff val="40000"/>
                   <a:alpha val="0"/>
                 </a:schemeClr>
               </a:gs>
-              <a:gs pos="36000">
-                <a:schemeClr val="bg2">
+              <a:gs pos="31000">
+                <a:schemeClr val="accent1">
                   <a:lumMod val="60000"/>
                   <a:lumOff val="40000"/>
                   <a:alpha val="5000"/>
@@ -19260,21 +19227,21 @@
           <a:gradFill flip="none" rotWithShape="1">
             <a:gsLst>
               <a:gs pos="0">
-                <a:schemeClr val="bg2">
+                <a:schemeClr val="accent1">
                   <a:lumMod val="60000"/>
                   <a:lumOff val="40000"/>
                   <a:alpha val="11000"/>
                 </a:schemeClr>
               </a:gs>
               <a:gs pos="75000">
-                <a:schemeClr val="bg2">
+                <a:schemeClr val="accent1">
                   <a:lumMod val="60000"/>
                   <a:lumOff val="40000"/>
                   <a:alpha val="0"/>
                 </a:schemeClr>
               </a:gs>
               <a:gs pos="36000">
-                <a:schemeClr val="bg2">
+                <a:schemeClr val="accent1">
                   <a:lumMod val="60000"/>
                   <a:lumOff val="40000"/>
                   <a:alpha val="10000"/>
@@ -19323,21 +19290,21 @@
           <a:gradFill flip="none" rotWithShape="1">
             <a:gsLst>
               <a:gs pos="0">
-                <a:schemeClr val="bg2">
+                <a:schemeClr val="accent1">
                   <a:lumMod val="60000"/>
                   <a:lumOff val="40000"/>
                   <a:alpha val="8000"/>
                 </a:schemeClr>
               </a:gs>
               <a:gs pos="72000">
-                <a:schemeClr val="bg2">
+                <a:schemeClr val="accent1">
                   <a:lumMod val="60000"/>
                   <a:lumOff val="40000"/>
                   <a:alpha val="0"/>
                 </a:schemeClr>
               </a:gs>
               <a:gs pos="36000">
-                <a:schemeClr val="bg2">
+                <a:schemeClr val="accent1">
                   <a:lumMod val="60000"/>
                   <a:lumOff val="40000"/>
                   <a:alpha val="8000"/>
@@ -19431,7 +19398,7 @@
           <a:lstStyle/>
           <a:p>
             <a:r>
-              <a:rPr lang="es-ES"/>
+              <a:rPr lang="es-ES" smtClean="0"/>
               <a:t>Haga clic para modificar el estilo de título del patrón</a:t>
             </a:r>
             <a:endParaRPr lang="en-US" dirty="0"/>
@@ -19465,35 +19432,35 @@
           <a:p>
             <a:pPr lvl="0"/>
             <a:r>
-              <a:rPr lang="es-ES"/>
-              <a:t>Haga clic para modificar los estilos de texto del patrón</a:t>
+              <a:rPr lang="es-ES" smtClean="0"/>
+              <a:t>Haga clic para modificar el estilo de texto del patrón</a:t>
             </a:r>
           </a:p>
           <a:p>
             <a:pPr lvl="1"/>
             <a:r>
-              <a:rPr lang="es-ES"/>
+              <a:rPr lang="es-ES" smtClean="0"/>
               <a:t>Segundo nivel</a:t>
             </a:r>
           </a:p>
           <a:p>
             <a:pPr lvl="2"/>
             <a:r>
-              <a:rPr lang="es-ES"/>
+              <a:rPr lang="es-ES" smtClean="0"/>
               <a:t>Tercer nivel</a:t>
             </a:r>
           </a:p>
           <a:p>
             <a:pPr lvl="3"/>
             <a:r>
-              <a:rPr lang="es-ES"/>
+              <a:rPr lang="es-ES" smtClean="0"/>
               <a:t>Cuarto nivel</a:t>
             </a:r>
           </a:p>
           <a:p>
             <a:pPr lvl="4"/>
             <a:r>
-              <a:rPr lang="es-ES"/>
+              <a:rPr lang="es-ES" smtClean="0"/>
               <a:t>Quinto nivel</a:t>
             </a:r>
             <a:endParaRPr lang="en-US" dirty="0"/>
@@ -19536,7 +19503,7 @@
           <a:p>
             <a:fld id="{4AAD347D-5ACD-4C99-B74B-A9C85AD731AF}" type="datetimeFigureOut">
               <a:rPr lang="en-US" dirty="0"/>
-              <a:t>9/30/2025</a:t>
+              <a:t>10/6/2025</a:t>
             </a:fld>
             <a:endParaRPr lang="en-US" dirty="0"/>
           </a:p>
@@ -19590,7 +19557,7 @@
             <p:ph type="sldNum" sz="quarter" idx="4"/>
           </p:nvPr>
         </p:nvSpPr>
-        <p:spPr bwMode="gray">
+        <p:spPr>
           <a:xfrm>
             <a:off x="7766431" y="295736"/>
             <a:ext cx="628813" cy="767687"/>
@@ -19624,33 +19591,33 @@
     </p:spTree>
     <p:extLst>
       <p:ext uri="{BB962C8B-B14F-4D97-AF65-F5344CB8AC3E}">
-        <p14:creationId xmlns:p14="http://schemas.microsoft.com/office/powerpoint/2010/main" val="4124044682"/>
+        <p14:creationId xmlns:p14="http://schemas.microsoft.com/office/powerpoint/2010/main" val="171915631"/>
       </p:ext>
     </p:extLst>
   </p:cSld>
   <p:clrMap bg1="dk1" tx1="lt1" bg2="dk2" tx2="lt2" accent1="accent1" accent2="accent2" accent3="accent3" accent4="accent4" accent5="accent5" accent6="accent6" hlink="hlink" folHlink="folHlink"/>
   <p:sldLayoutIdLst>
-    <p:sldLayoutId id="2147483859" r:id="rId1"/>
-    <p:sldLayoutId id="2147483860" r:id="rId2"/>
-    <p:sldLayoutId id="2147483861" r:id="rId3"/>
-    <p:sldLayoutId id="2147483862" r:id="rId4"/>
-    <p:sldLayoutId id="2147483863" r:id="rId5"/>
-    <p:sldLayoutId id="2147483864" r:id="rId6"/>
-    <p:sldLayoutId id="2147483865" r:id="rId7"/>
-    <p:sldLayoutId id="2147483866" r:id="rId8"/>
-    <p:sldLayoutId id="2147483867" r:id="rId9"/>
-    <p:sldLayoutId id="2147483868" r:id="rId10"/>
-    <p:sldLayoutId id="2147483869" r:id="rId11"/>
-    <p:sldLayoutId id="2147483870" r:id="rId12"/>
-    <p:sldLayoutId id="2147483871" r:id="rId13"/>
-    <p:sldLayoutId id="2147483872" r:id="rId14"/>
-    <p:sldLayoutId id="2147483873" r:id="rId15"/>
-    <p:sldLayoutId id="2147483874" r:id="rId16"/>
-    <p:sldLayoutId id="2147483875" r:id="rId17"/>
+    <p:sldLayoutId id="2147483841" r:id="rId1"/>
+    <p:sldLayoutId id="2147483842" r:id="rId2"/>
+    <p:sldLayoutId id="2147483843" r:id="rId3"/>
+    <p:sldLayoutId id="2147483844" r:id="rId4"/>
+    <p:sldLayoutId id="2147483845" r:id="rId5"/>
+    <p:sldLayoutId id="2147483846" r:id="rId6"/>
+    <p:sldLayoutId id="2147483847" r:id="rId7"/>
+    <p:sldLayoutId id="2147483848" r:id="rId8"/>
+    <p:sldLayoutId id="2147483849" r:id="rId9"/>
+    <p:sldLayoutId id="2147483850" r:id="rId10"/>
+    <p:sldLayoutId id="2147483851" r:id="rId11"/>
+    <p:sldLayoutId id="2147483852" r:id="rId12"/>
+    <p:sldLayoutId id="2147483853" r:id="rId13"/>
+    <p:sldLayoutId id="2147483854" r:id="rId14"/>
+    <p:sldLayoutId id="2147483855" r:id="rId15"/>
+    <p:sldLayoutId id="2147483856" r:id="rId16"/>
+    <p:sldLayoutId id="2147483857" r:id="rId17"/>
   </p:sldLayoutIdLst>
   <p:txStyles>
     <p:titleStyle>
-      <a:lvl1pPr algn="l" defTabSz="457207" rtl="0" eaLnBrk="1" latinLnBrk="0" hangingPunct="1">
+      <a:lvl1pPr algn="l" defTabSz="457200" rtl="0" eaLnBrk="1" latinLnBrk="0" hangingPunct="1">
         <a:spcBef>
           <a:spcPct val="0"/>
         </a:spcBef>
@@ -19722,7 +19689,7 @@
       </a:lvl9pPr>
     </p:titleStyle>
     <p:bodyStyle>
-      <a:lvl1pPr marL="342906" indent="-342906" algn="l" defTabSz="457207" rtl="0" eaLnBrk="1" latinLnBrk="0" hangingPunct="1">
+      <a:lvl1pPr marL="342900" indent="-342900" algn="l" defTabSz="457200" rtl="0" eaLnBrk="1" latinLnBrk="0" hangingPunct="1">
         <a:spcBef>
           <a:spcPts val="1000"/>
         </a:spcBef>
@@ -19730,10 +19697,7 @@
           <a:spcPts val="0"/>
         </a:spcAft>
         <a:buClr>
-          <a:schemeClr val="bg2">
-            <a:lumMod val="40000"/>
-            <a:lumOff val="60000"/>
-          </a:schemeClr>
+          <a:schemeClr val="accent1"/>
         </a:buClr>
         <a:buSzPct val="80000"/>
         <a:buFont typeface="Wingdings 3" charset="2"/>
@@ -19747,7 +19711,7 @@
           <a:cs typeface="+mj-cs"/>
         </a:defRPr>
       </a:lvl1pPr>
-      <a:lvl2pPr marL="742962" indent="-285755" algn="l" defTabSz="457207" rtl="0" eaLnBrk="1" latinLnBrk="0" hangingPunct="1">
+      <a:lvl2pPr marL="742950" indent="-285750" algn="l" defTabSz="457200" rtl="0" eaLnBrk="1" latinLnBrk="0" hangingPunct="1">
         <a:spcBef>
           <a:spcPts val="1000"/>
         </a:spcBef>
@@ -19755,10 +19719,7 @@
           <a:spcPts val="0"/>
         </a:spcAft>
         <a:buClr>
-          <a:schemeClr val="bg2">
-            <a:lumMod val="40000"/>
-            <a:lumOff val="60000"/>
-          </a:schemeClr>
+          <a:schemeClr val="accent1"/>
         </a:buClr>
         <a:buSzPct val="80000"/>
         <a:buFont typeface="Wingdings 3" charset="2"/>
@@ -19772,7 +19733,7 @@
           <a:cs typeface="+mj-cs"/>
         </a:defRPr>
       </a:lvl2pPr>
-      <a:lvl3pPr marL="1143020" indent="-228604" algn="l" defTabSz="457207" rtl="0" eaLnBrk="1" latinLnBrk="0" hangingPunct="1">
+      <a:lvl3pPr marL="1143000" indent="-228600" algn="l" defTabSz="457200" rtl="0" eaLnBrk="1" latinLnBrk="0" hangingPunct="1">
         <a:spcBef>
           <a:spcPts val="1000"/>
         </a:spcBef>
@@ -19780,10 +19741,7 @@
           <a:spcPts val="0"/>
         </a:spcAft>
         <a:buClr>
-          <a:schemeClr val="bg2">
-            <a:lumMod val="40000"/>
-            <a:lumOff val="60000"/>
-          </a:schemeClr>
+          <a:schemeClr val="accent1"/>
         </a:buClr>
         <a:buSzPct val="80000"/>
         <a:buFont typeface="Wingdings 3" charset="2"/>
@@ -19797,7 +19755,7 @@
           <a:cs typeface="+mj-cs"/>
         </a:defRPr>
       </a:lvl3pPr>
-      <a:lvl4pPr marL="1600227" indent="-228604" algn="l" defTabSz="457207" rtl="0" eaLnBrk="1" latinLnBrk="0" hangingPunct="1">
+      <a:lvl4pPr marL="1600200" indent="-228600" algn="l" defTabSz="457200" rtl="0" eaLnBrk="1" latinLnBrk="0" hangingPunct="1">
         <a:spcBef>
           <a:spcPts val="1000"/>
         </a:spcBef>
@@ -19805,10 +19763,7 @@
           <a:spcPts val="0"/>
         </a:spcAft>
         <a:buClr>
-          <a:schemeClr val="bg2">
-            <a:lumMod val="40000"/>
-            <a:lumOff val="60000"/>
-          </a:schemeClr>
+          <a:schemeClr val="accent1"/>
         </a:buClr>
         <a:buSzPct val="80000"/>
         <a:buFont typeface="Wingdings 3" charset="2"/>
@@ -19822,7 +19777,7 @@
           <a:cs typeface="+mj-cs"/>
         </a:defRPr>
       </a:lvl4pPr>
-      <a:lvl5pPr marL="2057434" indent="-228604" algn="l" defTabSz="457207" rtl="0" eaLnBrk="1" latinLnBrk="0" hangingPunct="1">
+      <a:lvl5pPr marL="2057400" indent="-228600" algn="l" defTabSz="457200" rtl="0" eaLnBrk="1" latinLnBrk="0" hangingPunct="1">
         <a:spcBef>
           <a:spcPts val="1000"/>
         </a:spcBef>
@@ -19830,10 +19785,7 @@
           <a:spcPts val="0"/>
         </a:spcAft>
         <a:buClr>
-          <a:schemeClr val="bg2">
-            <a:lumMod val="40000"/>
-            <a:lumOff val="60000"/>
-          </a:schemeClr>
+          <a:schemeClr val="accent1"/>
         </a:buClr>
         <a:buSzPct val="80000"/>
         <a:buFont typeface="Wingdings 3" charset="2"/>
@@ -19847,7 +19799,7 @@
           <a:cs typeface="+mj-cs"/>
         </a:defRPr>
       </a:lvl5pPr>
-      <a:lvl6pPr marL="2514642" indent="-228604" algn="l" defTabSz="457207" rtl="0" eaLnBrk="1" latinLnBrk="0" hangingPunct="1">
+      <a:lvl6pPr marL="2514600" indent="-228600" algn="l" defTabSz="457200" rtl="0" eaLnBrk="1" latinLnBrk="0" hangingPunct="1">
         <a:spcBef>
           <a:spcPts val="1000"/>
         </a:spcBef>
@@ -19855,10 +19807,7 @@
           <a:spcPts val="0"/>
         </a:spcAft>
         <a:buClr>
-          <a:schemeClr val="bg2">
-            <a:lumMod val="40000"/>
-            <a:lumOff val="60000"/>
-          </a:schemeClr>
+          <a:schemeClr val="accent1"/>
         </a:buClr>
         <a:buSzPct val="80000"/>
         <a:buFont typeface="Wingdings 3" charset="2"/>
@@ -19872,7 +19821,7 @@
           <a:cs typeface="+mj-cs"/>
         </a:defRPr>
       </a:lvl6pPr>
-      <a:lvl7pPr marL="2971849" indent="-228604" algn="l" defTabSz="457207" rtl="0" eaLnBrk="1" latinLnBrk="0" hangingPunct="1">
+      <a:lvl7pPr marL="2971800" indent="-228600" algn="l" defTabSz="457200" rtl="0" eaLnBrk="1" latinLnBrk="0" hangingPunct="1">
         <a:spcBef>
           <a:spcPts val="1000"/>
         </a:spcBef>
@@ -19880,10 +19829,7 @@
           <a:spcPts val="0"/>
         </a:spcAft>
         <a:buClr>
-          <a:schemeClr val="bg2">
-            <a:lumMod val="40000"/>
-            <a:lumOff val="60000"/>
-          </a:schemeClr>
+          <a:schemeClr val="accent1"/>
         </a:buClr>
         <a:buSzPct val="80000"/>
         <a:buFont typeface="Wingdings 3" charset="2"/>
@@ -19897,7 +19843,7 @@
           <a:cs typeface="+mj-cs"/>
         </a:defRPr>
       </a:lvl7pPr>
-      <a:lvl8pPr marL="3429057" indent="-228604" algn="l" defTabSz="457207" rtl="0" eaLnBrk="1" latinLnBrk="0" hangingPunct="1">
+      <a:lvl8pPr marL="3429000" indent="-228600" algn="l" defTabSz="457200" rtl="0" eaLnBrk="1" latinLnBrk="0" hangingPunct="1">
         <a:spcBef>
           <a:spcPts val="1000"/>
         </a:spcBef>
@@ -19905,10 +19851,7 @@
           <a:spcPts val="0"/>
         </a:spcAft>
         <a:buClr>
-          <a:schemeClr val="bg2">
-            <a:lumMod val="40000"/>
-            <a:lumOff val="60000"/>
-          </a:schemeClr>
+          <a:schemeClr val="accent1"/>
         </a:buClr>
         <a:buSzPct val="80000"/>
         <a:buFont typeface="Wingdings 3" charset="2"/>
@@ -19922,7 +19865,7 @@
           <a:cs typeface="+mj-cs"/>
         </a:defRPr>
       </a:lvl8pPr>
-      <a:lvl9pPr marL="3886264" indent="-228604" algn="l" defTabSz="457207" rtl="0" eaLnBrk="1" latinLnBrk="0" hangingPunct="1">
+      <a:lvl9pPr marL="3886200" indent="-228600" algn="l" defTabSz="457200" rtl="0" eaLnBrk="1" latinLnBrk="0" hangingPunct="1">
         <a:spcBef>
           <a:spcPts val="1000"/>
         </a:spcBef>
@@ -19930,10 +19873,7 @@
           <a:spcPts val="0"/>
         </a:spcAft>
         <a:buClr>
-          <a:schemeClr val="bg2">
-            <a:lumMod val="40000"/>
-            <a:lumOff val="60000"/>
-          </a:schemeClr>
+          <a:schemeClr val="accent1"/>
         </a:buClr>
         <a:buSzPct val="80000"/>
         <a:buFont typeface="Wingdings 3" charset="2"/>
@@ -19952,7 +19892,7 @@
       <a:defPPr>
         <a:defRPr lang="en-US"/>
       </a:defPPr>
-      <a:lvl1pPr marL="0" algn="l" defTabSz="457207" rtl="0" eaLnBrk="1" latinLnBrk="0" hangingPunct="1">
+      <a:lvl1pPr marL="0" algn="l" defTabSz="457200" rtl="0" eaLnBrk="1" latinLnBrk="0" hangingPunct="1">
         <a:defRPr sz="1800" kern="1200">
           <a:solidFill>
             <a:schemeClr val="tx1"/>
@@ -19962,7 +19902,7 @@
           <a:cs typeface="+mn-cs"/>
         </a:defRPr>
       </a:lvl1pPr>
-      <a:lvl2pPr marL="457207" algn="l" defTabSz="457207" rtl="0" eaLnBrk="1" latinLnBrk="0" hangingPunct="1">
+      <a:lvl2pPr marL="457200" algn="l" defTabSz="457200" rtl="0" eaLnBrk="1" latinLnBrk="0" hangingPunct="1">
         <a:defRPr sz="1800" kern="1200">
           <a:solidFill>
             <a:schemeClr val="tx1"/>
@@ -19972,7 +19912,7 @@
           <a:cs typeface="+mn-cs"/>
         </a:defRPr>
       </a:lvl2pPr>
-      <a:lvl3pPr marL="914415" algn="l" defTabSz="457207" rtl="0" eaLnBrk="1" latinLnBrk="0" hangingPunct="1">
+      <a:lvl3pPr marL="914400" algn="l" defTabSz="457200" rtl="0" eaLnBrk="1" latinLnBrk="0" hangingPunct="1">
         <a:defRPr sz="1800" kern="1200">
           <a:solidFill>
             <a:schemeClr val="tx1"/>
@@ -19982,7 +19922,7 @@
           <a:cs typeface="+mn-cs"/>
         </a:defRPr>
       </a:lvl3pPr>
-      <a:lvl4pPr marL="1371622" algn="l" defTabSz="457207" rtl="0" eaLnBrk="1" latinLnBrk="0" hangingPunct="1">
+      <a:lvl4pPr marL="1371600" algn="l" defTabSz="457200" rtl="0" eaLnBrk="1" latinLnBrk="0" hangingPunct="1">
         <a:defRPr sz="1800" kern="1200">
           <a:solidFill>
             <a:schemeClr val="tx1"/>
@@ -19992,7 +19932,7 @@
           <a:cs typeface="+mn-cs"/>
         </a:defRPr>
       </a:lvl4pPr>
-      <a:lvl5pPr marL="1828831" algn="l" defTabSz="457207" rtl="0" eaLnBrk="1" latinLnBrk="0" hangingPunct="1">
+      <a:lvl5pPr marL="1828800" algn="l" defTabSz="457200" rtl="0" eaLnBrk="1" latinLnBrk="0" hangingPunct="1">
         <a:defRPr sz="1800" kern="1200">
           <a:solidFill>
             <a:schemeClr val="tx1"/>
@@ -20002,7 +19942,7 @@
           <a:cs typeface="+mn-cs"/>
         </a:defRPr>
       </a:lvl5pPr>
-      <a:lvl6pPr marL="2286038" algn="l" defTabSz="457207" rtl="0" eaLnBrk="1" latinLnBrk="0" hangingPunct="1">
+      <a:lvl6pPr marL="2286000" algn="l" defTabSz="457200" rtl="0" eaLnBrk="1" latinLnBrk="0" hangingPunct="1">
         <a:defRPr sz="1800" kern="1200">
           <a:solidFill>
             <a:schemeClr val="tx1"/>
@@ -20012,7 +19952,7 @@
           <a:cs typeface="+mn-cs"/>
         </a:defRPr>
       </a:lvl6pPr>
-      <a:lvl7pPr marL="2743246" algn="l" defTabSz="457207" rtl="0" eaLnBrk="1" latinLnBrk="0" hangingPunct="1">
+      <a:lvl7pPr marL="2743200" algn="l" defTabSz="457200" rtl="0" eaLnBrk="1" latinLnBrk="0" hangingPunct="1">
         <a:defRPr sz="1800" kern="1200">
           <a:solidFill>
             <a:schemeClr val="tx1"/>
@@ -20022,7 +19962,7 @@
           <a:cs typeface="+mn-cs"/>
         </a:defRPr>
       </a:lvl7pPr>
-      <a:lvl8pPr marL="3200453" algn="l" defTabSz="457207" rtl="0" eaLnBrk="1" latinLnBrk="0" hangingPunct="1">
+      <a:lvl8pPr marL="3200400" algn="l" defTabSz="457200" rtl="0" eaLnBrk="1" latinLnBrk="0" hangingPunct="1">
         <a:defRPr sz="1800" kern="1200">
           <a:solidFill>
             <a:schemeClr val="tx1"/>
@@ -20032,7 +19972,7 @@
           <a:cs typeface="+mn-cs"/>
         </a:defRPr>
       </a:lvl8pPr>
-      <a:lvl9pPr marL="3657661" algn="l" defTabSz="457207" rtl="0" eaLnBrk="1" latinLnBrk="0" hangingPunct="1">
+      <a:lvl9pPr marL="3657600" algn="l" defTabSz="457200" rtl="0" eaLnBrk="1" latinLnBrk="0" hangingPunct="1">
         <a:defRPr sz="1800" kern="1200">
           <a:solidFill>
             <a:schemeClr val="tx1"/>
@@ -20066,13 +20006,71 @@
       </p:grpSpPr>
       <p:sp>
         <p:nvSpPr>
+          <p:cNvPr id="2" name="CuadroTexto 1"/>
+          <p:cNvSpPr txBox="1"/>
+          <p:nvPr/>
+        </p:nvSpPr>
+        <p:spPr>
+          <a:xfrm>
+            <a:off x="1691680" y="620688"/>
+            <a:ext cx="6020396" cy="954107"/>
+          </a:xfrm>
+          <a:prstGeom prst="rect">
+            <a:avLst/>
+          </a:prstGeom>
+          <a:noFill/>
+        </p:spPr>
+        <p:txBody>
+          <a:bodyPr wrap="square" rtlCol="0">
+            <a:spAutoFit/>
+          </a:bodyPr>
+          <a:lstStyle/>
+          <a:p>
+            <a:pPr algn="ctr"/>
+            <a:r>
+              <a:rPr lang="es-PA" sz="2800" b="1" dirty="0" smtClean="0">
+                <a:solidFill>
+                  <a:prstClr val="white"/>
+                </a:solidFill>
+              </a:rPr>
+              <a:t>REUNION DE DEMOSTRACION Y</a:t>
+            </a:r>
+          </a:p>
+          <a:p>
+            <a:pPr algn="ctr"/>
+            <a:r>
+              <a:rPr lang="es-PA" sz="2800" b="1" dirty="0" smtClean="0">
+                <a:solidFill>
+                  <a:prstClr val="white"/>
+                </a:solidFill>
+              </a:rPr>
+              <a:t>REVISION DEL SPRINT </a:t>
+            </a:r>
+            <a:r>
+              <a:rPr lang="es-PA" sz="2800" b="1" dirty="0" smtClean="0">
+                <a:solidFill>
+                  <a:prstClr val="white"/>
+                </a:solidFill>
+              </a:rPr>
+              <a:t>1</a:t>
+            </a:r>
+            <a:endParaRPr lang="en-US" sz="2800" b="1" dirty="0">
+              <a:solidFill>
+                <a:prstClr val="white"/>
+              </a:solidFill>
+            </a:endParaRPr>
+          </a:p>
+        </p:txBody>
+      </p:sp>
+      <p:sp>
+        <p:nvSpPr>
           <p:cNvPr id="3" name="CuadroTexto 1"/>
           <p:cNvSpPr txBox="1"/>
           <p:nvPr/>
         </p:nvSpPr>
         <p:spPr>
           <a:xfrm>
-            <a:off x="1475656" y="2276872"/>
+            <a:off x="1403648" y="4293096"/>
             <a:ext cx="6020396" cy="1384995"/>
           </a:xfrm>
           <a:prstGeom prst="rect">
@@ -20088,181 +20086,34 @@
           <a:p>
             <a:pPr algn="ctr"/>
             <a:r>
-              <a:rPr lang="es-PA" sz="2800" b="1" dirty="0">
+              <a:rPr lang="es-PA" sz="2800" b="1" dirty="0" smtClean="0">
                 <a:solidFill>
                   <a:prstClr val="white"/>
                 </a:solidFill>
               </a:rPr>
               <a:t>TUTOR VIRTUAL DE LECTURA CRITICA</a:t>
             </a:r>
+            <a:endParaRPr lang="es-PA" sz="2800" b="1" dirty="0" smtClean="0">
+              <a:solidFill>
+                <a:prstClr val="white"/>
+              </a:solidFill>
+            </a:endParaRPr>
           </a:p>
           <a:p>
             <a:pPr algn="ctr"/>
             <a:r>
-              <a:rPr lang="es-PA" sz="2800" b="1" dirty="0">
+              <a:rPr lang="es-PA" sz="2800" b="1" dirty="0" smtClean="0">
                 <a:solidFill>
                   <a:prstClr val="white"/>
                 </a:solidFill>
               </a:rPr>
-              <a:t>30/09/2025</a:t>
-            </a:r>
-          </a:p>
-        </p:txBody>
-      </p:sp>
-      <p:sp>
-        <p:nvSpPr>
-          <p:cNvPr id="4" name="Rectángulo 3">
-            <a:extLst>
-              <a:ext uri="{FF2B5EF4-FFF2-40B4-BE49-F238E27FC236}">
-                <a16:creationId xmlns:a16="http://schemas.microsoft.com/office/drawing/2014/main" id="{8B168113-7F6A-455C-897F-344FB9A96A21}"/>
-              </a:ext>
-            </a:extLst>
-          </p:cNvPr>
-          <p:cNvSpPr/>
-          <p:nvPr/>
-        </p:nvSpPr>
-        <p:spPr>
-          <a:xfrm>
-            <a:off x="206061" y="332656"/>
-            <a:ext cx="8731878" cy="1446550"/>
-          </a:xfrm>
-          <a:prstGeom prst="rect">
-            <a:avLst/>
-          </a:prstGeom>
-          <a:noFill/>
-        </p:spPr>
-        <p:txBody>
-          <a:bodyPr wrap="none" lIns="91440" tIns="45720" rIns="91440" bIns="45720">
-            <a:spAutoFit/>
-          </a:bodyPr>
-          <a:lstStyle/>
-          <a:p>
-            <a:pPr algn="ctr"/>
-            <a:r>
-              <a:rPr lang="es-PA" sz="4400" b="1" cap="none" spc="50" dirty="0">
-                <a:ln w="0"/>
-                <a:solidFill>
-                  <a:srgbClr val="FFFF00"/>
-                </a:solidFill>
-                <a:effectLst>
-                  <a:innerShdw blurRad="63500" dist="50800" dir="13500000">
-                    <a:srgbClr val="000000">
-                      <a:alpha val="50000"/>
-                    </a:srgbClr>
-                  </a:innerShdw>
-                </a:effectLst>
-              </a:rPr>
-              <a:t>REUNION DE DEMOSTRACION Y</a:t>
-            </a:r>
-          </a:p>
-          <a:p>
-            <a:pPr algn="ctr"/>
-            <a:r>
-              <a:rPr lang="es-PA" sz="4400" b="1" cap="none" spc="50" dirty="0">
-                <a:ln w="0"/>
-                <a:solidFill>
-                  <a:srgbClr val="FFFF00"/>
-                </a:solidFill>
-                <a:effectLst>
-                  <a:innerShdw blurRad="63500" dist="50800" dir="13500000">
-                    <a:srgbClr val="000000">
-                      <a:alpha val="50000"/>
-                    </a:srgbClr>
-                  </a:innerShdw>
-                </a:effectLst>
-              </a:rPr>
-              <a:t>REVISION DEL SPRINT 1</a:t>
-            </a:r>
-            <a:endParaRPr lang="es-PE" sz="4400" b="1" cap="none" spc="50" dirty="0">
-              <a:ln w="0"/>
+              <a:t>06/10/2025</a:t>
+            </a:r>
+            <a:endParaRPr lang="es-PA" sz="2800" b="1" dirty="0">
               <a:solidFill>
-                <a:srgbClr val="FFFF00"/>
+                <a:prstClr val="white"/>
               </a:solidFill>
-              <a:effectLst>
-                <a:innerShdw blurRad="63500" dist="50800" dir="13500000">
-                  <a:srgbClr val="000000">
-                    <a:alpha val="50000"/>
-                  </a:srgbClr>
-                </a:innerShdw>
-              </a:effectLst>
             </a:endParaRPr>
-          </a:p>
-        </p:txBody>
-      </p:sp>
-      <p:sp>
-        <p:nvSpPr>
-          <p:cNvPr id="5" name="Rectángulo: esquinas diagonales redondeadas 4">
-            <a:extLst>
-              <a:ext uri="{FF2B5EF4-FFF2-40B4-BE49-F238E27FC236}">
-                <a16:creationId xmlns:a16="http://schemas.microsoft.com/office/drawing/2014/main" id="{5842CDDE-D344-4E64-9F31-39E0C778AC6E}"/>
-              </a:ext>
-            </a:extLst>
-          </p:cNvPr>
-          <p:cNvSpPr/>
-          <p:nvPr/>
-        </p:nvSpPr>
-        <p:spPr>
-          <a:xfrm>
-            <a:off x="395536" y="3789040"/>
-            <a:ext cx="7992888" cy="2448272"/>
-          </a:xfrm>
-          <a:prstGeom prst="round2DiagRect">
-            <a:avLst/>
-          </a:prstGeom>
-        </p:spPr>
-        <p:style>
-          <a:lnRef idx="2">
-            <a:schemeClr val="accent1">
-              <a:shade val="50000"/>
-            </a:schemeClr>
-          </a:lnRef>
-          <a:fillRef idx="1">
-            <a:schemeClr val="accent1"/>
-          </a:fillRef>
-          <a:effectRef idx="0">
-            <a:schemeClr val="accent1"/>
-          </a:effectRef>
-          <a:fontRef idx="minor">
-            <a:schemeClr val="lt1"/>
-          </a:fontRef>
-        </p:style>
-        <p:txBody>
-          <a:bodyPr rtlCol="0" anchor="ctr"/>
-          <a:lstStyle/>
-          <a:p>
-            <a:pPr algn="ctr"/>
-            <a:r>
-              <a:rPr lang="es-MX" dirty="0"/>
-              <a:t>NARVAEZ OJEDA, Carlos Andres</a:t>
-            </a:r>
-          </a:p>
-          <a:p>
-            <a:pPr algn="ctr"/>
-            <a:r>
-              <a:rPr lang="es-MX" dirty="0"/>
-              <a:t>TOVAR PAYANO, Diego MARC</a:t>
-            </a:r>
-          </a:p>
-          <a:p>
-            <a:pPr algn="ctr"/>
-            <a:r>
-              <a:rPr lang="es-MX" dirty="0"/>
-              <a:t>TORRES SANABRIA, Britney</a:t>
-            </a:r>
-          </a:p>
-          <a:p>
-            <a:pPr algn="ctr"/>
-            <a:r>
-              <a:rPr lang="es-MX" dirty="0"/>
-              <a:t>HERMOZA VILLAVICENCIO, Nicolas Fisher</a:t>
-            </a:r>
-          </a:p>
-          <a:p>
-            <a:pPr algn="ctr"/>
-            <a:r>
-              <a:rPr lang="es-MX" dirty="0"/>
-              <a:t>ALEJANDRO PAUCARCHUCO, Carlos Enrique</a:t>
-            </a:r>
           </a:p>
         </p:txBody>
       </p:sp>
@@ -20276,6 +20127,13 @@
   <p:clrMapOvr>
     <a:masterClrMapping/>
   </p:clrMapOvr>
+  <p:timing>
+    <p:tnLst>
+      <p:par>
+        <p:cTn id="1" dur="indefinite" restart="never" nodeType="tmRoot"/>
+      </p:par>
+    </p:tnLst>
+  </p:timing>
 </p:sld>
 </file>
 
@@ -20304,8 +20162,8 @@
         </p:nvSpPr>
         <p:spPr>
           <a:xfrm>
-            <a:off x="-180528" y="0"/>
-            <a:ext cx="9042860" cy="800219"/>
+            <a:off x="467544" y="1412776"/>
+            <a:ext cx="6372257" cy="1723549"/>
           </a:xfrm>
           <a:prstGeom prst="rect">
             <a:avLst/>
@@ -20317,6 +20175,12 @@
             <a:spAutoFit/>
           </a:bodyPr>
           <a:lstStyle/>
+          <a:p>
+            <a:r>
+              <a:rPr lang="es-PA" sz="2800" b="1" dirty="0" smtClean="0"/>
+              <a:t>AGENDA</a:t>
+            </a:r>
+          </a:p>
           <a:p>
             <a:endParaRPr lang="es-PA" dirty="0"/>
           </a:p>
@@ -20326,164 +20190,29 @@
               <a:buChar char="•"/>
             </a:pPr>
             <a:r>
-              <a:rPr lang="es-PA" sz="2800" b="1" dirty="0">
-                <a:ln w="22225">
-                  <a:solidFill>
-                    <a:schemeClr val="accent2"/>
-                  </a:solidFill>
-                  <a:prstDash val="solid"/>
-                </a:ln>
-                <a:solidFill>
-                  <a:schemeClr val="accent2">
-                    <a:lumMod val="40000"/>
-                    <a:lumOff val="60000"/>
-                  </a:schemeClr>
-                </a:solidFill>
-              </a:rPr>
-              <a:t>Historias de Usuario completadas en este Sprint 1</a:t>
-            </a:r>
-          </a:p>
-        </p:txBody>
-      </p:sp>
-      <p:sp>
-        <p:nvSpPr>
-          <p:cNvPr id="3" name="Diagrama de flujo: cinta perforada 2">
-            <a:extLst>
-              <a:ext uri="{FF2B5EF4-FFF2-40B4-BE49-F238E27FC236}">
-                <a16:creationId xmlns:a16="http://schemas.microsoft.com/office/drawing/2014/main" id="{584E5ECE-6F5F-4241-B9D6-74A89E09EC0C}"/>
-              </a:ext>
-            </a:extLst>
-          </p:cNvPr>
-          <p:cNvSpPr/>
-          <p:nvPr/>
-        </p:nvSpPr>
-        <p:spPr>
-          <a:xfrm>
-            <a:off x="395536" y="1412776"/>
-            <a:ext cx="8352928" cy="5328592"/>
-          </a:xfrm>
-          <a:prstGeom prst="flowChartPunchedTape">
-            <a:avLst/>
-          </a:prstGeom>
-          <a:gradFill flip="none" rotWithShape="1">
-            <a:gsLst>
-              <a:gs pos="0">
-                <a:schemeClr val="accent6">
-                  <a:lumMod val="67000"/>
-                </a:schemeClr>
-              </a:gs>
-              <a:gs pos="48000">
-                <a:schemeClr val="accent6">
-                  <a:lumMod val="97000"/>
-                  <a:lumOff val="3000"/>
-                </a:schemeClr>
-              </a:gs>
-              <a:gs pos="100000">
-                <a:schemeClr val="accent6">
-                  <a:lumMod val="60000"/>
-                  <a:lumOff val="40000"/>
-                </a:schemeClr>
-              </a:gs>
-            </a:gsLst>
-            <a:lin ang="16200000" scaled="1"/>
-            <a:tileRect/>
-          </a:gradFill>
-          <a:ln>
-            <a:noFill/>
-          </a:ln>
-        </p:spPr>
-        <p:style>
-          <a:lnRef idx="0">
-            <a:scrgbClr r="0" g="0" b="0"/>
-          </a:lnRef>
-          <a:fillRef idx="0">
-            <a:scrgbClr r="0" g="0" b="0"/>
-          </a:fillRef>
-          <a:effectRef idx="0">
-            <a:scrgbClr r="0" g="0" b="0"/>
-          </a:effectRef>
-          <a:fontRef idx="minor">
-            <a:schemeClr val="lt1"/>
-          </a:fontRef>
-        </p:style>
-        <p:txBody>
-          <a:bodyPr rtlCol="0" anchor="ctr"/>
-          <a:lstStyle/>
-          <a:p>
-            <a:r>
-              <a:rPr lang="es-MX" sz="1600" dirty="0"/>
-              <a:t>1:Pregunta de opción múltiple</a:t>
-            </a:r>
-          </a:p>
-          <a:p>
-            <a:r>
-              <a:rPr lang="es-MX" sz="1600" dirty="0"/>
-              <a:t>2: Preguntas abiertas, disponibilidad</a:t>
-            </a:r>
-          </a:p>
-          <a:p>
-            <a:r>
-              <a:rPr lang="es-MX" sz="1600" dirty="0"/>
-              <a:t>3: Retroalimentación de preguntas</a:t>
-            </a:r>
-          </a:p>
-          <a:p>
-            <a:r>
-              <a:rPr lang="es-MX" sz="1600" dirty="0"/>
-              <a:t>4: Ejemplos de auto guía</a:t>
-            </a:r>
-          </a:p>
-          <a:p>
-            <a:r>
-              <a:rPr lang="es-MX" sz="1600" dirty="0"/>
-              <a:t>5: Asignación de textos automática (MAESTRO)</a:t>
-            </a:r>
-          </a:p>
-          <a:p>
-            <a:r>
-              <a:rPr lang="es-MX" sz="1600" dirty="0"/>
-              <a:t>6: Generar actividades basados en texto</a:t>
-            </a:r>
-          </a:p>
-          <a:p>
-            <a:r>
-              <a:rPr lang="es-MX" sz="1600" dirty="0"/>
-              <a:t>7:Que el sistema tenga auto corrector</a:t>
-            </a:r>
-          </a:p>
-          <a:p>
-            <a:r>
-              <a:rPr lang="es-MX" sz="1600" dirty="0"/>
-              <a:t>8: Fundamento de gramática</a:t>
-            </a:r>
-          </a:p>
-          <a:p>
-            <a:r>
-              <a:rPr lang="es-MX" sz="1600" dirty="0"/>
-              <a:t>9: Preguntas aleatorias para practicas</a:t>
-            </a:r>
-          </a:p>
-          <a:p>
-            <a:r>
-              <a:rPr lang="es-MX" sz="1600" dirty="0"/>
-              <a:t>10: Gráficos estadísticos para calificaciones</a:t>
-            </a:r>
-          </a:p>
-          <a:p>
-            <a:r>
-              <a:rPr lang="es-MX" sz="1600" dirty="0"/>
-              <a:t>11: Exportación de resultados PDF</a:t>
-            </a:r>
-          </a:p>
-          <a:p>
-            <a:r>
-              <a:rPr lang="es-MX" sz="1600" dirty="0"/>
-              <a:t>12: Alertas académicas automatizadas.</a:t>
-            </a:r>
-          </a:p>
-          <a:p>
-            <a:pPr algn="ctr"/>
-            <a:endParaRPr lang="es-PE" dirty="0"/>
+              <a:rPr lang="es-PA" sz="2000" dirty="0" smtClean="0"/>
+              <a:t>Historias de Usuario completadas en este Sprint</a:t>
+            </a:r>
+          </a:p>
+          <a:p>
+            <a:pPr marL="342900" indent="-342900">
+              <a:buFont typeface="Arial" panose="020B0604020202020204" pitchFamily="34" charset="0"/>
+              <a:buChar char="•"/>
+            </a:pPr>
+            <a:r>
+              <a:rPr lang="es-PA" sz="2000" dirty="0" smtClean="0"/>
+              <a:t>Demostración del trabajo completado</a:t>
+            </a:r>
+          </a:p>
+          <a:p>
+            <a:pPr marL="342900" indent="-342900">
+              <a:buFont typeface="Arial" panose="020B0604020202020204" pitchFamily="34" charset="0"/>
+              <a:buChar char="•"/>
+            </a:pPr>
+            <a:r>
+              <a:rPr lang="es-PA" sz="2000" dirty="0" smtClean="0"/>
+              <a:t>Pendientes</a:t>
+            </a:r>
           </a:p>
         </p:txBody>
       </p:sp>
@@ -20491,6 +20220,1031 @@
     <p:extLst>
       <p:ext uri="{BB962C8B-B14F-4D97-AF65-F5344CB8AC3E}">
         <p14:creationId xmlns:p14="http://schemas.microsoft.com/office/powerpoint/2010/main" val="2723424320"/>
+      </p:ext>
+    </p:extLst>
+  </p:cSld>
+  <p:clrMapOvr>
+    <a:masterClrMapping/>
+  </p:clrMapOvr>
+  <p:timing>
+    <p:tnLst>
+      <p:par>
+        <p:cTn id="1" dur="indefinite" restart="never" nodeType="tmRoot"/>
+      </p:par>
+    </p:tnLst>
+  </p:timing>
+</p:sld>
+</file>
+
+<file path=ppt/slides/slide3.xml><?xml version="1.0" encoding="utf-8"?>
+<p:sld xmlns:a="http://schemas.openxmlformats.org/drawingml/2006/main" xmlns:r="http://schemas.openxmlformats.org/officeDocument/2006/relationships" xmlns:p="http://schemas.openxmlformats.org/presentationml/2006/main">
+  <p:cSld>
+    <p:spTree>
+      <p:nvGrpSpPr>
+        <p:cNvPr id="1" name=""/>
+        <p:cNvGrpSpPr/>
+        <p:nvPr/>
+      </p:nvGrpSpPr>
+      <p:grpSpPr>
+        <a:xfrm>
+          <a:off x="0" y="0"/>
+          <a:ext cx="0" cy="0"/>
+          <a:chOff x="0" y="0"/>
+          <a:chExt cx="0" cy="0"/>
+        </a:xfrm>
+      </p:grpSpPr>
+      <p:sp>
+        <p:nvSpPr>
+          <p:cNvPr id="2" name="Título 1"/>
+          <p:cNvSpPr>
+            <a:spLocks noGrp="1"/>
+          </p:cNvSpPr>
+          <p:nvPr>
+            <p:ph type="title"/>
+          </p:nvPr>
+        </p:nvSpPr>
+        <p:spPr/>
+        <p:txBody>
+          <a:bodyPr/>
+          <a:lstStyle/>
+          <a:p>
+            <a:r>
+              <a:rPr lang="en-US" dirty="0"/>
+              <a:t>AGENDA</a:t>
+            </a:r>
+          </a:p>
+        </p:txBody>
+      </p:sp>
+      <p:sp>
+        <p:nvSpPr>
+          <p:cNvPr id="3" name="Marcador de contenido 2"/>
+          <p:cNvSpPr>
+            <a:spLocks noGrp="1"/>
+          </p:cNvSpPr>
+          <p:nvPr>
+            <p:ph idx="1"/>
+          </p:nvPr>
+        </p:nvSpPr>
+        <p:spPr/>
+        <p:txBody>
+          <a:bodyPr/>
+          <a:lstStyle/>
+          <a:p>
+            <a:r>
+              <a:rPr lang="es-MX" dirty="0"/>
+              <a:t>Historias de Usuario completadas en este </a:t>
+            </a:r>
+            <a:r>
+              <a:rPr lang="es-MX" dirty="0" smtClean="0"/>
+              <a:t>Sprint</a:t>
+            </a:r>
+          </a:p>
+          <a:p>
+            <a:r>
+              <a:rPr lang="es-MX" dirty="0" smtClean="0"/>
+              <a:t>Demostración </a:t>
+            </a:r>
+            <a:r>
+              <a:rPr lang="es-MX" dirty="0"/>
+              <a:t>del trabajo </a:t>
+            </a:r>
+            <a:r>
+              <a:rPr lang="es-MX" dirty="0" smtClean="0"/>
+              <a:t>completado</a:t>
+            </a:r>
+          </a:p>
+          <a:p>
+            <a:r>
+              <a:rPr lang="es-MX" dirty="0" smtClean="0"/>
+              <a:t>Pendientes</a:t>
+            </a:r>
+            <a:endParaRPr lang="en-US" dirty="0"/>
+          </a:p>
+        </p:txBody>
+      </p:sp>
+    </p:spTree>
+    <p:extLst>
+      <p:ext uri="{BB962C8B-B14F-4D97-AF65-F5344CB8AC3E}">
+        <p14:creationId xmlns:p14="http://schemas.microsoft.com/office/powerpoint/2010/main" val="2293764213"/>
+      </p:ext>
+    </p:extLst>
+  </p:cSld>
+  <p:clrMapOvr>
+    <a:masterClrMapping/>
+  </p:clrMapOvr>
+</p:sld>
+</file>
+
+<file path=ppt/slides/slide4.xml><?xml version="1.0" encoding="utf-8"?>
+<p:sld xmlns:a="http://schemas.openxmlformats.org/drawingml/2006/main" xmlns:r="http://schemas.openxmlformats.org/officeDocument/2006/relationships" xmlns:p="http://schemas.openxmlformats.org/presentationml/2006/main">
+  <p:cSld>
+    <p:spTree>
+      <p:nvGrpSpPr>
+        <p:cNvPr id="1" name=""/>
+        <p:cNvGrpSpPr/>
+        <p:nvPr/>
+      </p:nvGrpSpPr>
+      <p:grpSpPr>
+        <a:xfrm>
+          <a:off x="0" y="0"/>
+          <a:ext cx="0" cy="0"/>
+          <a:chOff x="0" y="0"/>
+          <a:chExt cx="0" cy="0"/>
+        </a:xfrm>
+      </p:grpSpPr>
+      <p:sp>
+        <p:nvSpPr>
+          <p:cNvPr id="2" name="Título 1"/>
+          <p:cNvSpPr>
+            <a:spLocks noGrp="1"/>
+          </p:cNvSpPr>
+          <p:nvPr>
+            <p:ph type="title"/>
+          </p:nvPr>
+        </p:nvSpPr>
+        <p:spPr/>
+        <p:txBody>
+          <a:bodyPr/>
+          <a:lstStyle/>
+          <a:p>
+            <a:r>
+              <a:rPr lang="es-MX" dirty="0"/>
+              <a:t>Historias de Usuario completadas en </a:t>
+            </a:r>
+            <a:r>
+              <a:rPr lang="es-MX" dirty="0" smtClean="0"/>
+              <a:t>el Sprint</a:t>
+            </a:r>
+            <a:endParaRPr lang="en-US" dirty="0"/>
+          </a:p>
+        </p:txBody>
+      </p:sp>
+      <p:sp>
+        <p:nvSpPr>
+          <p:cNvPr id="3" name="Marcador de contenido 2"/>
+          <p:cNvSpPr>
+            <a:spLocks noGrp="1"/>
+          </p:cNvSpPr>
+          <p:nvPr>
+            <p:ph idx="1"/>
+          </p:nvPr>
+        </p:nvSpPr>
+        <p:spPr/>
+        <p:txBody>
+          <a:bodyPr>
+            <a:normAutofit fontScale="85000" lnSpcReduction="20000"/>
+          </a:bodyPr>
+          <a:lstStyle/>
+          <a:p>
+            <a:r>
+              <a:rPr lang="en-US" dirty="0"/>
+              <a:t>EPIC01 – ESTUDIANTE </a:t>
+            </a:r>
+            <a:r>
+              <a:rPr lang="en-US" dirty="0" smtClean="0"/>
+              <a:t>(</a:t>
+            </a:r>
+            <a:r>
+              <a:rPr lang="en-US" dirty="0"/>
+              <a:t>STU</a:t>
+            </a:r>
+            <a:r>
+              <a:rPr lang="en-US" dirty="0" smtClean="0"/>
+              <a:t>)</a:t>
+            </a:r>
+          </a:p>
+          <a:p>
+            <a:pPr lvl="1"/>
+            <a:r>
+              <a:rPr lang="en-US" dirty="0" smtClean="0"/>
+              <a:t>STU01 </a:t>
+            </a:r>
+            <a:r>
+              <a:rPr lang="en-US" dirty="0"/>
+              <a:t>– </a:t>
+            </a:r>
+            <a:r>
+              <a:rPr lang="en-US" dirty="0" err="1"/>
+              <a:t>Registro</a:t>
+            </a:r>
+            <a:r>
+              <a:rPr lang="en-US" dirty="0"/>
+              <a:t> e </a:t>
+            </a:r>
+            <a:r>
+              <a:rPr lang="en-US" dirty="0" err="1"/>
+              <a:t>inicio</a:t>
+            </a:r>
+            <a:r>
+              <a:rPr lang="en-US" dirty="0"/>
+              <a:t> de </a:t>
+            </a:r>
+            <a:r>
+              <a:rPr lang="en-US" dirty="0" smtClean="0"/>
+              <a:t>session</a:t>
+            </a:r>
+          </a:p>
+          <a:p>
+            <a:pPr lvl="1"/>
+            <a:r>
+              <a:rPr lang="en-US" dirty="0" smtClean="0"/>
+              <a:t>STU02 </a:t>
+            </a:r>
+            <a:r>
+              <a:rPr lang="en-US" dirty="0"/>
+              <a:t>– </a:t>
+            </a:r>
+            <a:r>
+              <a:rPr lang="en-US" dirty="0" err="1"/>
+              <a:t>Ver</a:t>
+            </a:r>
+            <a:r>
+              <a:rPr lang="en-US" dirty="0"/>
+              <a:t> </a:t>
+            </a:r>
+            <a:r>
+              <a:rPr lang="en-US" dirty="0" err="1"/>
+              <a:t>mis</a:t>
+            </a:r>
+            <a:r>
+              <a:rPr lang="en-US" dirty="0"/>
+              <a:t> </a:t>
+            </a:r>
+            <a:r>
+              <a:rPr lang="en-US" dirty="0" err="1" smtClean="0"/>
+              <a:t>cursos</a:t>
+            </a:r>
+            <a:endParaRPr lang="en-US" dirty="0" smtClean="0"/>
+          </a:p>
+          <a:p>
+            <a:pPr lvl="1"/>
+            <a:r>
+              <a:rPr lang="en-US" dirty="0" smtClean="0"/>
+              <a:t>STU03 </a:t>
+            </a:r>
+            <a:r>
+              <a:rPr lang="en-US" dirty="0"/>
+              <a:t>– </a:t>
+            </a:r>
+            <a:r>
+              <a:rPr lang="en-US" dirty="0" err="1"/>
+              <a:t>Ver</a:t>
+            </a:r>
+            <a:r>
+              <a:rPr lang="en-US" dirty="0"/>
+              <a:t> </a:t>
+            </a:r>
+            <a:r>
+              <a:rPr lang="en-US" dirty="0" err="1"/>
+              <a:t>temas</a:t>
+            </a:r>
+            <a:r>
+              <a:rPr lang="en-US" dirty="0"/>
+              <a:t> de un </a:t>
+            </a:r>
+            <a:r>
+              <a:rPr lang="en-US" dirty="0" err="1" smtClean="0"/>
+              <a:t>curso</a:t>
+            </a:r>
+            <a:endParaRPr lang="en-US" dirty="0" smtClean="0"/>
+          </a:p>
+          <a:p>
+            <a:pPr lvl="1"/>
+            <a:r>
+              <a:rPr lang="en-US" dirty="0" smtClean="0"/>
+              <a:t>STU04 </a:t>
+            </a:r>
+            <a:r>
+              <a:rPr lang="en-US" dirty="0"/>
+              <a:t>– </a:t>
+            </a:r>
+            <a:r>
+              <a:rPr lang="en-US" dirty="0" err="1"/>
+              <a:t>Ver</a:t>
+            </a:r>
+            <a:r>
+              <a:rPr lang="en-US" dirty="0"/>
+              <a:t> </a:t>
+            </a:r>
+            <a:r>
+              <a:rPr lang="en-US" dirty="0" err="1"/>
+              <a:t>textos</a:t>
+            </a:r>
+            <a:r>
+              <a:rPr lang="en-US" dirty="0"/>
+              <a:t> de un </a:t>
+            </a:r>
+            <a:r>
+              <a:rPr lang="en-US" dirty="0" err="1" smtClean="0"/>
+              <a:t>tema</a:t>
+            </a:r>
+            <a:endParaRPr lang="en-US" dirty="0" smtClean="0"/>
+          </a:p>
+          <a:p>
+            <a:pPr lvl="1"/>
+            <a:r>
+              <a:rPr lang="en-US" dirty="0" smtClean="0"/>
+              <a:t>STU05 </a:t>
+            </a:r>
+            <a:r>
+              <a:rPr lang="en-US" dirty="0"/>
+              <a:t>– Leer </a:t>
+            </a:r>
+            <a:r>
+              <a:rPr lang="en-US" dirty="0" err="1"/>
+              <a:t>texto</a:t>
+            </a:r>
+            <a:r>
+              <a:rPr lang="en-US" dirty="0"/>
+              <a:t> </a:t>
+            </a:r>
+            <a:r>
+              <a:rPr lang="en-US" dirty="0" err="1"/>
+              <a:t>en</a:t>
+            </a:r>
+            <a:r>
+              <a:rPr lang="en-US" dirty="0"/>
+              <a:t> </a:t>
+            </a:r>
+            <a:r>
+              <a:rPr lang="en-US" dirty="0" smtClean="0"/>
+              <a:t>visor</a:t>
+            </a:r>
+          </a:p>
+          <a:p>
+            <a:r>
+              <a:rPr lang="en-US" dirty="0"/>
+              <a:t>EPIC02 – DOCENTE (DOC)</a:t>
+            </a:r>
+          </a:p>
+          <a:p>
+            <a:pPr lvl="1"/>
+            <a:r>
+              <a:rPr lang="en-US" dirty="0"/>
+              <a:t>DOC01 – </a:t>
+            </a:r>
+            <a:r>
+              <a:rPr lang="en-US" dirty="0" err="1"/>
+              <a:t>Registro</a:t>
+            </a:r>
+            <a:r>
+              <a:rPr lang="en-US" dirty="0"/>
+              <a:t> e </a:t>
+            </a:r>
+            <a:r>
+              <a:rPr lang="en-US" dirty="0" err="1"/>
+              <a:t>inicio</a:t>
+            </a:r>
+            <a:r>
+              <a:rPr lang="en-US" dirty="0"/>
+              <a:t> de session</a:t>
+            </a:r>
+          </a:p>
+          <a:p>
+            <a:pPr lvl="1"/>
+            <a:r>
+              <a:rPr lang="en-US" dirty="0"/>
+              <a:t>DOC02 – </a:t>
+            </a:r>
+            <a:r>
+              <a:rPr lang="en-US" dirty="0" err="1"/>
+              <a:t>Crear</a:t>
+            </a:r>
+            <a:r>
+              <a:rPr lang="en-US" dirty="0"/>
+              <a:t>/</a:t>
+            </a:r>
+            <a:r>
+              <a:rPr lang="en-US" dirty="0" err="1"/>
+              <a:t>gestionar</a:t>
+            </a:r>
+            <a:r>
+              <a:rPr lang="en-US" dirty="0"/>
+              <a:t> </a:t>
+            </a:r>
+            <a:r>
+              <a:rPr lang="en-US" dirty="0" err="1"/>
+              <a:t>cursos</a:t>
+            </a:r>
+            <a:endParaRPr lang="en-US" dirty="0"/>
+          </a:p>
+          <a:p>
+            <a:pPr lvl="1"/>
+            <a:r>
+              <a:rPr lang="en-US" dirty="0"/>
+              <a:t>DOC03 – </a:t>
+            </a:r>
+            <a:r>
+              <a:rPr lang="en-US" dirty="0" err="1"/>
+              <a:t>Crear</a:t>
+            </a:r>
+            <a:r>
+              <a:rPr lang="en-US" dirty="0"/>
+              <a:t>/</a:t>
+            </a:r>
+            <a:r>
+              <a:rPr lang="en-US" dirty="0" err="1"/>
+              <a:t>gestionar</a:t>
+            </a:r>
+            <a:r>
+              <a:rPr lang="en-US" dirty="0"/>
+              <a:t> </a:t>
+            </a:r>
+            <a:r>
+              <a:rPr lang="en-US" dirty="0" err="1"/>
+              <a:t>temas</a:t>
+            </a:r>
+            <a:endParaRPr lang="en-US" dirty="0"/>
+          </a:p>
+          <a:p>
+            <a:r>
+              <a:rPr lang="en-US" dirty="0"/>
+              <a:t>EPIC03 – ADMINISTRADOR (ADM)</a:t>
+            </a:r>
+          </a:p>
+          <a:p>
+            <a:pPr lvl="1"/>
+            <a:r>
+              <a:rPr lang="en-US" dirty="0"/>
+              <a:t>ADM01 – </a:t>
+            </a:r>
+            <a:r>
+              <a:rPr lang="en-US" dirty="0" err="1"/>
+              <a:t>Gestión</a:t>
+            </a:r>
+            <a:r>
+              <a:rPr lang="en-US" dirty="0"/>
+              <a:t> de </a:t>
+            </a:r>
+            <a:r>
+              <a:rPr lang="en-US" dirty="0" err="1"/>
+              <a:t>usuarios</a:t>
+            </a:r>
+            <a:r>
+              <a:rPr lang="en-US" dirty="0"/>
+              <a:t> y roles</a:t>
+            </a:r>
+          </a:p>
+          <a:p>
+            <a:pPr lvl="1"/>
+            <a:r>
+              <a:rPr lang="en-US" dirty="0"/>
+              <a:t>ADM02 – Panel global de </a:t>
+            </a:r>
+            <a:r>
+              <a:rPr lang="en-US" dirty="0" err="1"/>
+              <a:t>desempeño</a:t>
+            </a:r>
+            <a:endParaRPr lang="en-US" dirty="0"/>
+          </a:p>
+          <a:p>
+            <a:pPr marL="457200" lvl="1" indent="0">
+              <a:buNone/>
+            </a:pPr>
+            <a:endParaRPr lang="en-US" dirty="0" smtClean="0"/>
+          </a:p>
+        </p:txBody>
+      </p:sp>
+    </p:spTree>
+    <p:extLst>
+      <p:ext uri="{BB962C8B-B14F-4D97-AF65-F5344CB8AC3E}">
+        <p14:creationId xmlns:p14="http://schemas.microsoft.com/office/powerpoint/2010/main" val="2344287052"/>
+      </p:ext>
+    </p:extLst>
+  </p:cSld>
+  <p:clrMapOvr>
+    <a:masterClrMapping/>
+  </p:clrMapOvr>
+</p:sld>
+</file>
+
+<file path=ppt/slides/slide5.xml><?xml version="1.0" encoding="utf-8"?>
+<p:sld xmlns:a="http://schemas.openxmlformats.org/drawingml/2006/main" xmlns:r="http://schemas.openxmlformats.org/officeDocument/2006/relationships" xmlns:p="http://schemas.openxmlformats.org/presentationml/2006/main">
+  <p:cSld>
+    <p:spTree>
+      <p:nvGrpSpPr>
+        <p:cNvPr id="1" name=""/>
+        <p:cNvGrpSpPr/>
+        <p:nvPr/>
+      </p:nvGrpSpPr>
+      <p:grpSpPr>
+        <a:xfrm>
+          <a:off x="0" y="0"/>
+          <a:ext cx="0" cy="0"/>
+          <a:chOff x="0" y="0"/>
+          <a:chExt cx="0" cy="0"/>
+        </a:xfrm>
+      </p:grpSpPr>
+      <p:sp>
+        <p:nvSpPr>
+          <p:cNvPr id="2" name="Título 1"/>
+          <p:cNvSpPr>
+            <a:spLocks noGrp="1"/>
+          </p:cNvSpPr>
+          <p:nvPr>
+            <p:ph type="title"/>
+          </p:nvPr>
+        </p:nvSpPr>
+        <p:spPr/>
+        <p:txBody>
+          <a:bodyPr/>
+          <a:lstStyle/>
+          <a:p>
+            <a:r>
+              <a:rPr lang="en-US" dirty="0" err="1"/>
+              <a:t>Demostración</a:t>
+            </a:r>
+            <a:r>
+              <a:rPr lang="en-US" dirty="0"/>
+              <a:t> del </a:t>
+            </a:r>
+            <a:r>
+              <a:rPr lang="en-US" dirty="0" err="1"/>
+              <a:t>trabajo</a:t>
+            </a:r>
+            <a:r>
+              <a:rPr lang="en-US" dirty="0"/>
+              <a:t> </a:t>
+            </a:r>
+            <a:r>
+              <a:rPr lang="en-US" dirty="0" err="1"/>
+              <a:t>completado</a:t>
+            </a:r>
+            <a:endParaRPr lang="en-US" dirty="0"/>
+          </a:p>
+        </p:txBody>
+      </p:sp>
+      <p:sp>
+        <p:nvSpPr>
+          <p:cNvPr id="3" name="Marcador de contenido 2"/>
+          <p:cNvSpPr>
+            <a:spLocks noGrp="1"/>
+          </p:cNvSpPr>
+          <p:nvPr>
+            <p:ph idx="1"/>
+          </p:nvPr>
+        </p:nvSpPr>
+        <p:spPr/>
+        <p:txBody>
+          <a:bodyPr>
+            <a:normAutofit fontScale="92500" lnSpcReduction="10000"/>
+          </a:bodyPr>
+          <a:lstStyle/>
+          <a:p>
+            <a:r>
+              <a:rPr lang="es-MX" dirty="0"/>
+              <a:t>Módulo </a:t>
+            </a:r>
+            <a:r>
+              <a:rPr lang="es-MX" dirty="0" smtClean="0"/>
+              <a:t>Estudiante</a:t>
+            </a:r>
+          </a:p>
+          <a:p>
+            <a:pPr lvl="1"/>
+            <a:r>
+              <a:rPr lang="es-MX" dirty="0" smtClean="0"/>
+              <a:t>Registro</a:t>
+            </a:r>
+            <a:r>
+              <a:rPr lang="es-MX" dirty="0"/>
+              <a:t>, </a:t>
+            </a:r>
+            <a:r>
+              <a:rPr lang="es-MX" dirty="0" err="1"/>
+              <a:t>login</a:t>
+            </a:r>
+            <a:r>
+              <a:rPr lang="es-MX" dirty="0"/>
+              <a:t> y acceso a “Mis cursos</a:t>
+            </a:r>
+            <a:r>
+              <a:rPr lang="es-MX" dirty="0" smtClean="0"/>
+              <a:t>”.</a:t>
+            </a:r>
+          </a:p>
+          <a:p>
+            <a:pPr lvl="1"/>
+            <a:r>
+              <a:rPr lang="es-MX" dirty="0" smtClean="0"/>
+              <a:t>Visualización </a:t>
+            </a:r>
+            <a:r>
+              <a:rPr lang="es-MX" dirty="0"/>
+              <a:t>de cursos y temas</a:t>
+            </a:r>
+            <a:r>
+              <a:rPr lang="es-MX" dirty="0" smtClean="0"/>
+              <a:t>.</a:t>
+            </a:r>
+          </a:p>
+          <a:p>
+            <a:pPr lvl="1"/>
+            <a:r>
+              <a:rPr lang="es-MX" dirty="0" smtClean="0"/>
+              <a:t>Lectura </a:t>
+            </a:r>
+            <a:r>
+              <a:rPr lang="es-MX" dirty="0"/>
+              <a:t>en visor con modo oscuro y marcador de progreso</a:t>
+            </a:r>
+            <a:r>
+              <a:rPr lang="es-MX" dirty="0" smtClean="0"/>
+              <a:t>.</a:t>
+            </a:r>
+          </a:p>
+          <a:p>
+            <a:r>
+              <a:rPr lang="es-MX" dirty="0" smtClean="0"/>
+              <a:t>Módulo Docente</a:t>
+            </a:r>
+          </a:p>
+          <a:p>
+            <a:pPr lvl="1"/>
+            <a:r>
+              <a:rPr lang="es-MX" dirty="0" smtClean="0"/>
+              <a:t>Creación </a:t>
+            </a:r>
+            <a:r>
+              <a:rPr lang="es-MX" dirty="0"/>
+              <a:t>y gestión de cursos y temas</a:t>
+            </a:r>
+            <a:r>
+              <a:rPr lang="es-MX" dirty="0" smtClean="0"/>
+              <a:t>.</a:t>
+            </a:r>
+          </a:p>
+          <a:p>
+            <a:pPr lvl="1"/>
+            <a:r>
+              <a:rPr lang="es-MX" dirty="0" smtClean="0"/>
+              <a:t>Asignación </a:t>
+            </a:r>
+            <a:r>
+              <a:rPr lang="es-MX" dirty="0"/>
+              <a:t>de textos a un tema</a:t>
+            </a:r>
+            <a:r>
+              <a:rPr lang="es-MX" dirty="0" smtClean="0"/>
+              <a:t>.</a:t>
+            </a:r>
+          </a:p>
+          <a:p>
+            <a:r>
+              <a:rPr lang="es-MX" dirty="0" smtClean="0"/>
+              <a:t>Módulo Administrador</a:t>
+            </a:r>
+          </a:p>
+          <a:p>
+            <a:pPr lvl="1"/>
+            <a:r>
+              <a:rPr lang="es-MX" dirty="0" smtClean="0"/>
+              <a:t>Gestión </a:t>
+            </a:r>
+            <a:r>
+              <a:rPr lang="es-MX" dirty="0"/>
+              <a:t>de usuarios (roles y permisos</a:t>
+            </a:r>
+            <a:r>
+              <a:rPr lang="es-MX" dirty="0" smtClean="0"/>
+              <a:t>).</a:t>
+            </a:r>
+          </a:p>
+          <a:p>
+            <a:pPr lvl="1"/>
+            <a:r>
+              <a:rPr lang="es-MX" dirty="0" smtClean="0"/>
+              <a:t>Visualización </a:t>
+            </a:r>
+            <a:r>
+              <a:rPr lang="es-MX" dirty="0"/>
+              <a:t>de métricas globales por curso e institución.</a:t>
+            </a:r>
+            <a:endParaRPr lang="en-US" dirty="0"/>
+          </a:p>
+        </p:txBody>
+      </p:sp>
+    </p:spTree>
+    <p:extLst>
+      <p:ext uri="{BB962C8B-B14F-4D97-AF65-F5344CB8AC3E}">
+        <p14:creationId xmlns:p14="http://schemas.microsoft.com/office/powerpoint/2010/main" val="3910243810"/>
+      </p:ext>
+    </p:extLst>
+  </p:cSld>
+  <p:clrMapOvr>
+    <a:masterClrMapping/>
+  </p:clrMapOvr>
+</p:sld>
+</file>
+
+<file path=ppt/slides/slide6.xml><?xml version="1.0" encoding="utf-8"?>
+<p:sld xmlns:a="http://schemas.openxmlformats.org/drawingml/2006/main" xmlns:r="http://schemas.openxmlformats.org/officeDocument/2006/relationships" xmlns:p="http://schemas.openxmlformats.org/presentationml/2006/main">
+  <p:cSld>
+    <p:spTree>
+      <p:nvGrpSpPr>
+        <p:cNvPr id="1" name=""/>
+        <p:cNvGrpSpPr/>
+        <p:nvPr/>
+      </p:nvGrpSpPr>
+      <p:grpSpPr>
+        <a:xfrm>
+          <a:off x="0" y="0"/>
+          <a:ext cx="0" cy="0"/>
+          <a:chOff x="0" y="0"/>
+          <a:chExt cx="0" cy="0"/>
+        </a:xfrm>
+      </p:grpSpPr>
+      <p:sp>
+        <p:nvSpPr>
+          <p:cNvPr id="2" name="Título 1"/>
+          <p:cNvSpPr>
+            <a:spLocks noGrp="1"/>
+          </p:cNvSpPr>
+          <p:nvPr>
+            <p:ph type="title"/>
+          </p:nvPr>
+        </p:nvSpPr>
+        <p:spPr/>
+        <p:txBody>
+          <a:bodyPr/>
+          <a:lstStyle/>
+          <a:p>
+            <a:r>
+              <a:rPr lang="en-US" dirty="0" err="1"/>
+              <a:t>Pendientes</a:t>
+            </a:r>
+            <a:endParaRPr lang="en-US" dirty="0"/>
+          </a:p>
+        </p:txBody>
+      </p:sp>
+      <p:sp>
+        <p:nvSpPr>
+          <p:cNvPr id="3" name="Marcador de contenido 2"/>
+          <p:cNvSpPr>
+            <a:spLocks noGrp="1"/>
+          </p:cNvSpPr>
+          <p:nvPr>
+            <p:ph idx="1"/>
+          </p:nvPr>
+        </p:nvSpPr>
+        <p:spPr/>
+        <p:txBody>
+          <a:bodyPr>
+            <a:normAutofit/>
+          </a:bodyPr>
+          <a:lstStyle/>
+          <a:p>
+            <a:r>
+              <a:rPr lang="en-US" dirty="0"/>
+              <a:t>EPIC01 – </a:t>
+            </a:r>
+            <a:r>
+              <a:rPr lang="en-US" dirty="0" err="1" smtClean="0"/>
+              <a:t>Estudiante</a:t>
+            </a:r>
+            <a:endParaRPr lang="en-US" dirty="0" smtClean="0"/>
+          </a:p>
+          <a:p>
+            <a:pPr lvl="1"/>
+            <a:r>
+              <a:rPr lang="en-US" dirty="0" smtClean="0"/>
+              <a:t>STU06</a:t>
+            </a:r>
+            <a:r>
+              <a:rPr lang="en-US" dirty="0"/>
+              <a:t>: </a:t>
+            </a:r>
+            <a:r>
+              <a:rPr lang="en-US" dirty="0" err="1"/>
+              <a:t>Preguntas</a:t>
+            </a:r>
+            <a:r>
+              <a:rPr lang="en-US" dirty="0"/>
+              <a:t> </a:t>
+            </a:r>
+            <a:r>
+              <a:rPr lang="en-US" dirty="0" err="1"/>
+              <a:t>generadas</a:t>
+            </a:r>
+            <a:r>
+              <a:rPr lang="en-US" dirty="0"/>
+              <a:t> (</a:t>
+            </a:r>
+            <a:r>
+              <a:rPr lang="en-US" dirty="0" err="1"/>
+              <a:t>pensamiento</a:t>
+            </a:r>
+            <a:r>
+              <a:rPr lang="en-US" dirty="0"/>
+              <a:t> </a:t>
+            </a:r>
+            <a:r>
+              <a:rPr lang="en-US" dirty="0" err="1"/>
+              <a:t>crítico</a:t>
+            </a:r>
+            <a:r>
+              <a:rPr lang="en-US" dirty="0" smtClean="0"/>
+              <a:t>)</a:t>
+            </a:r>
+          </a:p>
+          <a:p>
+            <a:pPr lvl="1"/>
+            <a:r>
+              <a:rPr lang="en-US" dirty="0" smtClean="0"/>
+              <a:t>STU07</a:t>
+            </a:r>
+            <a:r>
+              <a:rPr lang="en-US" dirty="0"/>
+              <a:t>: Responder </a:t>
+            </a:r>
+            <a:r>
+              <a:rPr lang="en-US" dirty="0" err="1"/>
+              <a:t>preguntas</a:t>
+            </a:r>
+            <a:r>
+              <a:rPr lang="en-US" dirty="0"/>
+              <a:t> </a:t>
+            </a:r>
+            <a:r>
+              <a:rPr lang="en-US" dirty="0" err="1"/>
+              <a:t>en</a:t>
+            </a:r>
+            <a:r>
+              <a:rPr lang="en-US" dirty="0"/>
+              <a:t> la </a:t>
+            </a:r>
+            <a:r>
+              <a:rPr lang="en-US" dirty="0" smtClean="0"/>
+              <a:t>app</a:t>
+            </a:r>
+          </a:p>
+          <a:p>
+            <a:pPr lvl="1"/>
+            <a:r>
+              <a:rPr lang="en-US" dirty="0" smtClean="0"/>
+              <a:t>STU08</a:t>
+            </a:r>
+            <a:r>
+              <a:rPr lang="en-US" dirty="0"/>
+              <a:t>: </a:t>
+            </a:r>
+            <a:r>
+              <a:rPr lang="en-US" dirty="0" err="1"/>
+              <a:t>Detección</a:t>
+            </a:r>
+            <a:r>
+              <a:rPr lang="en-US" dirty="0"/>
+              <a:t> de </a:t>
+            </a:r>
+            <a:r>
+              <a:rPr lang="en-US" dirty="0" err="1" smtClean="0"/>
+              <a:t>sesgos</a:t>
+            </a:r>
+            <a:r>
+              <a:rPr lang="en-US" dirty="0" smtClean="0"/>
+              <a:t>/</a:t>
+            </a:r>
+            <a:r>
+              <a:rPr lang="en-US" dirty="0" err="1" smtClean="0"/>
+              <a:t>falacias</a:t>
+            </a:r>
+            <a:endParaRPr lang="en-US" dirty="0" smtClean="0"/>
+          </a:p>
+          <a:p>
+            <a:r>
+              <a:rPr lang="en-US" dirty="0" smtClean="0"/>
+              <a:t>EPIC02 </a:t>
+            </a:r>
+            <a:r>
+              <a:rPr lang="en-US" dirty="0"/>
+              <a:t>– </a:t>
+            </a:r>
+            <a:r>
+              <a:rPr lang="en-US" dirty="0" err="1" smtClean="0"/>
+              <a:t>Docente</a:t>
+            </a:r>
+            <a:endParaRPr lang="en-US" dirty="0" smtClean="0"/>
+          </a:p>
+          <a:p>
+            <a:pPr lvl="1"/>
+            <a:r>
+              <a:rPr lang="en-US" dirty="0" smtClean="0"/>
+              <a:t>DOC05</a:t>
+            </a:r>
+            <a:r>
+              <a:rPr lang="en-US" dirty="0"/>
+              <a:t>: </a:t>
+            </a:r>
+            <a:r>
+              <a:rPr lang="en-US" dirty="0" err="1"/>
+              <a:t>Configurar</a:t>
+            </a:r>
+            <a:r>
+              <a:rPr lang="en-US" dirty="0"/>
+              <a:t> </a:t>
+            </a:r>
+            <a:r>
+              <a:rPr lang="en-US" dirty="0" err="1"/>
+              <a:t>objetivos</a:t>
+            </a:r>
+            <a:r>
+              <a:rPr lang="en-US" dirty="0"/>
+              <a:t> de </a:t>
+            </a:r>
+            <a:r>
+              <a:rPr lang="en-US" dirty="0" err="1"/>
+              <a:t>pensamiento</a:t>
+            </a:r>
+            <a:r>
+              <a:rPr lang="en-US" dirty="0"/>
+              <a:t> </a:t>
+            </a:r>
+            <a:r>
+              <a:rPr lang="en-US" dirty="0" err="1" smtClean="0"/>
+              <a:t>crítico</a:t>
+            </a:r>
+            <a:endParaRPr lang="en-US" dirty="0" smtClean="0"/>
+          </a:p>
+          <a:p>
+            <a:pPr lvl="1"/>
+            <a:r>
+              <a:rPr lang="en-US" dirty="0" smtClean="0"/>
+              <a:t>DOC08</a:t>
+            </a:r>
+            <a:r>
+              <a:rPr lang="en-US" dirty="0"/>
+              <a:t>: </a:t>
+            </a:r>
+            <a:r>
+              <a:rPr lang="en-US" dirty="0" err="1"/>
+              <a:t>Progreso</a:t>
+            </a:r>
+            <a:r>
+              <a:rPr lang="en-US" dirty="0"/>
+              <a:t> </a:t>
+            </a:r>
+            <a:r>
+              <a:rPr lang="en-US" dirty="0" err="1"/>
+              <a:t>por</a:t>
+            </a:r>
+            <a:r>
+              <a:rPr lang="en-US" dirty="0"/>
+              <a:t> </a:t>
+            </a:r>
+            <a:r>
+              <a:rPr lang="en-US" dirty="0" err="1" smtClean="0"/>
+              <a:t>estudiante</a:t>
+            </a:r>
+            <a:endParaRPr lang="en-US" dirty="0" smtClean="0"/>
+          </a:p>
+          <a:p>
+            <a:r>
+              <a:rPr lang="en-US" dirty="0" smtClean="0"/>
+              <a:t>EPIC03 </a:t>
+            </a:r>
+            <a:r>
+              <a:rPr lang="en-US" dirty="0"/>
+              <a:t>– </a:t>
+            </a:r>
+            <a:r>
+              <a:rPr lang="en-US" dirty="0" err="1" smtClean="0"/>
+              <a:t>Administrador</a:t>
+            </a:r>
+            <a:endParaRPr lang="en-US" dirty="0" smtClean="0"/>
+          </a:p>
+          <a:p>
+            <a:pPr lvl="1"/>
+            <a:r>
+              <a:rPr lang="en-US" dirty="0" smtClean="0"/>
+              <a:t>ADM05</a:t>
+            </a:r>
+            <a:r>
+              <a:rPr lang="en-US" dirty="0"/>
+              <a:t>: </a:t>
+            </a:r>
+            <a:r>
+              <a:rPr lang="en-US" dirty="0" err="1"/>
+              <a:t>Integraciones</a:t>
+            </a:r>
+            <a:r>
+              <a:rPr lang="en-US" dirty="0"/>
+              <a:t> </a:t>
+            </a:r>
+            <a:r>
+              <a:rPr lang="en-US" dirty="0" err="1"/>
+              <a:t>institucionales</a:t>
+            </a:r>
+            <a:r>
+              <a:rPr lang="en-US" dirty="0"/>
+              <a:t> (SSO/LMS)</a:t>
+            </a:r>
+          </a:p>
+        </p:txBody>
+      </p:sp>
+    </p:spTree>
+    <p:extLst>
+      <p:ext uri="{BB962C8B-B14F-4D97-AF65-F5344CB8AC3E}">
+        <p14:creationId xmlns:p14="http://schemas.microsoft.com/office/powerpoint/2010/main" val="2159950574"/>
       </p:ext>
     </p:extLst>
   </p:cSld>
@@ -21555,34 +22309,34 @@
         <a:sysClr val="window" lastClr="FFFFFF"/>
       </a:lt1>
       <a:dk2>
-        <a:srgbClr val="1E5155"/>
+        <a:srgbClr val="EE5818"/>
       </a:dk2>
       <a:lt2>
         <a:srgbClr val="EBEBEB"/>
       </a:lt2>
       <a:accent1>
-        <a:srgbClr val="B01513"/>
+        <a:srgbClr val="F5A408"/>
       </a:accent1>
       <a:accent2>
-        <a:srgbClr val="EA6312"/>
+        <a:srgbClr val="FA731A"/>
       </a:accent2>
       <a:accent3>
-        <a:srgbClr val="E6B729"/>
+        <a:srgbClr val="AB9281"/>
       </a:accent3>
       <a:accent4>
-        <a:srgbClr val="6AAC90"/>
+        <a:srgbClr val="A18CD0"/>
       </a:accent4>
       <a:accent5>
-        <a:srgbClr val="5F9C9D"/>
+        <a:srgbClr val="8EBBD2"/>
       </a:accent5>
       <a:accent6>
-        <a:srgbClr val="9E5E9B"/>
+        <a:srgbClr val="ACC995"/>
       </a:accent6>
       <a:hlink>
-        <a:srgbClr val="58C1BA"/>
+        <a:srgbClr val="FAC96A"/>
       </a:hlink>
       <a:folHlink>
-        <a:srgbClr val="9DD0CB"/>
+        <a:srgbClr val="FCDB9B"/>
       </a:folHlink>
     </a:clrScheme>
     <a:fontScheme name="Ion">
@@ -21758,19 +22512,19 @@
           <a:gsLst>
             <a:gs pos="0">
               <a:schemeClr val="phClr">
-                <a:tint val="97000"/>
-                <a:hueMod val="88000"/>
-                <a:satMod val="130000"/>
-                <a:lumMod val="124000"/>
+                <a:tint val="98000"/>
+                <a:hueMod val="104000"/>
+                <a:satMod val="128000"/>
+                <a:lumMod val="104000"/>
               </a:schemeClr>
             </a:gs>
             <a:gs pos="100000">
               <a:schemeClr val="phClr">
-                <a:tint val="96000"/>
-                <a:shade val="88000"/>
-                <a:hueMod val="108000"/>
+                <a:tint val="100000"/>
+                <a:shade val="76000"/>
+                <a:hueMod val="89000"/>
                 <a:satMod val="164000"/>
-                <a:lumMod val="76000"/>
+                <a:lumMod val="68000"/>
               </a:schemeClr>
             </a:gs>
           </a:gsLst>
@@ -21782,16 +22536,14 @@
           <a:blip xmlns:r="http://schemas.openxmlformats.org/officeDocument/2006/relationships" r:embed="rId1">
             <a:duotone>
               <a:schemeClr val="phClr">
-                <a:shade val="69000"/>
-                <a:hueMod val="108000"/>
-                <a:satMod val="164000"/>
-                <a:lumMod val="74000"/>
+                <a:shade val="42000"/>
+                <a:hueMod val="42000"/>
+                <a:satMod val="124000"/>
+                <a:lumMod val="62000"/>
               </a:schemeClr>
               <a:schemeClr val="phClr">
                 <a:tint val="96000"/>
-                <a:hueMod val="88000"/>
-                <a:satMod val="140000"/>
-                <a:lumMod val="132000"/>
+                <a:satMod val="130000"/>
               </a:schemeClr>
             </a:duotone>
           </a:blip>
@@ -21804,7 +22556,7 @@
   <a:extraClrSchemeLst/>
   <a:extLst>
     <a:ext uri="{05A4C25C-085E-4340-85A3-A5531E510DB2}">
-      <thm15:themeFamily xmlns:thm15="http://schemas.microsoft.com/office/thememl/2012/main" name="Ion" id="{B8441ADB-2E43-4AF7-B97A-BD870242C6A8}" vid="{292E63A9-BB86-4E3D-B92A-7223C6510D2E}"/>
+      <thm15:themeFamily xmlns:thm15="http://schemas.microsoft.com/office/thememl/2012/main" name="Ion" id="{B8441ADB-2E43-4AF7-B97A-BD870242C6A8}" vid="{5A2F9111-B2DB-470C-BA56-608F9B658826}"/>
     </a:ext>
   </a:extLst>
 </a:theme>
